--- a/presentations/Executive_Presentation_Customer_Segmentation_Cohort.pptx
+++ b/presentations/Executive_Presentation_Customer_Segmentation_Cohort.pptx
@@ -5,15 +5,15 @@
     <p:sldMasterId id="2147483648" r:id="rId1"/>
   </p:sldMasterIdLst>
   <p:sldIdLst>
-    <p:sldId id="256" r:id="rId2"/>
-    <p:sldId id="257" r:id="rId3"/>
-    <p:sldId id="258" r:id="rId4"/>
-    <p:sldId id="259" r:id="rId5"/>
-    <p:sldId id="260" r:id="rId6"/>
-    <p:sldId id="261" r:id="rId7"/>
-    <p:sldId id="262" r:id="rId8"/>
+    <p:sldId id="256" r:id="rId7"/>
+    <p:sldId id="257" r:id="rId8"/>
+    <p:sldId id="258" r:id="rId9"/>
+    <p:sldId id="259" r:id="rId10"/>
+    <p:sldId id="260" r:id="rId11"/>
+    <p:sldId id="261" r:id="rId12"/>
+    <p:sldId id="262" r:id="rId13"/>
   </p:sldIdLst>
-  <p:sldSz cx="12192000" cy="6858000"/>
+  <p:sldSz cx="12191695" cy="6858000" type="screen4x3"/>
   <p:notesSz cx="6858000" cy="9144000"/>
   <p:defaultTextStyle>
     <a:defPPr>
@@ -110,22 +110,6 @@
       </a:defRPr>
     </a:lvl9pPr>
   </p:defaultTextStyle>
-  <p:extLst>
-    <p:ext uri="{EFAFB233-063F-42B5-8137-9DF3F51BA10A}">
-      <p15:sldGuideLst xmlns:p15="http://schemas.microsoft.com/office/powerpoint/2012/main">
-        <p15:guide id="1" orient="horz" pos="2160">
-          <p15:clr>
-            <a:srgbClr val="A4A3A4"/>
-          </p15:clr>
-        </p15:guide>
-        <p15:guide id="2" pos="2880">
-          <p15:clr>
-            <a:srgbClr val="A4A3A4"/>
-          </p15:clr>
-        </p15:guide>
-      </p15:sldGuideLst>
-    </p:ext>
-  </p:extLst>
 </p:presentation>
 </file>
 
@@ -167,9 +151,10 @@
           <a:lstStyle/>
           <a:p>
             <a:r>
-              <a:rPr lang="en-US"/>
+              <a:rPr lang="en-US" smtClean="0"/>
               <a:t>Click to edit Master title style</a:t>
             </a:r>
+            <a:endParaRPr lang="en-US"/>
           </a:p>
         </p:txBody>
       </p:sp>
@@ -285,9 +270,10 @@
           </a:lstStyle>
           <a:p>
             <a:r>
-              <a:rPr lang="en-US"/>
+              <a:rPr lang="en-US" smtClean="0"/>
               <a:t>Click to edit Master subtitle style</a:t>
             </a:r>
+            <a:endParaRPr lang="en-US"/>
           </a:p>
         </p:txBody>
       </p:sp>
@@ -308,7 +294,7 @@
           <a:p>
             <a:fld id="{5BCAD085-E8A6-8845-BD4E-CB4CCA059FC4}" type="datetimeFigureOut">
               <a:rPr lang="en-US" smtClean="0"/>
-              <a:t>9/19/26</a:t>
+              <a:t>1/27/13</a:t>
             </a:fld>
             <a:endParaRPr lang="en-US"/>
           </a:p>
@@ -402,9 +388,10 @@
           <a:lstStyle/>
           <a:p>
             <a:r>
-              <a:rPr lang="en-US"/>
+              <a:rPr lang="en-US" smtClean="0"/>
               <a:t>Click to edit Master title style</a:t>
             </a:r>
+            <a:endParaRPr lang="en-US"/>
           </a:p>
         </p:txBody>
       </p:sp>
@@ -425,37 +412,38 @@
           <a:p>
             <a:pPr lvl="0"/>
             <a:r>
-              <a:rPr lang="en-US"/>
+              <a:rPr lang="en-US" smtClean="0"/>
               <a:t>Click to edit Master text styles</a:t>
             </a:r>
           </a:p>
           <a:p>
             <a:pPr lvl="1"/>
             <a:r>
-              <a:rPr lang="en-US"/>
+              <a:rPr lang="en-US" smtClean="0"/>
               <a:t>Second level</a:t>
             </a:r>
           </a:p>
           <a:p>
             <a:pPr lvl="2"/>
             <a:r>
-              <a:rPr lang="en-US"/>
+              <a:rPr lang="en-US" smtClean="0"/>
               <a:t>Third level</a:t>
             </a:r>
           </a:p>
           <a:p>
             <a:pPr lvl="3"/>
             <a:r>
-              <a:rPr lang="en-US"/>
+              <a:rPr lang="en-US" smtClean="0"/>
               <a:t>Fourth level</a:t>
             </a:r>
           </a:p>
           <a:p>
             <a:pPr lvl="4"/>
             <a:r>
-              <a:rPr lang="en-US"/>
+              <a:rPr lang="en-US" smtClean="0"/>
               <a:t>Fifth level</a:t>
             </a:r>
+            <a:endParaRPr lang="en-US"/>
           </a:p>
         </p:txBody>
       </p:sp>
@@ -476,7 +464,7 @@
           <a:p>
             <a:fld id="{5BCAD085-E8A6-8845-BD4E-CB4CCA059FC4}" type="datetimeFigureOut">
               <a:rPr lang="en-US" smtClean="0"/>
-              <a:t>9/19/26</a:t>
+              <a:t>1/27/13</a:t>
             </a:fld>
             <a:endParaRPr lang="en-US"/>
           </a:p>
@@ -575,9 +563,10 @@
           <a:lstStyle/>
           <a:p>
             <a:r>
-              <a:rPr lang="en-US"/>
+              <a:rPr lang="en-US" smtClean="0"/>
               <a:t>Click to edit Master title style</a:t>
             </a:r>
+            <a:endParaRPr lang="en-US"/>
           </a:p>
         </p:txBody>
       </p:sp>
@@ -603,37 +592,38 @@
           <a:p>
             <a:pPr lvl="0"/>
             <a:r>
-              <a:rPr lang="en-US"/>
+              <a:rPr lang="en-US" smtClean="0"/>
               <a:t>Click to edit Master text styles</a:t>
             </a:r>
           </a:p>
           <a:p>
             <a:pPr lvl="1"/>
             <a:r>
-              <a:rPr lang="en-US"/>
+              <a:rPr lang="en-US" smtClean="0"/>
               <a:t>Second level</a:t>
             </a:r>
           </a:p>
           <a:p>
             <a:pPr lvl="2"/>
             <a:r>
-              <a:rPr lang="en-US"/>
+              <a:rPr lang="en-US" smtClean="0"/>
               <a:t>Third level</a:t>
             </a:r>
           </a:p>
           <a:p>
             <a:pPr lvl="3"/>
             <a:r>
-              <a:rPr lang="en-US"/>
+              <a:rPr lang="en-US" smtClean="0"/>
               <a:t>Fourth level</a:t>
             </a:r>
           </a:p>
           <a:p>
             <a:pPr lvl="4"/>
             <a:r>
-              <a:rPr lang="en-US"/>
+              <a:rPr lang="en-US" smtClean="0"/>
               <a:t>Fifth level</a:t>
             </a:r>
+            <a:endParaRPr lang="en-US"/>
           </a:p>
         </p:txBody>
       </p:sp>
@@ -654,7 +644,7 @@
           <a:p>
             <a:fld id="{5BCAD085-E8A6-8845-BD4E-CB4CCA059FC4}" type="datetimeFigureOut">
               <a:rPr lang="en-US" smtClean="0"/>
-              <a:t>9/19/26</a:t>
+              <a:t>1/27/13</a:t>
             </a:fld>
             <a:endParaRPr lang="en-US"/>
           </a:p>
@@ -748,9 +738,10 @@
           <a:lstStyle/>
           <a:p>
             <a:r>
-              <a:rPr lang="en-US"/>
+              <a:rPr lang="en-US" smtClean="0"/>
               <a:t>Click to edit Master title style</a:t>
             </a:r>
+            <a:endParaRPr lang="en-US"/>
           </a:p>
         </p:txBody>
       </p:sp>
@@ -771,37 +762,38 @@
           <a:p>
             <a:pPr lvl="0"/>
             <a:r>
-              <a:rPr lang="en-US"/>
+              <a:rPr lang="en-US" smtClean="0"/>
               <a:t>Click to edit Master text styles</a:t>
             </a:r>
           </a:p>
           <a:p>
             <a:pPr lvl="1"/>
             <a:r>
-              <a:rPr lang="en-US"/>
+              <a:rPr lang="en-US" smtClean="0"/>
               <a:t>Second level</a:t>
             </a:r>
           </a:p>
           <a:p>
             <a:pPr lvl="2"/>
             <a:r>
-              <a:rPr lang="en-US"/>
+              <a:rPr lang="en-US" smtClean="0"/>
               <a:t>Third level</a:t>
             </a:r>
           </a:p>
           <a:p>
             <a:pPr lvl="3"/>
             <a:r>
-              <a:rPr lang="en-US"/>
+              <a:rPr lang="en-US" smtClean="0"/>
               <a:t>Fourth level</a:t>
             </a:r>
           </a:p>
           <a:p>
             <a:pPr lvl="4"/>
             <a:r>
-              <a:rPr lang="en-US"/>
+              <a:rPr lang="en-US" smtClean="0"/>
               <a:t>Fifth level</a:t>
             </a:r>
+            <a:endParaRPr lang="en-US"/>
           </a:p>
         </p:txBody>
       </p:sp>
@@ -822,7 +814,7 @@
           <a:p>
             <a:fld id="{5BCAD085-E8A6-8845-BD4E-CB4CCA059FC4}" type="datetimeFigureOut">
               <a:rPr lang="en-US" smtClean="0"/>
-              <a:t>9/19/26</a:t>
+              <a:t>1/27/13</a:t>
             </a:fld>
             <a:endParaRPr lang="en-US"/>
           </a:p>
@@ -925,9 +917,10 @@
           </a:lstStyle>
           <a:p>
             <a:r>
-              <a:rPr lang="en-US"/>
+              <a:rPr lang="en-US" smtClean="0"/>
               <a:t>Click to edit Master title style</a:t>
             </a:r>
+            <a:endParaRPr lang="en-US"/>
           </a:p>
         </p:txBody>
       </p:sp>
@@ -1044,7 +1037,7 @@
           <a:p>
             <a:pPr lvl="0"/>
             <a:r>
-              <a:rPr lang="en-US"/>
+              <a:rPr lang="en-US" smtClean="0"/>
               <a:t>Click to edit Master text styles</a:t>
             </a:r>
           </a:p>
@@ -1067,7 +1060,7 @@
           <a:p>
             <a:fld id="{5BCAD085-E8A6-8845-BD4E-CB4CCA059FC4}" type="datetimeFigureOut">
               <a:rPr lang="en-US" smtClean="0"/>
-              <a:t>9/19/26</a:t>
+              <a:t>1/27/13</a:t>
             </a:fld>
             <a:endParaRPr lang="en-US"/>
           </a:p>
@@ -1161,9 +1154,10 @@
           <a:lstStyle/>
           <a:p>
             <a:r>
-              <a:rPr lang="en-US"/>
+              <a:rPr lang="en-US" smtClean="0"/>
               <a:t>Click to edit Master title style</a:t>
             </a:r>
+            <a:endParaRPr lang="en-US"/>
           </a:p>
         </p:txBody>
       </p:sp>
@@ -1217,37 +1211,38 @@
           <a:p>
             <a:pPr lvl="0"/>
             <a:r>
-              <a:rPr lang="en-US"/>
+              <a:rPr lang="en-US" smtClean="0"/>
               <a:t>Click to edit Master text styles</a:t>
             </a:r>
           </a:p>
           <a:p>
             <a:pPr lvl="1"/>
             <a:r>
-              <a:rPr lang="en-US"/>
+              <a:rPr lang="en-US" smtClean="0"/>
               <a:t>Second level</a:t>
             </a:r>
           </a:p>
           <a:p>
             <a:pPr lvl="2"/>
             <a:r>
-              <a:rPr lang="en-US"/>
+              <a:rPr lang="en-US" smtClean="0"/>
               <a:t>Third level</a:t>
             </a:r>
           </a:p>
           <a:p>
             <a:pPr lvl="3"/>
             <a:r>
-              <a:rPr lang="en-US"/>
+              <a:rPr lang="en-US" smtClean="0"/>
               <a:t>Fourth level</a:t>
             </a:r>
           </a:p>
           <a:p>
             <a:pPr lvl="4"/>
             <a:r>
-              <a:rPr lang="en-US"/>
+              <a:rPr lang="en-US" smtClean="0"/>
               <a:t>Fifth level</a:t>
             </a:r>
+            <a:endParaRPr lang="en-US"/>
           </a:p>
         </p:txBody>
       </p:sp>
@@ -1301,37 +1296,38 @@
           <a:p>
             <a:pPr lvl="0"/>
             <a:r>
-              <a:rPr lang="en-US"/>
+              <a:rPr lang="en-US" smtClean="0"/>
               <a:t>Click to edit Master text styles</a:t>
             </a:r>
           </a:p>
           <a:p>
             <a:pPr lvl="1"/>
             <a:r>
-              <a:rPr lang="en-US"/>
+              <a:rPr lang="en-US" smtClean="0"/>
               <a:t>Second level</a:t>
             </a:r>
           </a:p>
           <a:p>
             <a:pPr lvl="2"/>
             <a:r>
-              <a:rPr lang="en-US"/>
+              <a:rPr lang="en-US" smtClean="0"/>
               <a:t>Third level</a:t>
             </a:r>
           </a:p>
           <a:p>
             <a:pPr lvl="3"/>
             <a:r>
-              <a:rPr lang="en-US"/>
+              <a:rPr lang="en-US" smtClean="0"/>
               <a:t>Fourth level</a:t>
             </a:r>
           </a:p>
           <a:p>
             <a:pPr lvl="4"/>
             <a:r>
-              <a:rPr lang="en-US"/>
+              <a:rPr lang="en-US" smtClean="0"/>
               <a:t>Fifth level</a:t>
             </a:r>
+            <a:endParaRPr lang="en-US"/>
           </a:p>
         </p:txBody>
       </p:sp>
@@ -1352,7 +1348,7 @@
           <a:p>
             <a:fld id="{5BCAD085-E8A6-8845-BD4E-CB4CCA059FC4}" type="datetimeFigureOut">
               <a:rPr lang="en-US" smtClean="0"/>
-              <a:t>9/19/26</a:t>
+              <a:t>1/27/13</a:t>
             </a:fld>
             <a:endParaRPr lang="en-US"/>
           </a:p>
@@ -1450,9 +1446,10 @@
           </a:lstStyle>
           <a:p>
             <a:r>
-              <a:rPr lang="en-US"/>
+              <a:rPr lang="en-US" smtClean="0"/>
               <a:t>Click to edit Master title style</a:t>
             </a:r>
+            <a:endParaRPr lang="en-US"/>
           </a:p>
         </p:txBody>
       </p:sp>
@@ -1515,7 +1512,7 @@
           <a:p>
             <a:pPr lvl="0"/>
             <a:r>
-              <a:rPr lang="en-US"/>
+              <a:rPr lang="en-US" smtClean="0"/>
               <a:t>Click to edit Master text styles</a:t>
             </a:r>
           </a:p>
@@ -1571,37 +1568,38 @@
           <a:p>
             <a:pPr lvl="0"/>
             <a:r>
-              <a:rPr lang="en-US"/>
+              <a:rPr lang="en-US" smtClean="0"/>
               <a:t>Click to edit Master text styles</a:t>
             </a:r>
           </a:p>
           <a:p>
             <a:pPr lvl="1"/>
             <a:r>
-              <a:rPr lang="en-US"/>
+              <a:rPr lang="en-US" smtClean="0"/>
               <a:t>Second level</a:t>
             </a:r>
           </a:p>
           <a:p>
             <a:pPr lvl="2"/>
             <a:r>
-              <a:rPr lang="en-US"/>
+              <a:rPr lang="en-US" smtClean="0"/>
               <a:t>Third level</a:t>
             </a:r>
           </a:p>
           <a:p>
             <a:pPr lvl="3"/>
             <a:r>
-              <a:rPr lang="en-US"/>
+              <a:rPr lang="en-US" smtClean="0"/>
               <a:t>Fourth level</a:t>
             </a:r>
           </a:p>
           <a:p>
             <a:pPr lvl="4"/>
             <a:r>
-              <a:rPr lang="en-US"/>
+              <a:rPr lang="en-US" smtClean="0"/>
               <a:t>Fifth level</a:t>
             </a:r>
+            <a:endParaRPr lang="en-US"/>
           </a:p>
         </p:txBody>
       </p:sp>
@@ -1664,7 +1662,7 @@
           <a:p>
             <a:pPr lvl="0"/>
             <a:r>
-              <a:rPr lang="en-US"/>
+              <a:rPr lang="en-US" smtClean="0"/>
               <a:t>Click to edit Master text styles</a:t>
             </a:r>
           </a:p>
@@ -1720,37 +1718,38 @@
           <a:p>
             <a:pPr lvl="0"/>
             <a:r>
-              <a:rPr lang="en-US"/>
+              <a:rPr lang="en-US" smtClean="0"/>
               <a:t>Click to edit Master text styles</a:t>
             </a:r>
           </a:p>
           <a:p>
             <a:pPr lvl="1"/>
             <a:r>
-              <a:rPr lang="en-US"/>
+              <a:rPr lang="en-US" smtClean="0"/>
               <a:t>Second level</a:t>
             </a:r>
           </a:p>
           <a:p>
             <a:pPr lvl="2"/>
             <a:r>
-              <a:rPr lang="en-US"/>
+              <a:rPr lang="en-US" smtClean="0"/>
               <a:t>Third level</a:t>
             </a:r>
           </a:p>
           <a:p>
             <a:pPr lvl="3"/>
             <a:r>
-              <a:rPr lang="en-US"/>
+              <a:rPr lang="en-US" smtClean="0"/>
               <a:t>Fourth level</a:t>
             </a:r>
           </a:p>
           <a:p>
             <a:pPr lvl="4"/>
             <a:r>
-              <a:rPr lang="en-US"/>
+              <a:rPr lang="en-US" smtClean="0"/>
               <a:t>Fifth level</a:t>
             </a:r>
+            <a:endParaRPr lang="en-US"/>
           </a:p>
         </p:txBody>
       </p:sp>
@@ -1771,7 +1770,7 @@
           <a:p>
             <a:fld id="{5BCAD085-E8A6-8845-BD4E-CB4CCA059FC4}" type="datetimeFigureOut">
               <a:rPr lang="en-US" smtClean="0"/>
-              <a:t>9/19/26</a:t>
+              <a:t>1/27/13</a:t>
             </a:fld>
             <a:endParaRPr lang="en-US"/>
           </a:p>
@@ -1865,9 +1864,10 @@
           <a:lstStyle/>
           <a:p>
             <a:r>
-              <a:rPr lang="en-US"/>
+              <a:rPr lang="en-US" smtClean="0"/>
               <a:t>Click to edit Master title style</a:t>
             </a:r>
+            <a:endParaRPr lang="en-US"/>
           </a:p>
         </p:txBody>
       </p:sp>
@@ -1888,7 +1888,7 @@
           <a:p>
             <a:fld id="{5BCAD085-E8A6-8845-BD4E-CB4CCA059FC4}" type="datetimeFigureOut">
               <a:rPr lang="en-US" smtClean="0"/>
-              <a:t>9/19/26</a:t>
+              <a:t>1/27/13</a:t>
             </a:fld>
             <a:endParaRPr lang="en-US"/>
           </a:p>
@@ -1983,7 +1983,7 @@
           <a:p>
             <a:fld id="{5BCAD085-E8A6-8845-BD4E-CB4CCA059FC4}" type="datetimeFigureOut">
               <a:rPr lang="en-US" smtClean="0"/>
-              <a:t>9/19/26</a:t>
+              <a:t>1/27/13</a:t>
             </a:fld>
             <a:endParaRPr lang="en-US"/>
           </a:p>
@@ -2086,9 +2086,10 @@
           </a:lstStyle>
           <a:p>
             <a:r>
-              <a:rPr lang="en-US"/>
+              <a:rPr lang="en-US" smtClean="0"/>
               <a:t>Click to edit Master title style</a:t>
             </a:r>
+            <a:endParaRPr lang="en-US"/>
           </a:p>
         </p:txBody>
       </p:sp>
@@ -2142,37 +2143,38 @@
           <a:p>
             <a:pPr lvl="0"/>
             <a:r>
-              <a:rPr lang="en-US"/>
+              <a:rPr lang="en-US" smtClean="0"/>
               <a:t>Click to edit Master text styles</a:t>
             </a:r>
           </a:p>
           <a:p>
             <a:pPr lvl="1"/>
             <a:r>
-              <a:rPr lang="en-US"/>
+              <a:rPr lang="en-US" smtClean="0"/>
               <a:t>Second level</a:t>
             </a:r>
           </a:p>
           <a:p>
             <a:pPr lvl="2"/>
             <a:r>
-              <a:rPr lang="en-US"/>
+              <a:rPr lang="en-US" smtClean="0"/>
               <a:t>Third level</a:t>
             </a:r>
           </a:p>
           <a:p>
             <a:pPr lvl="3"/>
             <a:r>
-              <a:rPr lang="en-US"/>
+              <a:rPr lang="en-US" smtClean="0"/>
               <a:t>Fourth level</a:t>
             </a:r>
           </a:p>
           <a:p>
             <a:pPr lvl="4"/>
             <a:r>
-              <a:rPr lang="en-US"/>
+              <a:rPr lang="en-US" smtClean="0"/>
               <a:t>Fifth level</a:t>
             </a:r>
+            <a:endParaRPr lang="en-US"/>
           </a:p>
         </p:txBody>
       </p:sp>
@@ -2235,7 +2237,7 @@
           <a:p>
             <a:pPr lvl="0"/>
             <a:r>
-              <a:rPr lang="en-US"/>
+              <a:rPr lang="en-US" smtClean="0"/>
               <a:t>Click to edit Master text styles</a:t>
             </a:r>
           </a:p>
@@ -2258,7 +2260,7 @@
           <a:p>
             <a:fld id="{5BCAD085-E8A6-8845-BD4E-CB4CCA059FC4}" type="datetimeFigureOut">
               <a:rPr lang="en-US" smtClean="0"/>
-              <a:t>9/19/26</a:t>
+              <a:t>1/27/13</a:t>
             </a:fld>
             <a:endParaRPr lang="en-US"/>
           </a:p>
@@ -2361,9 +2363,10 @@
           </a:lstStyle>
           <a:p>
             <a:r>
-              <a:rPr lang="en-US"/>
+              <a:rPr lang="en-US" smtClean="0"/>
               <a:t>Click to edit Master title style</a:t>
             </a:r>
+            <a:endParaRPr lang="en-US"/>
           </a:p>
         </p:txBody>
       </p:sp>
@@ -2487,7 +2490,7 @@
           <a:p>
             <a:pPr lvl="0"/>
             <a:r>
-              <a:rPr lang="en-US"/>
+              <a:rPr lang="en-US" smtClean="0"/>
               <a:t>Click to edit Master text styles</a:t>
             </a:r>
           </a:p>
@@ -2510,7 +2513,7 @@
           <a:p>
             <a:fld id="{5BCAD085-E8A6-8845-BD4E-CB4CCA059FC4}" type="datetimeFigureOut">
               <a:rPr lang="en-US" smtClean="0"/>
-              <a:t>9/19/26</a:t>
+              <a:t>1/27/13</a:t>
             </a:fld>
             <a:endParaRPr lang="en-US"/>
           </a:p>
@@ -2619,9 +2622,10 @@
           <a:lstStyle/>
           <a:p>
             <a:r>
-              <a:rPr lang="en-US"/>
+              <a:rPr lang="en-US" smtClean="0"/>
               <a:t>Click to edit Master title style</a:t>
             </a:r>
+            <a:endParaRPr lang="en-US"/>
           </a:p>
         </p:txBody>
       </p:sp>
@@ -2652,37 +2656,38 @@
           <a:p>
             <a:pPr lvl="0"/>
             <a:r>
-              <a:rPr lang="en-US"/>
+              <a:rPr lang="en-US" smtClean="0"/>
               <a:t>Click to edit Master text styles</a:t>
             </a:r>
           </a:p>
           <a:p>
             <a:pPr lvl="1"/>
             <a:r>
-              <a:rPr lang="en-US"/>
+              <a:rPr lang="en-US" smtClean="0"/>
               <a:t>Second level</a:t>
             </a:r>
           </a:p>
           <a:p>
             <a:pPr lvl="2"/>
             <a:r>
-              <a:rPr lang="en-US"/>
+              <a:rPr lang="en-US" smtClean="0"/>
               <a:t>Third level</a:t>
             </a:r>
           </a:p>
           <a:p>
             <a:pPr lvl="3"/>
             <a:r>
-              <a:rPr lang="en-US"/>
+              <a:rPr lang="en-US" smtClean="0"/>
               <a:t>Fourth level</a:t>
             </a:r>
           </a:p>
           <a:p>
             <a:pPr lvl="4"/>
             <a:r>
-              <a:rPr lang="en-US"/>
+              <a:rPr lang="en-US" smtClean="0"/>
               <a:t>Fifth level</a:t>
             </a:r>
+            <a:endParaRPr lang="en-US"/>
           </a:p>
         </p:txBody>
       </p:sp>
@@ -2721,7 +2726,7 @@
           <a:p>
             <a:fld id="{5BCAD085-E8A6-8845-BD4E-CB4CCA059FC4}" type="datetimeFigureOut">
               <a:rPr lang="en-US" smtClean="0"/>
-              <a:t>9/19/26</a:t>
+              <a:t>1/27/13</a:t>
             </a:fld>
             <a:endParaRPr lang="en-US"/>
           </a:p>
@@ -3080,7 +3085,7 @@
 </file>
 
 <file path=ppt/slides/slide1.xml><?xml version="1.0" encoding="utf-8"?>
-<p:sld xmlns:a="http://schemas.openxmlformats.org/drawingml/2006/main" xmlns:r="http://schemas.openxmlformats.org/officeDocument/2006/relationships" xmlns:p="http://schemas.openxmlformats.org/presentationml/2006/main">
+<p:sld xmlns:a="http://schemas.openxmlformats.org/drawingml/2006/main" xmlns:p="http://schemas.openxmlformats.org/presentationml/2006/main" xmlns:r="http://schemas.openxmlformats.org/officeDocument/2006/relationships">
   <p:cSld>
     <p:spTree>
       <p:nvGrpSpPr>
@@ -3088,14 +3093,7 @@
         <p:cNvGrpSpPr/>
         <p:nvPr/>
       </p:nvGrpSpPr>
-      <p:grpSpPr>
-        <a:xfrm>
-          <a:off x="0" y="0"/>
-          <a:ext cx="0" cy="0"/>
-          <a:chOff x="0" y="0"/>
-          <a:chExt cx="0" cy="0"/>
-        </a:xfrm>
-      </p:grpSpPr>
+      <p:grpSpPr/>
       <p:sp>
         <p:nvSpPr>
           <p:cNvPr id="2" name="Rectangle 1"/>
@@ -3136,7 +3134,6 @@
           <a:lstStyle/>
           <a:p>
             <a:pPr algn="ctr"/>
-            <a:endParaRPr/>
           </a:p>
         </p:txBody>
       </p:sp>
@@ -3182,7 +3179,6 @@
           <a:lstStyle/>
           <a:p>
             <a:pPr algn="ctr"/>
-            <a:endParaRPr/>
           </a:p>
         </p:txBody>
       </p:sp>
@@ -3203,7 +3199,7 @@
           <a:noFill/>
         </p:spPr>
         <p:txBody>
-          <a:bodyPr wrap="square" lIns="0" tIns="0" rIns="0" bIns="0">
+          <a:bodyPr wrap="square" lIns="0" rIns="0" tIns="0" bIns="0">
             <a:spAutoFit/>
           </a:bodyPr>
           <a:lstStyle/>
@@ -3304,7 +3300,7 @@
           </a:fontRef>
         </p:style>
         <p:txBody>
-          <a:bodyPr lIns="0" tIns="0" rIns="0" bIns="0" rtlCol="0" anchor="ctr"/>
+          <a:bodyPr rtlCol="0" anchor="ctr" lIns="0" rIns="0" tIns="0" bIns="0"/>
           <a:lstStyle/>
           <a:p>
             <a:pPr algn="ctr">
@@ -3370,7 +3366,7 @@
           </a:fontRef>
         </p:style>
         <p:txBody>
-          <a:bodyPr lIns="0" tIns="0" rIns="0" bIns="0" rtlCol="0" anchor="ctr"/>
+          <a:bodyPr rtlCol="0" anchor="ctr" lIns="0" rIns="0" tIns="0" bIns="0"/>
           <a:lstStyle/>
           <a:p>
             <a:pPr algn="ctr">
@@ -3436,7 +3432,7 @@
           </a:fontRef>
         </p:style>
         <p:txBody>
-          <a:bodyPr lIns="0" tIns="0" rIns="0" bIns="0" rtlCol="0" anchor="ctr"/>
+          <a:bodyPr rtlCol="0" anchor="ctr" lIns="0" rIns="0" tIns="0" bIns="0"/>
           <a:lstStyle/>
           <a:p>
             <a:pPr algn="ctr">
@@ -3502,7 +3498,7 @@
           </a:fontRef>
         </p:style>
         <p:txBody>
-          <a:bodyPr lIns="0" tIns="0" rIns="0" bIns="0" rtlCol="0" anchor="ctr"/>
+          <a:bodyPr rtlCol="0" anchor="ctr" lIns="0" rIns="0" tIns="0" bIns="0"/>
           <a:lstStyle/>
           <a:p>
             <a:pPr algn="ctr">
@@ -3513,7 +3509,7 @@
               </a:defRPr>
             </a:pPr>
             <a:r>
-              <a:t>MONTH-1 CHURN DROP</a:t>
+              <a:t>NOT BACK IN MONTH 1</a:t>
             </a:r>
           </a:p>
           <a:p>
@@ -3525,7 +3521,7 @@
               </a:defRPr>
             </a:pPr>
             <a:r>
-              <a:t>-74.2%</a:t>
+              <a:t>76.9%</a:t>
             </a:r>
           </a:p>
         </p:txBody>
@@ -3539,7 +3535,7 @@
 </file>
 
 <file path=ppt/slides/slide2.xml><?xml version="1.0" encoding="utf-8"?>
-<p:sld xmlns:a="http://schemas.openxmlformats.org/drawingml/2006/main" xmlns:r="http://schemas.openxmlformats.org/officeDocument/2006/relationships" xmlns:p="http://schemas.openxmlformats.org/presentationml/2006/main">
+<p:sld xmlns:a="http://schemas.openxmlformats.org/drawingml/2006/main" xmlns:p="http://schemas.openxmlformats.org/presentationml/2006/main" xmlns:r="http://schemas.openxmlformats.org/officeDocument/2006/relationships">
   <p:cSld>
     <p:spTree>
       <p:nvGrpSpPr>
@@ -3547,14 +3543,7 @@
         <p:cNvGrpSpPr/>
         <p:nvPr/>
       </p:nvGrpSpPr>
-      <p:grpSpPr>
-        <a:xfrm>
-          <a:off x="0" y="0"/>
-          <a:ext cx="0" cy="0"/>
-          <a:chOff x="0" y="0"/>
-          <a:chExt cx="0" cy="0"/>
-        </a:xfrm>
-      </p:grpSpPr>
+      <p:grpSpPr/>
       <p:sp>
         <p:nvSpPr>
           <p:cNvPr id="2" name="Rectangle 1"/>
@@ -3595,7 +3584,6 @@
           <a:lstStyle/>
           <a:p>
             <a:pPr algn="ctr"/>
-            <a:endParaRPr/>
           </a:p>
         </p:txBody>
       </p:sp>
@@ -3637,7 +3625,7 @@
           </a:fontRef>
         </p:style>
         <p:txBody>
-          <a:bodyPr lIns="0" tIns="0" rIns="0" bIns="0" rtlCol="0" anchor="ctr"/>
+          <a:bodyPr rtlCol="0" anchor="ctr" lIns="0" rIns="0" tIns="0" bIns="0"/>
           <a:lstStyle/>
           <a:p>
             <a:pPr algn="ctr">
@@ -3670,7 +3658,7 @@
           <a:noFill/>
         </p:spPr>
         <p:txBody>
-          <a:bodyPr wrap="none" lIns="0" tIns="0" rIns="0" bIns="0">
+          <a:bodyPr wrap="none" lIns="0" rIns="0" tIns="0" bIns="0">
             <a:spAutoFit/>
           </a:bodyPr>
           <a:lstStyle/>
@@ -3726,7 +3714,7 @@
           </a:fontRef>
         </p:style>
         <p:txBody>
-          <a:bodyPr lIns="164592" tIns="0" rIns="164592" bIns="0" rtlCol="0" anchor="ctr"/>
+          <a:bodyPr rtlCol="0" anchor="ctr" lIns="164592" rIns="164592" tIns="0" bIns="0"/>
           <a:lstStyle/>
           <a:p>
             <a:pPr algn="ctr">
@@ -3737,8 +3725,7 @@
               </a:defRPr>
             </a:pPr>
             <a:r>
-              <a:rPr dirty="0"/>
-              <a:t>TOTAL GROSS REVENUE</a:t>
+              <a:t>TOTAL REVENUE</a:t>
             </a:r>
           </a:p>
           <a:p>
@@ -3768,8 +3755,7 @@
               </a:defRPr>
             </a:pPr>
             <a:r>
-              <a:rPr dirty="0"/>
-              <a:t>Net valid transactions (24 Months)</a:t>
+              <a:t>36,969 orders, Dec 2009 - Dec 2011</a:t>
             </a:r>
           </a:p>
         </p:txBody>
@@ -3812,7 +3798,7 @@
           </a:fontRef>
         </p:style>
         <p:txBody>
-          <a:bodyPr lIns="164592" tIns="0" rIns="164592" bIns="0" rtlCol="0" anchor="ctr"/>
+          <a:bodyPr rtlCol="0" anchor="ctr" lIns="164592" rIns="164592" tIns="0" bIns="0"/>
           <a:lstStyle/>
           <a:p>
             <a:pPr algn="ctr">
@@ -3823,7 +3809,7 @@
               </a:defRPr>
             </a:pPr>
             <a:r>
-              <a:t>REGISTERED BUYERS</a:t>
+              <a:t>REGISTERED CUSTOMERS</a:t>
             </a:r>
           </a:p>
           <a:p>
@@ -3853,7 +3839,7 @@
               </a:defRPr>
             </a:pPr>
             <a:r>
-              <a:t>Tracked unique customer IDs</a:t>
+              <a:t>41 countries</a:t>
             </a:r>
           </a:p>
         </p:txBody>
@@ -3896,7 +3882,7 @@
           </a:fontRef>
         </p:style>
         <p:txBody>
-          <a:bodyPr lIns="164592" tIns="0" rIns="164592" bIns="0" rtlCol="0" anchor="ctr"/>
+          <a:bodyPr rtlCol="0" anchor="ctr" lIns="164592" rIns="164592" tIns="0" bIns="0"/>
           <a:lstStyle/>
           <a:p>
             <a:pPr algn="ctr">
@@ -3922,7 +3908,7 @@
               </a:defRPr>
             </a:pPr>
             <a:r>
-              <a:t>25.8%</a:t>
+              <a:t>23.1%</a:t>
             </a:r>
           </a:p>
           <a:p>
@@ -3937,7 +3923,7 @@
               </a:defRPr>
             </a:pPr>
             <a:r>
-              <a:t>Steepest drop-off point in lifecycle</a:t>
+              <a:t>Steepest drop-off in the lifecycle</a:t>
             </a:r>
           </a:p>
         </p:txBody>
@@ -3980,7 +3966,7 @@
           </a:fontRef>
         </p:style>
         <p:txBody>
-          <a:bodyPr lIns="164592" tIns="0" rIns="164592" bIns="0" rtlCol="0" anchor="ctr"/>
+          <a:bodyPr rtlCol="0" anchor="ctr" lIns="164592" rIns="164592" tIns="0" bIns="0"/>
           <a:lstStyle/>
           <a:p>
             <a:pPr algn="ctr">
@@ -3991,7 +3977,7 @@
               </a:defRPr>
             </a:pPr>
             <a:r>
-              <a:t>TOP VALUE CONCENTRATION</a:t>
+              <a:t>CHAMPIONS + LOYAL REVENUE</a:t>
             </a:r>
           </a:p>
           <a:p>
@@ -4006,7 +3992,7 @@
               </a:defRPr>
             </a:pPr>
             <a:r>
-              <a:t>62.4%</a:t>
+              <a:t>84.7%</a:t>
             </a:r>
           </a:p>
           <a:p>
@@ -4021,7 +4007,7 @@
               </a:defRPr>
             </a:pPr>
             <a:r>
-              <a:t>Driven by top 28.1% of customers</a:t>
+              <a:t>From 43.1% of customers</a:t>
             </a:r>
           </a:p>
         </p:txBody>
@@ -4064,7 +4050,7 @@
           </a:fontRef>
         </p:style>
         <p:txBody>
-          <a:bodyPr wrap="square" lIns="228600" tIns="182880" rIns="228600" bIns="137160" rtlCol="0" anchor="ctr"/>
+          <a:bodyPr rtlCol="0" anchor="ctr" wrap="square" lIns="228600" rIns="228600" tIns="182880" bIns="137160"/>
           <a:lstStyle/>
           <a:p>
             <a:pPr algn="ctr">
@@ -4086,7 +4072,7 @@
               <a:spcBef>
                 <a:spcPts val="600"/>
               </a:spcBef>
-              <a:defRPr sz="950" b="1">
+              <a:defRPr b="1" sz="950">
                 <a:solidFill>
                   <a:srgbClr val="0F172A"/>
                 </a:solidFill>
@@ -4116,7 +4102,7 @@
               <a:spcBef>
                 <a:spcPts val="600"/>
               </a:spcBef>
-              <a:defRPr sz="950" b="1">
+              <a:defRPr b="1" sz="950">
                 <a:solidFill>
                   <a:srgbClr val="0F172A"/>
                 </a:solidFill>
@@ -4146,14 +4132,14 @@
               <a:spcBef>
                 <a:spcPts val="600"/>
               </a:spcBef>
-              <a:defRPr sz="950" b="1">
+              <a:defRPr b="1" sz="950">
                 <a:solidFill>
                   <a:srgbClr val="0F172A"/>
                 </a:solidFill>
               </a:defRPr>
             </a:pPr>
             <a:r>
-              <a:t>• The 'Month-1 Cliff' (74.2% Churn): </a:t>
+              <a:t>• The Month-1 Cliff (76.9% not back): </a:t>
             </a:r>
           </a:p>
           <a:p>
@@ -4168,7 +4154,7 @@
               </a:defRPr>
             </a:pPr>
             <a:r>
-              <a:t>  Almost three-quarters of buyers lapse immediately after order #1 due to lack of automated onboarding.</a:t>
+              <a:t>  Roughly three in four new customers do not buy again in the month after their first order.</a:t>
             </a:r>
           </a:p>
           <a:p>
@@ -4176,7 +4162,7 @@
               <a:spcBef>
                 <a:spcPts val="600"/>
               </a:spcBef>
-              <a:defRPr sz="950" b="1">
+              <a:defRPr b="1" sz="950">
                 <a:solidFill>
                   <a:srgbClr val="0F172A"/>
                 </a:solidFill>
@@ -4198,7 +4184,7 @@
               </a:defRPr>
             </a:pPr>
             <a:r>
-              <a:t>  High-value buyers lapsed into 'At Risk' unnoticed without automated behavioral retention triggers.</a:t>
+              <a:t>  683 once-valuable customers (£1.71M historical revenue) have drifted into At Risk.</a:t>
             </a:r>
           </a:p>
         </p:txBody>
@@ -4241,7 +4227,7 @@
           </a:fontRef>
         </p:style>
         <p:txBody>
-          <a:bodyPr wrap="square" lIns="228600" tIns="182880" rIns="228600" bIns="137160" rtlCol="0" anchor="ctr"/>
+          <a:bodyPr rtlCol="0" anchor="ctr" wrap="square" lIns="228600" rIns="228600" tIns="182880" bIns="137160"/>
           <a:lstStyle/>
           <a:p>
             <a:pPr algn="ctr">
@@ -4263,7 +4249,7 @@
               <a:spcBef>
                 <a:spcPts val="600"/>
               </a:spcBef>
-              <a:defRPr sz="950" b="1">
+              <a:defRPr b="1" sz="950">
                 <a:solidFill>
                   <a:srgbClr val="0F172A"/>
                 </a:solidFill>
@@ -4293,7 +4279,7 @@
               <a:spcBef>
                 <a:spcPts val="600"/>
               </a:spcBef>
-              <a:defRPr sz="950" b="1">
+              <a:defRPr b="1" sz="950">
                 <a:solidFill>
                   <a:srgbClr val="0F172A"/>
                 </a:solidFill>
@@ -4323,14 +4309,14 @@
               <a:spcBef>
                 <a:spcPts val="600"/>
               </a:spcBef>
-              <a:defRPr sz="950" b="1">
+              <a:defRPr b="1" sz="950">
                 <a:solidFill>
                   <a:srgbClr val="0F172A"/>
                 </a:solidFill>
               </a:defRPr>
             </a:pPr>
             <a:r>
-              <a:t>• Bridge Month-1 Gap (Days 7-21): </a:t>
+              <a:t>• Bridge the Month-1 Gap: </a:t>
             </a:r>
           </a:p>
           <a:p>
@@ -4345,7 +4331,7 @@
               </a:defRPr>
             </a:pPr>
             <a:r>
-              <a:t>  Target new buyers with personalized category recommendations within 14 days to lift repeat rates above 35%.</a:t>
+              <a:t>  Send new buyers personalised category recommendations within 14 days of their first order.</a:t>
             </a:r>
           </a:p>
           <a:p>
@@ -4353,14 +4339,14 @@
               <a:spcBef>
                 <a:spcPts val="600"/>
               </a:spcBef>
-              <a:defRPr sz="950" b="1">
+              <a:defRPr b="1" sz="950">
                 <a:solidFill>
                   <a:srgbClr val="0F172A"/>
                 </a:solidFill>
               </a:defRPr>
             </a:pPr>
             <a:r>
-              <a:t>• Automate Live Tableau Telemetry: </a:t>
+              <a:t>• Track Retention in Power BI: </a:t>
             </a:r>
           </a:p>
           <a:p>
@@ -4375,7 +4361,7 @@
               </a:defRPr>
             </a:pPr>
             <a:r>
-              <a:t>  Empower growth teams with live weekly cohort retention and RFM migration dashboards.</a:t>
+              <a:t>  Give growth teams a dashboard for month-1 retention, cohort curves and segment shifts.</a:t>
             </a:r>
           </a:p>
         </p:txBody>
@@ -4389,7 +4375,7 @@
 </file>
 
 <file path=ppt/slides/slide3.xml><?xml version="1.0" encoding="utf-8"?>
-<p:sld xmlns:a="http://schemas.openxmlformats.org/drawingml/2006/main" xmlns:r="http://schemas.openxmlformats.org/officeDocument/2006/relationships" xmlns:p="http://schemas.openxmlformats.org/presentationml/2006/main">
+<p:sld xmlns:a="http://schemas.openxmlformats.org/drawingml/2006/main" xmlns:p="http://schemas.openxmlformats.org/presentationml/2006/main" xmlns:r="http://schemas.openxmlformats.org/officeDocument/2006/relationships">
   <p:cSld>
     <p:spTree>
       <p:nvGrpSpPr>
@@ -4397,14 +4383,7 @@
         <p:cNvGrpSpPr/>
         <p:nvPr/>
       </p:nvGrpSpPr>
-      <p:grpSpPr>
-        <a:xfrm>
-          <a:off x="0" y="0"/>
-          <a:ext cx="0" cy="0"/>
-          <a:chOff x="0" y="0"/>
-          <a:chExt cx="0" cy="0"/>
-        </a:xfrm>
-      </p:grpSpPr>
+      <p:grpSpPr/>
       <p:sp>
         <p:nvSpPr>
           <p:cNvPr id="2" name="Rectangle 1"/>
@@ -4445,7 +4424,6 @@
           <a:lstStyle/>
           <a:p>
             <a:pPr algn="ctr"/>
-            <a:endParaRPr/>
           </a:p>
         </p:txBody>
       </p:sp>
@@ -4487,7 +4465,7 @@
           </a:fontRef>
         </p:style>
         <p:txBody>
-          <a:bodyPr lIns="0" tIns="0" rIns="0" bIns="0" rtlCol="0" anchor="ctr"/>
+          <a:bodyPr rtlCol="0" anchor="ctr" lIns="0" rIns="0" tIns="0" bIns="0"/>
           <a:lstStyle/>
           <a:p>
             <a:pPr algn="ctr">
@@ -4520,7 +4498,7 @@
           <a:noFill/>
         </p:spPr>
         <p:txBody>
-          <a:bodyPr wrap="none" lIns="0" tIns="0" rIns="0" bIns="0">
+          <a:bodyPr wrap="none" lIns="0" rIns="0" tIns="0" bIns="0">
             <a:spAutoFit/>
           </a:bodyPr>
           <a:lstStyle/>
@@ -4580,7 +4558,6 @@
           <a:lstStyle/>
           <a:p>
             <a:pPr algn="ctr"/>
-            <a:endParaRPr/>
           </a:p>
         </p:txBody>
       </p:sp>
@@ -4600,7 +4577,7 @@
         </p:blipFill>
         <p:spPr>
           <a:xfrm>
-            <a:off x="868680" y="1946462"/>
+            <a:off x="868680" y="1371600"/>
             <a:ext cx="6583680" cy="3603946"/>
           </a:xfrm>
           <a:prstGeom prst="rect">
@@ -4646,7 +4623,7 @@
           </a:fontRef>
         </p:style>
         <p:txBody>
-          <a:bodyPr wrap="square" lIns="164592" tIns="137160" rIns="164592" bIns="91440" rtlCol="0" anchor="ctr"/>
+          <a:bodyPr rtlCol="0" anchor="ctr" wrap="square" lIns="164592" rIns="164592" tIns="137160" bIns="91440"/>
           <a:lstStyle/>
           <a:p>
             <a:pPr algn="ctr">
@@ -4660,7 +4637,7 @@
               </a:defRPr>
             </a:pPr>
             <a:r>
-              <a:t>THE MONTH-1 CLIFF (-74.2% DROP)</a:t>
+              <a:t>THE MONTH-1 CLIFF (23.1% RETAINED)</a:t>
             </a:r>
           </a:p>
           <a:p>
@@ -4675,7 +4652,7 @@
               </a:defRPr>
             </a:pPr>
             <a:r>
-              <a:t>Average retention plummets from 100% to 25.8% within 30 days. Over 7 out of 10 newly acquired customers never make a repeat purchase without intervention.</a:t>
+              <a:t>Only 23.1% of new customers buy again in the month after their first order (customer-weighted across all cohorts).</a:t>
             </a:r>
           </a:p>
         </p:txBody>
@@ -4718,7 +4695,7 @@
           </a:fontRef>
         </p:style>
         <p:txBody>
-          <a:bodyPr wrap="square" lIns="164592" tIns="137160" rIns="164592" bIns="91440" rtlCol="0" anchor="ctr"/>
+          <a:bodyPr rtlCol="0" anchor="ctr" wrap="square" lIns="164592" rIns="164592" tIns="137160" bIns="91440"/>
           <a:lstStyle/>
           <a:p>
             <a:pPr algn="ctr">
@@ -4732,7 +4709,7 @@
               </a:defRPr>
             </a:pPr>
             <a:r>
-              <a:t>LONG-TERM RETENTION STABILIZATION</a:t>
+              <a:t>FLAT AFTER THE CLIFF</a:t>
             </a:r>
           </a:p>
           <a:p>
@@ -4747,7 +4724,7 @@
               </a:defRPr>
             </a:pPr>
             <a:r>
-              <a:t>Cohorts that survive past Month 3 form a resilient, highly profitable core, sustaining 20-25% repeat activity through Month 12+.</a:t>
+              <a:t>Retention then holds between 19.0% and 24.5% from month 1 to month 12, so the second purchase is the main lever.</a:t>
             </a:r>
           </a:p>
         </p:txBody>
@@ -4790,7 +4767,7 @@
           </a:fontRef>
         </p:style>
         <p:txBody>
-          <a:bodyPr wrap="square" lIns="164592" tIns="137160" rIns="164592" bIns="91440" rtlCol="0" anchor="ctr"/>
+          <a:bodyPr rtlCol="0" anchor="ctr" wrap="square" lIns="164592" rIns="164592" tIns="137160" bIns="91440"/>
           <a:lstStyle/>
           <a:p>
             <a:pPr algn="ctr">
@@ -4804,7 +4781,7 @@
               </a:defRPr>
             </a:pPr>
             <a:r>
-              <a:t>CRITICAL INTERVENTION WINDOW</a:t>
+              <a:t>HOLIDAY COHORTS RETAIN WORST</a:t>
             </a:r>
           </a:p>
           <a:p>
@@ -4819,7 +4796,7 @@
               </a:defRPr>
             </a:pPr>
             <a:r>
-              <a:t>Post-purchase onboarding triggers must deploy during Days 7-21 while product satisfaction is high, before buyer momentum completely fades.</a:t>
+              <a:t>Customers first acquired in Nov 2010 (17.5%) and Dec 2010 (9.2%) came back far less in month 1. Follow up within 30 days.</a:t>
             </a:r>
           </a:p>
         </p:txBody>
@@ -4833,7 +4810,7 @@
 </file>
 
 <file path=ppt/slides/slide4.xml><?xml version="1.0" encoding="utf-8"?>
-<p:sld xmlns:a="http://schemas.openxmlformats.org/drawingml/2006/main" xmlns:r="http://schemas.openxmlformats.org/officeDocument/2006/relationships" xmlns:p="http://schemas.openxmlformats.org/presentationml/2006/main">
+<p:sld xmlns:a="http://schemas.openxmlformats.org/drawingml/2006/main" xmlns:p="http://schemas.openxmlformats.org/presentationml/2006/main" xmlns:r="http://schemas.openxmlformats.org/officeDocument/2006/relationships">
   <p:cSld>
     <p:spTree>
       <p:nvGrpSpPr>
@@ -4841,14 +4818,7 @@
         <p:cNvGrpSpPr/>
         <p:nvPr/>
       </p:nvGrpSpPr>
-      <p:grpSpPr>
-        <a:xfrm>
-          <a:off x="0" y="0"/>
-          <a:ext cx="0" cy="0"/>
-          <a:chOff x="0" y="0"/>
-          <a:chExt cx="0" cy="0"/>
-        </a:xfrm>
-      </p:grpSpPr>
+      <p:grpSpPr/>
       <p:sp>
         <p:nvSpPr>
           <p:cNvPr id="2" name="Rectangle 1"/>
@@ -4889,7 +4859,6 @@
           <a:lstStyle/>
           <a:p>
             <a:pPr algn="ctr"/>
-            <a:endParaRPr/>
           </a:p>
         </p:txBody>
       </p:sp>
@@ -4931,7 +4900,7 @@
           </a:fontRef>
         </p:style>
         <p:txBody>
-          <a:bodyPr lIns="0" tIns="0" rIns="0" bIns="0" rtlCol="0" anchor="ctr"/>
+          <a:bodyPr rtlCol="0" anchor="ctr" lIns="0" rIns="0" tIns="0" bIns="0"/>
           <a:lstStyle/>
           <a:p>
             <a:pPr algn="ctr">
@@ -4964,7 +4933,7 @@
           <a:noFill/>
         </p:spPr>
         <p:txBody>
-          <a:bodyPr wrap="none" lIns="0" tIns="0" rIns="0" bIns="0">
+          <a:bodyPr wrap="none" lIns="0" rIns="0" tIns="0" bIns="0">
             <a:spAutoFit/>
           </a:bodyPr>
           <a:lstStyle/>
@@ -5024,7 +4993,6 @@
           <a:lstStyle/>
           <a:p>
             <a:pPr algn="ctr"/>
-            <a:endParaRPr/>
           </a:p>
         </p:txBody>
       </p:sp>
@@ -5044,8 +5012,8 @@
         </p:blipFill>
         <p:spPr>
           <a:xfrm>
-            <a:off x="868680" y="2127642"/>
-            <a:ext cx="6583680" cy="2985932"/>
+            <a:off x="868680" y="1371600"/>
+            <a:ext cx="6583680" cy="3391593"/>
           </a:xfrm>
           <a:prstGeom prst="rect">
             <a:avLst/>
@@ -5090,7 +5058,7 @@
           </a:fontRef>
         </p:style>
         <p:txBody>
-          <a:bodyPr wrap="square" lIns="164592" tIns="137160" rIns="164592" bIns="91440" rtlCol="0" anchor="ctr"/>
+          <a:bodyPr rtlCol="0" anchor="ctr" wrap="square" lIns="164592" rIns="164592" tIns="137160" bIns="91440"/>
           <a:lstStyle/>
           <a:p>
             <a:pPr algn="ctr">
@@ -5104,7 +5072,7 @@
               </a:defRPr>
             </a:pPr>
             <a:r>
-              <a:t>CHAMPIONS (41.1% REVENUE | 14.8% USERS)</a:t>
+              <a:t>CHAMPIONS (69.0% REVENUE | 22.5% CUSTOMERS)</a:t>
             </a:r>
           </a:p>
           <a:p>
@@ -5119,7 +5087,7 @@
               </a:defRPr>
             </a:pPr>
             <a:r>
-              <a:t>868 VIPs generate £7.28M with 19.8 avg orders (£8.39k spend). Action: Provide dedicated concierge, product co-creation, and zero margin discounts.</a:t>
+              <a:t>1,324 customers generate £12.24M with 16.9 orders on average (£9,246 spend). Action: VIP perks and early access, no discounts.</a:t>
             </a:r>
           </a:p>
         </p:txBody>
@@ -5162,7 +5130,7 @@
           </a:fontRef>
         </p:style>
         <p:txBody>
-          <a:bodyPr wrap="square" lIns="164592" tIns="137160" rIns="164592" bIns="91440" rtlCol="0" anchor="ctr"/>
+          <a:bodyPr rtlCol="0" anchor="ctr" wrap="square" lIns="164592" rIns="164592" tIns="137160" bIns="91440"/>
           <a:lstStyle/>
           <a:p>
             <a:pPr algn="ctr">
@@ -5176,7 +5144,7 @@
               </a:defRPr>
             </a:pPr>
             <a:r>
-              <a:t>LOYAL &amp; POTENTIAL (29.5% REVENUE)</a:t>
+              <a:t>LOYAL &amp; POTENTIAL (17.4% REVENUE)</a:t>
             </a:r>
           </a:p>
           <a:p>
@@ -5191,7 +5159,7 @@
               </a:defRPr>
             </a:pPr>
             <a:r>
-              <a:t>1,523 consistent buyers contributing £5.23M. Action: Milestone rewards, threshold spend bonuses, and cross-category discovery recommendations.</a:t>
+              <a:t>1,842 customers contributing £3.09M. Action: loyalty milestones and cross-category recommendations.</a:t>
             </a:r>
           </a:p>
         </p:txBody>
@@ -5234,7 +5202,7 @@
           </a:fontRef>
         </p:style>
         <p:txBody>
-          <a:bodyPr wrap="square" lIns="164592" tIns="137160" rIns="164592" bIns="91440" rtlCol="0" anchor="ctr"/>
+          <a:bodyPr rtlCol="0" anchor="ctr" wrap="square" lIns="164592" rIns="164592" tIns="137160" bIns="91440"/>
           <a:lstStyle/>
           <a:p>
             <a:pPr algn="ctr">
@@ -5248,7 +5216,7 @@
               </a:defRPr>
             </a:pPr>
             <a:r>
-              <a:t>AT RISK &amp; CAN'T LOSE (15.1% REVENUE)</a:t>
+              <a:t>AT RISK (9.6% REVENUE)</a:t>
             </a:r>
           </a:p>
           <a:p>
@@ -5263,7 +5231,7 @@
               </a:defRPr>
             </a:pPr>
             <a:r>
-              <a:t>945 high-spend customers inactive &gt;200 days (£2.68M revenue at stake). Action: Time-sensitive automated win-back emails &amp; reactivation incentives.</a:t>
+              <a:t>683 customers averaging £2,501 spend, last order ~364 days ago (£1.71M historical revenue). Action: targeted win-back offers.</a:t>
             </a:r>
           </a:p>
         </p:txBody>
@@ -5277,7 +5245,7 @@
 </file>
 
 <file path=ppt/slides/slide5.xml><?xml version="1.0" encoding="utf-8"?>
-<p:sld xmlns:a="http://schemas.openxmlformats.org/drawingml/2006/main" xmlns:r="http://schemas.openxmlformats.org/officeDocument/2006/relationships" xmlns:p="http://schemas.openxmlformats.org/presentationml/2006/main">
+<p:sld xmlns:a="http://schemas.openxmlformats.org/drawingml/2006/main" xmlns:p="http://schemas.openxmlformats.org/presentationml/2006/main" xmlns:r="http://schemas.openxmlformats.org/officeDocument/2006/relationships">
   <p:cSld>
     <p:spTree>
       <p:nvGrpSpPr>
@@ -5285,14 +5253,7 @@
         <p:cNvGrpSpPr/>
         <p:nvPr/>
       </p:nvGrpSpPr>
-      <p:grpSpPr>
-        <a:xfrm>
-          <a:off x="0" y="0"/>
-          <a:ext cx="0" cy="0"/>
-          <a:chOff x="0" y="0"/>
-          <a:chExt cx="0" cy="0"/>
-        </a:xfrm>
-      </p:grpSpPr>
+      <p:grpSpPr/>
       <p:sp>
         <p:nvSpPr>
           <p:cNvPr id="2" name="Rectangle 1"/>
@@ -5333,7 +5294,6 @@
           <a:lstStyle/>
           <a:p>
             <a:pPr algn="ctr"/>
-            <a:endParaRPr/>
           </a:p>
         </p:txBody>
       </p:sp>
@@ -5375,7 +5335,7 @@
           </a:fontRef>
         </p:style>
         <p:txBody>
-          <a:bodyPr lIns="0" tIns="0" rIns="0" bIns="0" rtlCol="0" anchor="ctr"/>
+          <a:bodyPr rtlCol="0" anchor="ctr" lIns="0" rIns="0" tIns="0" bIns="0"/>
           <a:lstStyle/>
           <a:p>
             <a:pPr algn="ctr">
@@ -5408,7 +5368,7 @@
           <a:noFill/>
         </p:spPr>
         <p:txBody>
-          <a:bodyPr wrap="none" lIns="0" tIns="0" rIns="0" bIns="0">
+          <a:bodyPr wrap="none" lIns="0" rIns="0" tIns="0" bIns="0">
             <a:spAutoFit/>
           </a:bodyPr>
           <a:lstStyle/>
@@ -5468,7 +5428,6 @@
           <a:lstStyle/>
           <a:p>
             <a:pPr algn="ctr"/>
-            <a:endParaRPr/>
           </a:p>
         </p:txBody>
       </p:sp>
@@ -5488,7 +5447,7 @@
         </p:blipFill>
         <p:spPr>
           <a:xfrm>
-            <a:off x="868680" y="2022071"/>
+            <a:off x="868680" y="1371600"/>
             <a:ext cx="6583680" cy="3391593"/>
           </a:xfrm>
           <a:prstGeom prst="rect">
@@ -5534,7 +5493,7 @@
           </a:fontRef>
         </p:style>
         <p:txBody>
-          <a:bodyPr wrap="square" lIns="164592" tIns="137160" rIns="164592" bIns="91440" rtlCol="0" anchor="ctr"/>
+          <a:bodyPr rtlCol="0" anchor="ctr" wrap="square" lIns="164592" rIns="164592" tIns="137160" bIns="91440"/>
           <a:lstStyle/>
           <a:p>
             <a:pPr algn="ctr">
@@ -5548,7 +5507,7 @@
               </a:defRPr>
             </a:pPr>
             <a:r>
-              <a:t>Q4 HOLIDAY REVENUE SURGE (&gt;£1.5M/MO)</a:t>
+              <a:t>Q4 PEAK (~£1.2M / MONTH)</a:t>
             </a:r>
           </a:p>
           <a:p>
@@ -5563,7 +5522,7 @@
               </a:defRPr>
             </a:pPr>
             <a:r>
-              <a:t>Consistent seasonal peaks in October-November where monthly revenue spikes +140% above Q1 levels, driven by seasonal gifting volume.</a:t>
+              <a:t>Revenue climbs from September and peaks in November in both years, roughly twice the Q1 monthly level.</a:t>
             </a:r>
           </a:p>
         </p:txBody>
@@ -5606,7 +5565,7 @@
           </a:fontRef>
         </p:style>
         <p:txBody>
-          <a:bodyPr wrap="square" lIns="164592" tIns="137160" rIns="164592" bIns="91440" rtlCol="0" anchor="ctr"/>
+          <a:bodyPr rtlCol="0" anchor="ctr" wrap="square" lIns="164592" rIns="164592" tIns="137160" bIns="91440"/>
           <a:lstStyle/>
           <a:p>
             <a:pPr algn="ctr">
@@ -5620,7 +5579,7 @@
               </a:defRPr>
             </a:pPr>
             <a:r>
-              <a:t>POST-HOLIDAY CHURN MANAGEMENT</a:t>
+              <a:t>POST-HOLIDAY RE-ENGAGEMENT</a:t>
             </a:r>
           </a:p>
           <a:p>
@@ -5635,7 +5594,7 @@
               </a:defRPr>
             </a:pPr>
             <a:r>
-              <a:t>The huge influx of November buyers requires structured January re-engagement sequences to prevent them from becoming dormant Hibernators.</a:t>
+              <a:t>Holiday first-time buyers retain worst, so a January re-engagement flow keeps them from becoming Hibernating.</a:t>
             </a:r>
           </a:p>
         </p:txBody>
@@ -5678,7 +5637,7 @@
           </a:fontRef>
         </p:style>
         <p:txBody>
-          <a:bodyPr wrap="square" lIns="164592" tIns="137160" rIns="164592" bIns="91440" rtlCol="0" anchor="ctr"/>
+          <a:bodyPr rtlCol="0" anchor="ctr" wrap="square" lIns="164592" rIns="164592" tIns="137160" bIns="91440"/>
           <a:lstStyle/>
           <a:p>
             <a:pPr algn="ctr">
@@ -5692,7 +5651,7 @@
               </a:defRPr>
             </a:pPr>
             <a:r>
-              <a:t>BASKET MONETIZATION &amp; AOV EXPANSION</a:t>
+              <a:t>DECEMBER 2011 IS PARTIAL</a:t>
             </a:r>
           </a:p>
           <a:p>
@@ -5707,7 +5666,7 @@
               </a:defRPr>
             </a:pPr>
             <a:r>
-              <a:t>Average Order Value (AOV) reaches maximum levels during multi-item holiday purchasing. Automated bundle recommendations maximize transaction value.</a:t>
+              <a:t>The data ends on 9 Dec 2011, so the final drop is a cut-off, not a decline. Average order value over the period: £480.</a:t>
             </a:r>
           </a:p>
         </p:txBody>
@@ -5721,7 +5680,7 @@
 </file>
 
 <file path=ppt/slides/slide6.xml><?xml version="1.0" encoding="utf-8"?>
-<p:sld xmlns:a="http://schemas.openxmlformats.org/drawingml/2006/main" xmlns:r="http://schemas.openxmlformats.org/officeDocument/2006/relationships" xmlns:p="http://schemas.openxmlformats.org/presentationml/2006/main">
+<p:sld xmlns:a="http://schemas.openxmlformats.org/drawingml/2006/main" xmlns:p="http://schemas.openxmlformats.org/presentationml/2006/main" xmlns:r="http://schemas.openxmlformats.org/officeDocument/2006/relationships">
   <p:cSld>
     <p:spTree>
       <p:nvGrpSpPr>
@@ -5729,14 +5688,7 @@
         <p:cNvGrpSpPr/>
         <p:nvPr/>
       </p:nvGrpSpPr>
-      <p:grpSpPr>
-        <a:xfrm>
-          <a:off x="0" y="0"/>
-          <a:ext cx="0" cy="0"/>
-          <a:chOff x="0" y="0"/>
-          <a:chExt cx="0" cy="0"/>
-        </a:xfrm>
-      </p:grpSpPr>
+      <p:grpSpPr/>
       <p:sp>
         <p:nvSpPr>
           <p:cNvPr id="2" name="Rectangle 1"/>
@@ -5777,7 +5729,6 @@
           <a:lstStyle/>
           <a:p>
             <a:pPr algn="ctr"/>
-            <a:endParaRPr/>
           </a:p>
         </p:txBody>
       </p:sp>
@@ -5819,7 +5770,7 @@
           </a:fontRef>
         </p:style>
         <p:txBody>
-          <a:bodyPr lIns="0" tIns="0" rIns="0" bIns="0" rtlCol="0" anchor="ctr"/>
+          <a:bodyPr rtlCol="0" anchor="ctr" lIns="0" rIns="0" tIns="0" bIns="0"/>
           <a:lstStyle/>
           <a:p>
             <a:pPr algn="ctr">
@@ -5852,7 +5803,7 @@
           <a:noFill/>
         </p:spPr>
         <p:txBody>
-          <a:bodyPr wrap="none" lIns="0" tIns="0" rIns="0" bIns="0">
+          <a:bodyPr wrap="none" lIns="0" rIns="0" tIns="0" bIns="0">
             <a:spAutoFit/>
           </a:bodyPr>
           <a:lstStyle/>
@@ -5908,7 +5859,7 @@
           </a:fontRef>
         </p:style>
         <p:txBody>
-          <a:bodyPr wrap="square" lIns="182880" tIns="182880" rIns="182880" bIns="137160" rtlCol="0" anchor="ctr"/>
+          <a:bodyPr rtlCol="0" anchor="ctr" wrap="square" lIns="182880" rIns="182880" tIns="182880" bIns="137160"/>
           <a:lstStyle/>
           <a:p>
             <a:pPr algn="ctr">
@@ -6027,7 +5978,7 @@
               </a:defRPr>
             </a:pPr>
             <a:r>
-              <a:t>• Target CAC Reduction (-15%)</a:t>
+              <a:t>• Measure with Holdout Tests</a:t>
             </a:r>
           </a:p>
           <a:p>
@@ -6042,7 +5993,7 @@
               </a:defRPr>
             </a:pPr>
             <a:r>
-              <a:t>  Lower blended acquisition costs by boosting repeat purchase contribution.</a:t>
+              <a:t>  Run each change against a control group to measure its real effect on repeat revenue and CAC.</a:t>
             </a:r>
           </a:p>
         </p:txBody>
@@ -6085,7 +6036,7 @@
           </a:fontRef>
         </p:style>
         <p:txBody>
-          <a:bodyPr wrap="square" lIns="182880" tIns="182880" rIns="182880" bIns="137160" rtlCol="0" anchor="ctr"/>
+          <a:bodyPr rtlCol="0" anchor="ctr" wrap="square" lIns="182880" rIns="182880" tIns="182880" bIns="137160"/>
           <a:lstStyle/>
           <a:p>
             <a:pPr algn="ctr">
@@ -6262,7 +6213,7 @@
           </a:fontRef>
         </p:style>
         <p:txBody>
-          <a:bodyPr wrap="square" lIns="182880" tIns="182880" rIns="182880" bIns="137160" rtlCol="0" anchor="ctr"/>
+          <a:bodyPr rtlCol="0" anchor="ctr" wrap="square" lIns="182880" rIns="182880" tIns="182880" bIns="137160"/>
           <a:lstStyle/>
           <a:p>
             <a:pPr algn="ctr">
@@ -6351,7 +6302,7 @@
               </a:defRPr>
             </a:pPr>
             <a:r>
-              <a:t>• Tableau Retention Tracking</a:t>
+              <a:t>• Power BI Retention Dashboard</a:t>
             </a:r>
           </a:p>
           <a:p>
@@ -6366,7 +6317,7 @@
               </a:defRPr>
             </a:pPr>
             <a:r>
-              <a:t>  Connect Tableau dashboards via automated TDS / ODBC connection for live weekly cohort monitoring.</a:t>
+              <a:t>  Monitor month-1 retention, cohort curves and segment shifts in the three-page Power BI report.</a:t>
             </a:r>
           </a:p>
           <a:p>
@@ -6410,7 +6361,7 @@
 </file>
 
 <file path=ppt/slides/slide7.xml><?xml version="1.0" encoding="utf-8"?>
-<p:sld xmlns:a="http://schemas.openxmlformats.org/drawingml/2006/main" xmlns:r="http://schemas.openxmlformats.org/officeDocument/2006/relationships" xmlns:p="http://schemas.openxmlformats.org/presentationml/2006/main">
+<p:sld xmlns:a="http://schemas.openxmlformats.org/drawingml/2006/main" xmlns:p="http://schemas.openxmlformats.org/presentationml/2006/main" xmlns:r="http://schemas.openxmlformats.org/officeDocument/2006/relationships">
   <p:cSld>
     <p:spTree>
       <p:nvGrpSpPr>
@@ -6418,14 +6369,7 @@
         <p:cNvGrpSpPr/>
         <p:nvPr/>
       </p:nvGrpSpPr>
-      <p:grpSpPr>
-        <a:xfrm>
-          <a:off x="0" y="0"/>
-          <a:ext cx="0" cy="0"/>
-          <a:chOff x="0" y="0"/>
-          <a:chExt cx="0" cy="0"/>
-        </a:xfrm>
-      </p:grpSpPr>
+      <p:grpSpPr/>
       <p:sp>
         <p:nvSpPr>
           <p:cNvPr id="2" name="Rectangle 1"/>
@@ -6466,7 +6410,6 @@
           <a:lstStyle/>
           <a:p>
             <a:pPr algn="ctr"/>
-            <a:endParaRPr/>
           </a:p>
         </p:txBody>
       </p:sp>
@@ -6508,7 +6451,7 @@
           </a:fontRef>
         </p:style>
         <p:txBody>
-          <a:bodyPr lIns="0" tIns="0" rIns="0" bIns="0" rtlCol="0" anchor="ctr"/>
+          <a:bodyPr rtlCol="0" anchor="ctr" lIns="0" rIns="0" tIns="0" bIns="0"/>
           <a:lstStyle/>
           <a:p>
             <a:pPr algn="ctr">
@@ -6541,7 +6484,7 @@
           <a:noFill/>
         </p:spPr>
         <p:txBody>
-          <a:bodyPr wrap="none" lIns="0" tIns="0" rIns="0" bIns="0">
+          <a:bodyPr wrap="none" lIns="0" rIns="0" tIns="0" bIns="0">
             <a:spAutoFit/>
           </a:bodyPr>
           <a:lstStyle/>
@@ -6597,7 +6540,7 @@
           </a:fontRef>
         </p:style>
         <p:txBody>
-          <a:bodyPr wrap="square" lIns="164592" tIns="182880" rIns="164592" bIns="137160" rtlCol="0" anchor="ctr"/>
+          <a:bodyPr rtlCol="0" anchor="ctr" wrap="square" lIns="164592" rIns="164592" tIns="182880" bIns="137160"/>
           <a:lstStyle/>
           <a:p>
             <a:pPr algn="ctr">
@@ -6626,7 +6569,7 @@
               </a:defRPr>
             </a:pPr>
             <a:r>
-              <a:t>• Processed 1.06M raw Excel transactions across 2 historical sheets.</a:t>
+              <a:t>• Processed 1.07M raw Excel lines across 2 yearly sheets.</a:t>
             </a:r>
           </a:p>
           <a:p>
@@ -6641,7 +6584,7 @@
               </a:defRPr>
             </a:pPr>
             <a:r>
-              <a:t>• Filtered cancellations ('C'), negative quantities, and zero unit prices.</a:t>
+              <a:t>• Removed cancellations ('C'), returns, zero prices and guest checkouts.</a:t>
             </a:r>
           </a:p>
           <a:p>
@@ -6656,7 +6599,7 @@
               </a:defRPr>
             </a:pPr>
             <a:r>
-              <a:t>• Resulted in 805,549 verified line items with £17.74M revenue.</a:t>
+              <a:t>• Kept 805,549 line items, £17.74M revenue.</a:t>
             </a:r>
           </a:p>
         </p:txBody>
@@ -6699,7 +6642,7 @@
           </a:fontRef>
         </p:style>
         <p:txBody>
-          <a:bodyPr wrap="square" lIns="164592" tIns="182880" rIns="164592" bIns="137160" rtlCol="0" anchor="ctr"/>
+          <a:bodyPr rtlCol="0" anchor="ctr" wrap="square" lIns="164592" rIns="164592" tIns="182880" bIns="137160"/>
           <a:lstStyle/>
           <a:p>
             <a:pPr algn="ctr">
@@ -6801,7 +6744,7 @@
           </a:fontRef>
         </p:style>
         <p:txBody>
-          <a:bodyPr wrap="square" lIns="164592" tIns="182880" rIns="164592" bIns="137160" rtlCol="0" anchor="ctr"/>
+          <a:bodyPr rtlCol="0" anchor="ctr" wrap="square" lIns="164592" rIns="164592" tIns="182880" bIns="137160"/>
           <a:lstStyle/>
           <a:p>
             <a:pPr algn="ctr">
@@ -6815,7 +6758,7 @@
               </a:defRPr>
             </a:pPr>
             <a:r>
-              <a:t>3. TABLEAU ODBC AUTOMATION</a:t>
+              <a:t>3. POWER BI &amp; TABLEAU</a:t>
             </a:r>
           </a:p>
           <a:p>
@@ -6830,7 +6773,7 @@
               </a:defRPr>
             </a:pPr>
             <a:r>
-              <a:t>• Configured macOS ODBC DSN (`Portfolio_DB`).</a:t>
+              <a:t>• Power BI star schema, DAX measures and theme in `/powerbi/`.</a:t>
             </a:r>
           </a:p>
           <a:p>
@@ -6845,7 +6788,7 @@
               </a:defRPr>
             </a:pPr>
             <a:r>
-              <a:t>• Generated Tableau Data Source (`.tds`) XML for 1-click live connection.</a:t>
+              <a:t>• Three-page dashboard: Overview, Cohort Retention, RFM Segments.</a:t>
             </a:r>
           </a:p>
           <a:p>
@@ -6860,7 +6803,7 @@
               </a:defRPr>
             </a:pPr>
             <a:r>
-              <a:t>• Instantly launched Tableau Desktop for visual exploration.</a:t>
+              <a:t>• Tableau data source (`.tds`) for a live SQLite connection via ODBC.</a:t>
             </a:r>
           </a:p>
         </p:txBody>
@@ -6903,7 +6846,7 @@
           </a:fontRef>
         </p:style>
         <p:txBody>
-          <a:bodyPr wrap="square" lIns="164592" tIns="182880" rIns="164592" bIns="137160" rtlCol="0" anchor="ctr"/>
+          <a:bodyPr rtlCol="0" anchor="ctr" wrap="square" lIns="164592" rIns="164592" tIns="182880" bIns="137160"/>
           <a:lstStyle/>
           <a:p>
             <a:pPr algn="ctr">
@@ -6947,7 +6890,7 @@
               </a:defRPr>
             </a:pPr>
             <a:r>
-              <a:t>• Comprehensive Case Study &amp; KPI Scorecard in `README.md`.</a:t>
+              <a:t>• All figures computed in `src/report_metrics.py`.</a:t>
             </a:r>
           </a:p>
           <a:p>

--- a/presentations/Executive_Presentation_Customer_Segmentation_Cohort.pptx
+++ b/presentations/Executive_Presentation_Customer_Segmentation_Cohort.pptx
@@ -5,15 +5,15 @@
     <p:sldMasterId id="2147483648" r:id="rId1"/>
   </p:sldMasterIdLst>
   <p:sldIdLst>
-    <p:sldId id="256" r:id="rId2"/>
-    <p:sldId id="257" r:id="rId3"/>
-    <p:sldId id="258" r:id="rId4"/>
-    <p:sldId id="259" r:id="rId5"/>
-    <p:sldId id="260" r:id="rId6"/>
-    <p:sldId id="261" r:id="rId7"/>
-    <p:sldId id="262" r:id="rId8"/>
+    <p:sldId id="256" r:id="rId7"/>
+    <p:sldId id="257" r:id="rId8"/>
+    <p:sldId id="258" r:id="rId9"/>
+    <p:sldId id="259" r:id="rId10"/>
+    <p:sldId id="260" r:id="rId11"/>
+    <p:sldId id="261" r:id="rId12"/>
+    <p:sldId id="262" r:id="rId13"/>
   </p:sldIdLst>
-  <p:sldSz cx="12192000" cy="6858000"/>
+  <p:sldSz cx="12191695" cy="6858000" type="screen4x3"/>
   <p:notesSz cx="6858000" cy="9144000"/>
   <p:defaultTextStyle>
     <a:defPPr>
@@ -110,22 +110,6 @@
       </a:defRPr>
     </a:lvl9pPr>
   </p:defaultTextStyle>
-  <p:extLst>
-    <p:ext uri="{EFAFB233-063F-42B5-8137-9DF3F51BA10A}">
-      <p15:sldGuideLst xmlns:p15="http://schemas.microsoft.com/office/powerpoint/2012/main">
-        <p15:guide id="1" orient="horz" pos="2160">
-          <p15:clr>
-            <a:srgbClr val="A4A3A4"/>
-          </p15:clr>
-        </p15:guide>
-        <p15:guide id="2" pos="2880">
-          <p15:clr>
-            <a:srgbClr val="A4A3A4"/>
-          </p15:clr>
-        </p15:guide>
-      </p15:sldGuideLst>
-    </p:ext>
-  </p:extLst>
 </p:presentation>
 </file>
 
@@ -167,9 +151,10 @@
           <a:lstStyle/>
           <a:p>
             <a:r>
-              <a:rPr lang="en-US"/>
+              <a:rPr lang="en-US" smtClean="0"/>
               <a:t>Click to edit Master title style</a:t>
             </a:r>
+            <a:endParaRPr lang="en-US"/>
           </a:p>
         </p:txBody>
       </p:sp>
@@ -285,9 +270,10 @@
           </a:lstStyle>
           <a:p>
             <a:r>
-              <a:rPr lang="en-US"/>
+              <a:rPr lang="en-US" smtClean="0"/>
               <a:t>Click to edit Master subtitle style</a:t>
             </a:r>
+            <a:endParaRPr lang="en-US"/>
           </a:p>
         </p:txBody>
       </p:sp>
@@ -308,7 +294,7 @@
           <a:p>
             <a:fld id="{5BCAD085-E8A6-8845-BD4E-CB4CCA059FC4}" type="datetimeFigureOut">
               <a:rPr lang="en-US" smtClean="0"/>
-              <a:t>9/19/26</a:t>
+              <a:t>1/27/13</a:t>
             </a:fld>
             <a:endParaRPr lang="en-US"/>
           </a:p>
@@ -402,9 +388,10 @@
           <a:lstStyle/>
           <a:p>
             <a:r>
-              <a:rPr lang="en-US"/>
+              <a:rPr lang="en-US" smtClean="0"/>
               <a:t>Click to edit Master title style</a:t>
             </a:r>
+            <a:endParaRPr lang="en-US"/>
           </a:p>
         </p:txBody>
       </p:sp>
@@ -425,37 +412,38 @@
           <a:p>
             <a:pPr lvl="0"/>
             <a:r>
-              <a:rPr lang="en-US"/>
+              <a:rPr lang="en-US" smtClean="0"/>
               <a:t>Click to edit Master text styles</a:t>
             </a:r>
           </a:p>
           <a:p>
             <a:pPr lvl="1"/>
             <a:r>
-              <a:rPr lang="en-US"/>
+              <a:rPr lang="en-US" smtClean="0"/>
               <a:t>Second level</a:t>
             </a:r>
           </a:p>
           <a:p>
             <a:pPr lvl="2"/>
             <a:r>
-              <a:rPr lang="en-US"/>
+              <a:rPr lang="en-US" smtClean="0"/>
               <a:t>Third level</a:t>
             </a:r>
           </a:p>
           <a:p>
             <a:pPr lvl="3"/>
             <a:r>
-              <a:rPr lang="en-US"/>
+              <a:rPr lang="en-US" smtClean="0"/>
               <a:t>Fourth level</a:t>
             </a:r>
           </a:p>
           <a:p>
             <a:pPr lvl="4"/>
             <a:r>
-              <a:rPr lang="en-US"/>
+              <a:rPr lang="en-US" smtClean="0"/>
               <a:t>Fifth level</a:t>
             </a:r>
+            <a:endParaRPr lang="en-US"/>
           </a:p>
         </p:txBody>
       </p:sp>
@@ -476,7 +464,7 @@
           <a:p>
             <a:fld id="{5BCAD085-E8A6-8845-BD4E-CB4CCA059FC4}" type="datetimeFigureOut">
               <a:rPr lang="en-US" smtClean="0"/>
-              <a:t>9/19/26</a:t>
+              <a:t>1/27/13</a:t>
             </a:fld>
             <a:endParaRPr lang="en-US"/>
           </a:p>
@@ -575,9 +563,10 @@
           <a:lstStyle/>
           <a:p>
             <a:r>
-              <a:rPr lang="en-US"/>
+              <a:rPr lang="en-US" smtClean="0"/>
               <a:t>Click to edit Master title style</a:t>
             </a:r>
+            <a:endParaRPr lang="en-US"/>
           </a:p>
         </p:txBody>
       </p:sp>
@@ -603,37 +592,38 @@
           <a:p>
             <a:pPr lvl="0"/>
             <a:r>
-              <a:rPr lang="en-US"/>
+              <a:rPr lang="en-US" smtClean="0"/>
               <a:t>Click to edit Master text styles</a:t>
             </a:r>
           </a:p>
           <a:p>
             <a:pPr lvl="1"/>
             <a:r>
-              <a:rPr lang="en-US"/>
+              <a:rPr lang="en-US" smtClean="0"/>
               <a:t>Second level</a:t>
             </a:r>
           </a:p>
           <a:p>
             <a:pPr lvl="2"/>
             <a:r>
-              <a:rPr lang="en-US"/>
+              <a:rPr lang="en-US" smtClean="0"/>
               <a:t>Third level</a:t>
             </a:r>
           </a:p>
           <a:p>
             <a:pPr lvl="3"/>
             <a:r>
-              <a:rPr lang="en-US"/>
+              <a:rPr lang="en-US" smtClean="0"/>
               <a:t>Fourth level</a:t>
             </a:r>
           </a:p>
           <a:p>
             <a:pPr lvl="4"/>
             <a:r>
-              <a:rPr lang="en-US"/>
+              <a:rPr lang="en-US" smtClean="0"/>
               <a:t>Fifth level</a:t>
             </a:r>
+            <a:endParaRPr lang="en-US"/>
           </a:p>
         </p:txBody>
       </p:sp>
@@ -654,7 +644,7 @@
           <a:p>
             <a:fld id="{5BCAD085-E8A6-8845-BD4E-CB4CCA059FC4}" type="datetimeFigureOut">
               <a:rPr lang="en-US" smtClean="0"/>
-              <a:t>9/19/26</a:t>
+              <a:t>1/27/13</a:t>
             </a:fld>
             <a:endParaRPr lang="en-US"/>
           </a:p>
@@ -748,9 +738,10 @@
           <a:lstStyle/>
           <a:p>
             <a:r>
-              <a:rPr lang="en-US"/>
+              <a:rPr lang="en-US" smtClean="0"/>
               <a:t>Click to edit Master title style</a:t>
             </a:r>
+            <a:endParaRPr lang="en-US"/>
           </a:p>
         </p:txBody>
       </p:sp>
@@ -771,37 +762,38 @@
           <a:p>
             <a:pPr lvl="0"/>
             <a:r>
-              <a:rPr lang="en-US"/>
+              <a:rPr lang="en-US" smtClean="0"/>
               <a:t>Click to edit Master text styles</a:t>
             </a:r>
           </a:p>
           <a:p>
             <a:pPr lvl="1"/>
             <a:r>
-              <a:rPr lang="en-US"/>
+              <a:rPr lang="en-US" smtClean="0"/>
               <a:t>Second level</a:t>
             </a:r>
           </a:p>
           <a:p>
             <a:pPr lvl="2"/>
             <a:r>
-              <a:rPr lang="en-US"/>
+              <a:rPr lang="en-US" smtClean="0"/>
               <a:t>Third level</a:t>
             </a:r>
           </a:p>
           <a:p>
             <a:pPr lvl="3"/>
             <a:r>
-              <a:rPr lang="en-US"/>
+              <a:rPr lang="en-US" smtClean="0"/>
               <a:t>Fourth level</a:t>
             </a:r>
           </a:p>
           <a:p>
             <a:pPr lvl="4"/>
             <a:r>
-              <a:rPr lang="en-US"/>
+              <a:rPr lang="en-US" smtClean="0"/>
               <a:t>Fifth level</a:t>
             </a:r>
+            <a:endParaRPr lang="en-US"/>
           </a:p>
         </p:txBody>
       </p:sp>
@@ -822,7 +814,7 @@
           <a:p>
             <a:fld id="{5BCAD085-E8A6-8845-BD4E-CB4CCA059FC4}" type="datetimeFigureOut">
               <a:rPr lang="en-US" smtClean="0"/>
-              <a:t>9/19/26</a:t>
+              <a:t>1/27/13</a:t>
             </a:fld>
             <a:endParaRPr lang="en-US"/>
           </a:p>
@@ -925,9 +917,10 @@
           </a:lstStyle>
           <a:p>
             <a:r>
-              <a:rPr lang="en-US"/>
+              <a:rPr lang="en-US" smtClean="0"/>
               <a:t>Click to edit Master title style</a:t>
             </a:r>
+            <a:endParaRPr lang="en-US"/>
           </a:p>
         </p:txBody>
       </p:sp>
@@ -1044,7 +1037,7 @@
           <a:p>
             <a:pPr lvl="0"/>
             <a:r>
-              <a:rPr lang="en-US"/>
+              <a:rPr lang="en-US" smtClean="0"/>
               <a:t>Click to edit Master text styles</a:t>
             </a:r>
           </a:p>
@@ -1067,7 +1060,7 @@
           <a:p>
             <a:fld id="{5BCAD085-E8A6-8845-BD4E-CB4CCA059FC4}" type="datetimeFigureOut">
               <a:rPr lang="en-US" smtClean="0"/>
-              <a:t>9/19/26</a:t>
+              <a:t>1/27/13</a:t>
             </a:fld>
             <a:endParaRPr lang="en-US"/>
           </a:p>
@@ -1161,9 +1154,10 @@
           <a:lstStyle/>
           <a:p>
             <a:r>
-              <a:rPr lang="en-US"/>
+              <a:rPr lang="en-US" smtClean="0"/>
               <a:t>Click to edit Master title style</a:t>
             </a:r>
+            <a:endParaRPr lang="en-US"/>
           </a:p>
         </p:txBody>
       </p:sp>
@@ -1217,37 +1211,38 @@
           <a:p>
             <a:pPr lvl="0"/>
             <a:r>
-              <a:rPr lang="en-US"/>
+              <a:rPr lang="en-US" smtClean="0"/>
               <a:t>Click to edit Master text styles</a:t>
             </a:r>
           </a:p>
           <a:p>
             <a:pPr lvl="1"/>
             <a:r>
-              <a:rPr lang="en-US"/>
+              <a:rPr lang="en-US" smtClean="0"/>
               <a:t>Second level</a:t>
             </a:r>
           </a:p>
           <a:p>
             <a:pPr lvl="2"/>
             <a:r>
-              <a:rPr lang="en-US"/>
+              <a:rPr lang="en-US" smtClean="0"/>
               <a:t>Third level</a:t>
             </a:r>
           </a:p>
           <a:p>
             <a:pPr lvl="3"/>
             <a:r>
-              <a:rPr lang="en-US"/>
+              <a:rPr lang="en-US" smtClean="0"/>
               <a:t>Fourth level</a:t>
             </a:r>
           </a:p>
           <a:p>
             <a:pPr lvl="4"/>
             <a:r>
-              <a:rPr lang="en-US"/>
+              <a:rPr lang="en-US" smtClean="0"/>
               <a:t>Fifth level</a:t>
             </a:r>
+            <a:endParaRPr lang="en-US"/>
           </a:p>
         </p:txBody>
       </p:sp>
@@ -1301,37 +1296,38 @@
           <a:p>
             <a:pPr lvl="0"/>
             <a:r>
-              <a:rPr lang="en-US"/>
+              <a:rPr lang="en-US" smtClean="0"/>
               <a:t>Click to edit Master text styles</a:t>
             </a:r>
           </a:p>
           <a:p>
             <a:pPr lvl="1"/>
             <a:r>
-              <a:rPr lang="en-US"/>
+              <a:rPr lang="en-US" smtClean="0"/>
               <a:t>Second level</a:t>
             </a:r>
           </a:p>
           <a:p>
             <a:pPr lvl="2"/>
             <a:r>
-              <a:rPr lang="en-US"/>
+              <a:rPr lang="en-US" smtClean="0"/>
               <a:t>Third level</a:t>
             </a:r>
           </a:p>
           <a:p>
             <a:pPr lvl="3"/>
             <a:r>
-              <a:rPr lang="en-US"/>
+              <a:rPr lang="en-US" smtClean="0"/>
               <a:t>Fourth level</a:t>
             </a:r>
           </a:p>
           <a:p>
             <a:pPr lvl="4"/>
             <a:r>
-              <a:rPr lang="en-US"/>
+              <a:rPr lang="en-US" smtClean="0"/>
               <a:t>Fifth level</a:t>
             </a:r>
+            <a:endParaRPr lang="en-US"/>
           </a:p>
         </p:txBody>
       </p:sp>
@@ -1352,7 +1348,7 @@
           <a:p>
             <a:fld id="{5BCAD085-E8A6-8845-BD4E-CB4CCA059FC4}" type="datetimeFigureOut">
               <a:rPr lang="en-US" smtClean="0"/>
-              <a:t>9/19/26</a:t>
+              <a:t>1/27/13</a:t>
             </a:fld>
             <a:endParaRPr lang="en-US"/>
           </a:p>
@@ -1450,9 +1446,10 @@
           </a:lstStyle>
           <a:p>
             <a:r>
-              <a:rPr lang="en-US"/>
+              <a:rPr lang="en-US" smtClean="0"/>
               <a:t>Click to edit Master title style</a:t>
             </a:r>
+            <a:endParaRPr lang="en-US"/>
           </a:p>
         </p:txBody>
       </p:sp>
@@ -1515,7 +1512,7 @@
           <a:p>
             <a:pPr lvl="0"/>
             <a:r>
-              <a:rPr lang="en-US"/>
+              <a:rPr lang="en-US" smtClean="0"/>
               <a:t>Click to edit Master text styles</a:t>
             </a:r>
           </a:p>
@@ -1571,37 +1568,38 @@
           <a:p>
             <a:pPr lvl="0"/>
             <a:r>
-              <a:rPr lang="en-US"/>
+              <a:rPr lang="en-US" smtClean="0"/>
               <a:t>Click to edit Master text styles</a:t>
             </a:r>
           </a:p>
           <a:p>
             <a:pPr lvl="1"/>
             <a:r>
-              <a:rPr lang="en-US"/>
+              <a:rPr lang="en-US" smtClean="0"/>
               <a:t>Second level</a:t>
             </a:r>
           </a:p>
           <a:p>
             <a:pPr lvl="2"/>
             <a:r>
-              <a:rPr lang="en-US"/>
+              <a:rPr lang="en-US" smtClean="0"/>
               <a:t>Third level</a:t>
             </a:r>
           </a:p>
           <a:p>
             <a:pPr lvl="3"/>
             <a:r>
-              <a:rPr lang="en-US"/>
+              <a:rPr lang="en-US" smtClean="0"/>
               <a:t>Fourth level</a:t>
             </a:r>
           </a:p>
           <a:p>
             <a:pPr lvl="4"/>
             <a:r>
-              <a:rPr lang="en-US"/>
+              <a:rPr lang="en-US" smtClean="0"/>
               <a:t>Fifth level</a:t>
             </a:r>
+            <a:endParaRPr lang="en-US"/>
           </a:p>
         </p:txBody>
       </p:sp>
@@ -1664,7 +1662,7 @@
           <a:p>
             <a:pPr lvl="0"/>
             <a:r>
-              <a:rPr lang="en-US"/>
+              <a:rPr lang="en-US" smtClean="0"/>
               <a:t>Click to edit Master text styles</a:t>
             </a:r>
           </a:p>
@@ -1720,37 +1718,38 @@
           <a:p>
             <a:pPr lvl="0"/>
             <a:r>
-              <a:rPr lang="en-US"/>
+              <a:rPr lang="en-US" smtClean="0"/>
               <a:t>Click to edit Master text styles</a:t>
             </a:r>
           </a:p>
           <a:p>
             <a:pPr lvl="1"/>
             <a:r>
-              <a:rPr lang="en-US"/>
+              <a:rPr lang="en-US" smtClean="0"/>
               <a:t>Second level</a:t>
             </a:r>
           </a:p>
           <a:p>
             <a:pPr lvl="2"/>
             <a:r>
-              <a:rPr lang="en-US"/>
+              <a:rPr lang="en-US" smtClean="0"/>
               <a:t>Third level</a:t>
             </a:r>
           </a:p>
           <a:p>
             <a:pPr lvl="3"/>
             <a:r>
-              <a:rPr lang="en-US"/>
+              <a:rPr lang="en-US" smtClean="0"/>
               <a:t>Fourth level</a:t>
             </a:r>
           </a:p>
           <a:p>
             <a:pPr lvl="4"/>
             <a:r>
-              <a:rPr lang="en-US"/>
+              <a:rPr lang="en-US" smtClean="0"/>
               <a:t>Fifth level</a:t>
             </a:r>
+            <a:endParaRPr lang="en-US"/>
           </a:p>
         </p:txBody>
       </p:sp>
@@ -1771,7 +1770,7 @@
           <a:p>
             <a:fld id="{5BCAD085-E8A6-8845-BD4E-CB4CCA059FC4}" type="datetimeFigureOut">
               <a:rPr lang="en-US" smtClean="0"/>
-              <a:t>9/19/26</a:t>
+              <a:t>1/27/13</a:t>
             </a:fld>
             <a:endParaRPr lang="en-US"/>
           </a:p>
@@ -1865,9 +1864,10 @@
           <a:lstStyle/>
           <a:p>
             <a:r>
-              <a:rPr lang="en-US"/>
+              <a:rPr lang="en-US" smtClean="0"/>
               <a:t>Click to edit Master title style</a:t>
             </a:r>
+            <a:endParaRPr lang="en-US"/>
           </a:p>
         </p:txBody>
       </p:sp>
@@ -1888,7 +1888,7 @@
           <a:p>
             <a:fld id="{5BCAD085-E8A6-8845-BD4E-CB4CCA059FC4}" type="datetimeFigureOut">
               <a:rPr lang="en-US" smtClean="0"/>
-              <a:t>9/19/26</a:t>
+              <a:t>1/27/13</a:t>
             </a:fld>
             <a:endParaRPr lang="en-US"/>
           </a:p>
@@ -1983,7 +1983,7 @@
           <a:p>
             <a:fld id="{5BCAD085-E8A6-8845-BD4E-CB4CCA059FC4}" type="datetimeFigureOut">
               <a:rPr lang="en-US" smtClean="0"/>
-              <a:t>9/19/26</a:t>
+              <a:t>1/27/13</a:t>
             </a:fld>
             <a:endParaRPr lang="en-US"/>
           </a:p>
@@ -2086,9 +2086,10 @@
           </a:lstStyle>
           <a:p>
             <a:r>
-              <a:rPr lang="en-US"/>
+              <a:rPr lang="en-US" smtClean="0"/>
               <a:t>Click to edit Master title style</a:t>
             </a:r>
+            <a:endParaRPr lang="en-US"/>
           </a:p>
         </p:txBody>
       </p:sp>
@@ -2142,37 +2143,38 @@
           <a:p>
             <a:pPr lvl="0"/>
             <a:r>
-              <a:rPr lang="en-US"/>
+              <a:rPr lang="en-US" smtClean="0"/>
               <a:t>Click to edit Master text styles</a:t>
             </a:r>
           </a:p>
           <a:p>
             <a:pPr lvl="1"/>
             <a:r>
-              <a:rPr lang="en-US"/>
+              <a:rPr lang="en-US" smtClean="0"/>
               <a:t>Second level</a:t>
             </a:r>
           </a:p>
           <a:p>
             <a:pPr lvl="2"/>
             <a:r>
-              <a:rPr lang="en-US"/>
+              <a:rPr lang="en-US" smtClean="0"/>
               <a:t>Third level</a:t>
             </a:r>
           </a:p>
           <a:p>
             <a:pPr lvl="3"/>
             <a:r>
-              <a:rPr lang="en-US"/>
+              <a:rPr lang="en-US" smtClean="0"/>
               <a:t>Fourth level</a:t>
             </a:r>
           </a:p>
           <a:p>
             <a:pPr lvl="4"/>
             <a:r>
-              <a:rPr lang="en-US"/>
+              <a:rPr lang="en-US" smtClean="0"/>
               <a:t>Fifth level</a:t>
             </a:r>
+            <a:endParaRPr lang="en-US"/>
           </a:p>
         </p:txBody>
       </p:sp>
@@ -2235,7 +2237,7 @@
           <a:p>
             <a:pPr lvl="0"/>
             <a:r>
-              <a:rPr lang="en-US"/>
+              <a:rPr lang="en-US" smtClean="0"/>
               <a:t>Click to edit Master text styles</a:t>
             </a:r>
           </a:p>
@@ -2258,7 +2260,7 @@
           <a:p>
             <a:fld id="{5BCAD085-E8A6-8845-BD4E-CB4CCA059FC4}" type="datetimeFigureOut">
               <a:rPr lang="en-US" smtClean="0"/>
-              <a:t>9/19/26</a:t>
+              <a:t>1/27/13</a:t>
             </a:fld>
             <a:endParaRPr lang="en-US"/>
           </a:p>
@@ -2361,9 +2363,10 @@
           </a:lstStyle>
           <a:p>
             <a:r>
-              <a:rPr lang="en-US"/>
+              <a:rPr lang="en-US" smtClean="0"/>
               <a:t>Click to edit Master title style</a:t>
             </a:r>
+            <a:endParaRPr lang="en-US"/>
           </a:p>
         </p:txBody>
       </p:sp>
@@ -2487,7 +2490,7 @@
           <a:p>
             <a:pPr lvl="0"/>
             <a:r>
-              <a:rPr lang="en-US"/>
+              <a:rPr lang="en-US" smtClean="0"/>
               <a:t>Click to edit Master text styles</a:t>
             </a:r>
           </a:p>
@@ -2510,7 +2513,7 @@
           <a:p>
             <a:fld id="{5BCAD085-E8A6-8845-BD4E-CB4CCA059FC4}" type="datetimeFigureOut">
               <a:rPr lang="en-US" smtClean="0"/>
-              <a:t>9/19/26</a:t>
+              <a:t>1/27/13</a:t>
             </a:fld>
             <a:endParaRPr lang="en-US"/>
           </a:p>
@@ -2619,9 +2622,10 @@
           <a:lstStyle/>
           <a:p>
             <a:r>
-              <a:rPr lang="en-US"/>
+              <a:rPr lang="en-US" smtClean="0"/>
               <a:t>Click to edit Master title style</a:t>
             </a:r>
+            <a:endParaRPr lang="en-US"/>
           </a:p>
         </p:txBody>
       </p:sp>
@@ -2652,37 +2656,38 @@
           <a:p>
             <a:pPr lvl="0"/>
             <a:r>
-              <a:rPr lang="en-US"/>
+              <a:rPr lang="en-US" smtClean="0"/>
               <a:t>Click to edit Master text styles</a:t>
             </a:r>
           </a:p>
           <a:p>
             <a:pPr lvl="1"/>
             <a:r>
-              <a:rPr lang="en-US"/>
+              <a:rPr lang="en-US" smtClean="0"/>
               <a:t>Second level</a:t>
             </a:r>
           </a:p>
           <a:p>
             <a:pPr lvl="2"/>
             <a:r>
-              <a:rPr lang="en-US"/>
+              <a:rPr lang="en-US" smtClean="0"/>
               <a:t>Third level</a:t>
             </a:r>
           </a:p>
           <a:p>
             <a:pPr lvl="3"/>
             <a:r>
-              <a:rPr lang="en-US"/>
+              <a:rPr lang="en-US" smtClean="0"/>
               <a:t>Fourth level</a:t>
             </a:r>
           </a:p>
           <a:p>
             <a:pPr lvl="4"/>
             <a:r>
-              <a:rPr lang="en-US"/>
+              <a:rPr lang="en-US" smtClean="0"/>
               <a:t>Fifth level</a:t>
             </a:r>
+            <a:endParaRPr lang="en-US"/>
           </a:p>
         </p:txBody>
       </p:sp>
@@ -2721,7 +2726,7 @@
           <a:p>
             <a:fld id="{5BCAD085-E8A6-8845-BD4E-CB4CCA059FC4}" type="datetimeFigureOut">
               <a:rPr lang="en-US" smtClean="0"/>
-              <a:t>9/19/26</a:t>
+              <a:t>1/27/13</a:t>
             </a:fld>
             <a:endParaRPr lang="en-US"/>
           </a:p>
@@ -3080,7 +3085,7 @@
 </file>
 
 <file path=ppt/slides/slide1.xml><?xml version="1.0" encoding="utf-8"?>
-<p:sld xmlns:a="http://schemas.openxmlformats.org/drawingml/2006/main" xmlns:r="http://schemas.openxmlformats.org/officeDocument/2006/relationships" xmlns:p="http://schemas.openxmlformats.org/presentationml/2006/main">
+<p:sld xmlns:a="http://schemas.openxmlformats.org/drawingml/2006/main" xmlns:p="http://schemas.openxmlformats.org/presentationml/2006/main" xmlns:r="http://schemas.openxmlformats.org/officeDocument/2006/relationships">
   <p:cSld>
     <p:spTree>
       <p:nvGrpSpPr>
@@ -3088,14 +3093,7 @@
         <p:cNvGrpSpPr/>
         <p:nvPr/>
       </p:nvGrpSpPr>
-      <p:grpSpPr>
-        <a:xfrm>
-          <a:off x="0" y="0"/>
-          <a:ext cx="0" cy="0"/>
-          <a:chOff x="0" y="0"/>
-          <a:chExt cx="0" cy="0"/>
-        </a:xfrm>
-      </p:grpSpPr>
+      <p:grpSpPr/>
       <p:sp>
         <p:nvSpPr>
           <p:cNvPr id="2" name="Rectangle 1"/>
@@ -3111,7 +3109,7 @@
             <a:avLst/>
           </a:prstGeom>
           <a:solidFill>
-            <a:srgbClr val="F8FAFC"/>
+            <a:srgbClr val="0F172A"/>
           </a:solidFill>
           <a:ln>
             <a:noFill/>
@@ -3136,31 +3134,280 @@
           <a:lstStyle/>
           <a:p>
             <a:pPr algn="ctr"/>
-            <a:endParaRPr/>
-          </a:p>
-        </p:txBody>
-      </p:sp>
-      <p:sp>
-        <p:nvSpPr>
-          <p:cNvPr id="3" name="Rounded Rectangle 2"/>
+          </a:p>
+        </p:txBody>
+      </p:sp>
+      <p:sp>
+        <p:nvSpPr>
+          <p:cNvPr id="3" name="TextBox 2"/>
+          <p:cNvSpPr txBox="1"/>
+          <p:nvPr/>
+        </p:nvSpPr>
+        <p:spPr>
+          <a:xfrm>
+            <a:off x="731520" y="2011680"/>
+            <a:ext cx="10515600" cy="457200"/>
+          </a:xfrm>
+          <a:prstGeom prst="rect">
+            <a:avLst/>
+          </a:prstGeom>
+          <a:noFill/>
+        </p:spPr>
+        <p:txBody>
+          <a:bodyPr wrap="square">
+            <a:spAutoFit/>
+          </a:bodyPr>
+          <a:lstStyle/>
+          <a:p>
+            <a:pPr>
+              <a:spcAft>
+                <a:spcPts val="800"/>
+              </a:spcAft>
+            </a:pPr>
+            <a:r>
+              <a:rPr sz="1300" b="1">
+                <a:solidFill>
+                  <a:srgbClr val="93C5FD"/>
+                </a:solidFill>
+                <a:latin typeface="Calibri"/>
+              </a:rPr>
+              <a:t>DATA ANALYTICS CASE STUDY</a:t>
+            </a:r>
+          </a:p>
+        </p:txBody>
+      </p:sp>
+      <p:sp>
+        <p:nvSpPr>
+          <p:cNvPr id="4" name="TextBox 3"/>
+          <p:cNvSpPr txBox="1"/>
+          <p:nvPr/>
+        </p:nvSpPr>
+        <p:spPr>
+          <a:xfrm>
+            <a:off x="731520" y="2468880"/>
+            <a:ext cx="10515600" cy="1280160"/>
+          </a:xfrm>
+          <a:prstGeom prst="rect">
+            <a:avLst/>
+          </a:prstGeom>
+          <a:noFill/>
+        </p:spPr>
+        <p:txBody>
+          <a:bodyPr wrap="square">
+            <a:spAutoFit/>
+          </a:bodyPr>
+          <a:lstStyle/>
+          <a:p>
+            <a:pPr>
+              <a:spcAft>
+                <a:spcPts val="800"/>
+              </a:spcAft>
+            </a:pPr>
+            <a:r>
+              <a:rPr sz="3800" b="1">
+                <a:solidFill>
+                  <a:srgbClr val="FFFFFF"/>
+                </a:solidFill>
+                <a:latin typeface="Calibri"/>
+              </a:rPr>
+              <a:t>E-Commerce Customer Segmentation and Cohort Retention</a:t>
+            </a:r>
+          </a:p>
+        </p:txBody>
+      </p:sp>
+      <p:sp>
+        <p:nvSpPr>
+          <p:cNvPr id="5" name="TextBox 4"/>
+          <p:cNvSpPr txBox="1"/>
+          <p:nvPr/>
+        </p:nvSpPr>
+        <p:spPr>
+          <a:xfrm>
+            <a:off x="731520" y="3931920"/>
+            <a:ext cx="10515600" cy="548640"/>
+          </a:xfrm>
+          <a:prstGeom prst="rect">
+            <a:avLst/>
+          </a:prstGeom>
+          <a:noFill/>
+        </p:spPr>
+        <p:txBody>
+          <a:bodyPr wrap="square">
+            <a:spAutoFit/>
+          </a:bodyPr>
+          <a:lstStyle/>
+          <a:p>
+            <a:pPr>
+              <a:spcAft>
+                <a:spcPts val="800"/>
+              </a:spcAft>
+            </a:pPr>
+            <a:r>
+              <a:rPr sz="1800" b="0">
+                <a:solidFill>
+                  <a:srgbClr val="CBD5E1"/>
+                </a:solidFill>
+                <a:latin typeface="Calibri"/>
+              </a:rPr>
+              <a:t>Who comes back after the first order, and which customers are worth keeping</a:t>
+            </a:r>
+          </a:p>
+        </p:txBody>
+      </p:sp>
+      <p:sp>
+        <p:nvSpPr>
+          <p:cNvPr id="6" name="TextBox 5"/>
+          <p:cNvSpPr txBox="1"/>
+          <p:nvPr/>
+        </p:nvSpPr>
+        <p:spPr>
+          <a:xfrm>
+            <a:off x="731520" y="5120640"/>
+            <a:ext cx="10515600" cy="457200"/>
+          </a:xfrm>
+          <a:prstGeom prst="rect">
+            <a:avLst/>
+          </a:prstGeom>
+          <a:noFill/>
+        </p:spPr>
+        <p:txBody>
+          <a:bodyPr wrap="square">
+            <a:spAutoFit/>
+          </a:bodyPr>
+          <a:lstStyle/>
+          <a:p>
+            <a:pPr>
+              <a:spcAft>
+                <a:spcPts val="800"/>
+              </a:spcAft>
+            </a:pPr>
+            <a:r>
+              <a:rPr sz="1300" b="0">
+                <a:solidFill>
+                  <a:srgbClr val="94A3B8"/>
+                </a:solidFill>
+                <a:latin typeface="Calibri"/>
+              </a:rPr>
+              <a:t>UCI Online Retail II · Dec 2009 to Dec 2011 · SQL, Python, Tableau · Novaldi Ramadhan Waluyo</a:t>
+            </a:r>
+          </a:p>
+        </p:txBody>
+      </p:sp>
+    </p:spTree>
+  </p:cSld>
+  <p:clrMapOvr>
+    <a:masterClrMapping/>
+  </p:clrMapOvr>
+</p:sld>
+</file>
+
+<file path=ppt/slides/slide2.xml><?xml version="1.0" encoding="utf-8"?>
+<p:sld xmlns:a="http://schemas.openxmlformats.org/drawingml/2006/main" xmlns:p="http://schemas.openxmlformats.org/presentationml/2006/main" xmlns:r="http://schemas.openxmlformats.org/officeDocument/2006/relationships">
+  <p:cSld>
+    <p:spTree>
+      <p:nvGrpSpPr>
+        <p:cNvPr id="1" name=""/>
+        <p:cNvGrpSpPr/>
+        <p:nvPr/>
+      </p:nvGrpSpPr>
+      <p:grpSpPr/>
+      <p:sp>
+        <p:nvSpPr>
+          <p:cNvPr id="2" name="TextBox 1"/>
+          <p:cNvSpPr txBox="1"/>
+          <p:nvPr/>
+        </p:nvSpPr>
+        <p:spPr>
+          <a:xfrm>
+            <a:off x="548640" y="320040"/>
+            <a:ext cx="10972800" cy="365760"/>
+          </a:xfrm>
+          <a:prstGeom prst="rect">
+            <a:avLst/>
+          </a:prstGeom>
+          <a:noFill/>
+        </p:spPr>
+        <p:txBody>
+          <a:bodyPr wrap="square">
+            <a:spAutoFit/>
+          </a:bodyPr>
+          <a:lstStyle/>
+          <a:p>
+            <a:pPr>
+              <a:spcAft>
+                <a:spcPts val="800"/>
+              </a:spcAft>
+            </a:pPr>
+            <a:r>
+              <a:rPr sz="1100" b="1">
+                <a:solidFill>
+                  <a:srgbClr val="1D4ED8"/>
+                </a:solidFill>
+                <a:latin typeface="Calibri"/>
+              </a:rPr>
+              <a:t>OVERVIEW</a:t>
+            </a:r>
+          </a:p>
+        </p:txBody>
+      </p:sp>
+      <p:sp>
+        <p:nvSpPr>
+          <p:cNvPr id="3" name="TextBox 2"/>
+          <p:cNvSpPr txBox="1"/>
+          <p:nvPr/>
+        </p:nvSpPr>
+        <p:spPr>
+          <a:xfrm>
+            <a:off x="548640" y="640080"/>
+            <a:ext cx="11064240" cy="731520"/>
+          </a:xfrm>
+          <a:prstGeom prst="rect">
+            <a:avLst/>
+          </a:prstGeom>
+          <a:noFill/>
+        </p:spPr>
+        <p:txBody>
+          <a:bodyPr wrap="square">
+            <a:spAutoFit/>
+          </a:bodyPr>
+          <a:lstStyle/>
+          <a:p>
+            <a:pPr>
+              <a:spcAft>
+                <a:spcPts val="800"/>
+              </a:spcAft>
+            </a:pPr>
+            <a:r>
+              <a:rPr sz="2800" b="1">
+                <a:solidFill>
+                  <a:srgbClr val="0F172A"/>
+                </a:solidFill>
+                <a:latin typeface="Calibri"/>
+              </a:rPr>
+              <a:t>Summary</a:t>
+            </a:r>
+          </a:p>
+        </p:txBody>
+      </p:sp>
+      <p:sp>
+        <p:nvSpPr>
+          <p:cNvPr id="4" name="Rectangle 3"/>
           <p:cNvSpPr/>
           <p:nvPr/>
         </p:nvSpPr>
         <p:spPr>
           <a:xfrm>
-            <a:off x="731520" y="731520"/>
-            <a:ext cx="10728655" cy="5394960"/>
-          </a:xfrm>
-          <a:prstGeom prst="roundRect">
+            <a:off x="548640" y="1554480"/>
+            <a:ext cx="2606040" cy="1234440"/>
+          </a:xfrm>
+          <a:prstGeom prst="rect">
             <a:avLst/>
           </a:prstGeom>
           <a:solidFill>
-            <a:srgbClr val="FFFFFF"/>
+            <a:srgbClr val="F1F5F9"/>
           </a:solidFill>
-          <a:ln w="12700">
-            <a:solidFill>
-              <a:srgbClr val="E2E8F0"/>
-            </a:solidFill>
+          <a:ln>
+            <a:noFill/>
           </a:ln>
         </p:spPr>
         <p:style>
@@ -3182,20 +3429,19 @@
           <a:lstStyle/>
           <a:p>
             <a:pPr algn="ctr"/>
-            <a:endParaRPr/>
-          </a:p>
-        </p:txBody>
-      </p:sp>
-      <p:sp>
-        <p:nvSpPr>
-          <p:cNvPr id="4" name="TextBox 3"/>
+          </a:p>
+        </p:txBody>
+      </p:sp>
+      <p:sp>
+        <p:nvSpPr>
+          <p:cNvPr id="5" name="TextBox 4"/>
           <p:cNvSpPr txBox="1"/>
           <p:nvPr/>
         </p:nvSpPr>
         <p:spPr>
           <a:xfrm>
-            <a:off x="1188720" y="1188720"/>
-            <a:ext cx="9784080" cy="2926080"/>
+            <a:off x="731520" y="1645920"/>
+            <a:ext cx="2286000" cy="548640"/>
           </a:xfrm>
           <a:prstGeom prst="rect">
             <a:avLst/>
@@ -3203,90 +3449,86 @@
           <a:noFill/>
         </p:spPr>
         <p:txBody>
-          <a:bodyPr wrap="square" lIns="0" tIns="0" rIns="0" bIns="0">
+          <a:bodyPr wrap="square">
             <a:spAutoFit/>
           </a:bodyPr>
           <a:lstStyle/>
           <a:p>
             <a:pPr>
               <a:spcAft>
-                <a:spcPts val="1200"/>
+                <a:spcPts val="800"/>
               </a:spcAft>
-              <a:defRPr sz="1000" b="1">
-                <a:solidFill>
-                  <a:srgbClr val="2563EB"/>
-                </a:solidFill>
-              </a:defRPr>
             </a:pPr>
             <a:r>
-              <a:t>PORTFOLIO CASE STUDY • RETAIL &amp; E-COMMERCE ANALYTICS</a:t>
-            </a:r>
-          </a:p>
+              <a:rPr sz="2800" b="1">
+                <a:solidFill>
+                  <a:srgbClr val="0F172A"/>
+                </a:solidFill>
+                <a:latin typeface="Calibri"/>
+              </a:rPr>
+              <a:t>£17.74M</a:t>
+            </a:r>
+          </a:p>
+        </p:txBody>
+      </p:sp>
+      <p:sp>
+        <p:nvSpPr>
+          <p:cNvPr id="6" name="TextBox 5"/>
+          <p:cNvSpPr txBox="1"/>
+          <p:nvPr/>
+        </p:nvSpPr>
+        <p:spPr>
+          <a:xfrm>
+            <a:off x="731520" y="2286000"/>
+            <a:ext cx="2286000" cy="365760"/>
+          </a:xfrm>
+          <a:prstGeom prst="rect">
+            <a:avLst/>
+          </a:prstGeom>
+          <a:noFill/>
+        </p:spPr>
+        <p:txBody>
+          <a:bodyPr wrap="square">
+            <a:spAutoFit/>
+          </a:bodyPr>
+          <a:lstStyle/>
           <a:p>
             <a:pPr>
               <a:spcAft>
-                <a:spcPts val="1000"/>
+                <a:spcPts val="800"/>
               </a:spcAft>
-              <a:defRPr sz="3000" b="1">
-                <a:solidFill>
-                  <a:srgbClr val="0F172A"/>
-                </a:solidFill>
-              </a:defRPr>
             </a:pPr>
             <a:r>
-              <a:t>Customer Segmentation &amp; Cohort Retention Optimization</a:t>
-            </a:r>
-          </a:p>
-          <a:p>
-            <a:pPr>
-              <a:spcAft>
-                <a:spcPts val="2000"/>
-              </a:spcAft>
-              <a:defRPr sz="1300">
+              <a:rPr sz="1200" b="0">
                 <a:solidFill>
                   <a:srgbClr val="64748B"/>
                 </a:solidFill>
-              </a:defRPr>
-            </a:pPr>
-            <a:r>
-              <a:t>Tackling a 25% Surge in Customer Acquisition Costs (CAC) via Behavioral RFM Modeling, Month-1 Churn Diagnostics, and Strategic Lifecycle Marketing.</a:t>
-            </a:r>
-          </a:p>
-          <a:p>
-            <a:pPr>
-              <a:defRPr sz="1000" b="1">
-                <a:solidFill>
-                  <a:srgbClr val="334155"/>
-                </a:solidFill>
-              </a:defRPr>
-            </a:pPr>
-            <a:r>
-              <a:t>Author: Novaldi Ramadhan Waluyo (Data Analyst)   |   Stakeholders: CMO, CRM Lead, Product Growth Manager</a:t>
-            </a:r>
-          </a:p>
-        </p:txBody>
-      </p:sp>
-      <p:sp>
-        <p:nvSpPr>
-          <p:cNvPr id="5" name="Rounded Rectangle 4"/>
+                <a:latin typeface="Calibri"/>
+              </a:rPr>
+              <a:t>Revenue, identified customers</a:t>
+            </a:r>
+          </a:p>
+        </p:txBody>
+      </p:sp>
+      <p:sp>
+        <p:nvSpPr>
+          <p:cNvPr id="7" name="Rectangle 6"/>
           <p:cNvSpPr/>
           <p:nvPr/>
         </p:nvSpPr>
         <p:spPr>
           <a:xfrm>
-            <a:off x="1188720" y="4617720"/>
-            <a:ext cx="2331720" cy="1051560"/>
-          </a:xfrm>
-          <a:prstGeom prst="roundRect">
+            <a:off x="3364992" y="1554480"/>
+            <a:ext cx="2606040" cy="1234440"/>
+          </a:xfrm>
+          <a:prstGeom prst="rect">
             <a:avLst/>
           </a:prstGeom>
           <a:solidFill>
             <a:srgbClr val="F1F5F9"/>
           </a:solidFill>
-          <a:ln w="12700">
-            <a:solidFill>
-              <a:srgbClr val="E2E8F0"/>
-            </a:solidFill>
+          <a:ln>
+            <a:noFill/>
           </a:ln>
         </p:spPr>
         <p:style>
@@ -3304,55 +3546,110 @@
           </a:fontRef>
         </p:style>
         <p:txBody>
-          <a:bodyPr lIns="0" tIns="0" rIns="0" bIns="0" rtlCol="0" anchor="ctr"/>
-          <a:lstStyle/>
-          <a:p>
-            <a:pPr algn="ctr">
-              <a:defRPr sz="850" b="1">
+          <a:bodyPr rtlCol="0" anchor="ctr"/>
+          <a:lstStyle/>
+          <a:p>
+            <a:pPr algn="ctr"/>
+          </a:p>
+        </p:txBody>
+      </p:sp>
+      <p:sp>
+        <p:nvSpPr>
+          <p:cNvPr id="8" name="TextBox 7"/>
+          <p:cNvSpPr txBox="1"/>
+          <p:nvPr/>
+        </p:nvSpPr>
+        <p:spPr>
+          <a:xfrm>
+            <a:off x="3547872" y="1645920"/>
+            <a:ext cx="2286000" cy="548640"/>
+          </a:xfrm>
+          <a:prstGeom prst="rect">
+            <a:avLst/>
+          </a:prstGeom>
+          <a:noFill/>
+        </p:spPr>
+        <p:txBody>
+          <a:bodyPr wrap="square">
+            <a:spAutoFit/>
+          </a:bodyPr>
+          <a:lstStyle/>
+          <a:p>
+            <a:pPr>
+              <a:spcAft>
+                <a:spcPts val="800"/>
+              </a:spcAft>
+            </a:pPr>
+            <a:r>
+              <a:rPr sz="2800" b="1">
+                <a:solidFill>
+                  <a:srgbClr val="0F172A"/>
+                </a:solidFill>
+                <a:latin typeface="Calibri"/>
+              </a:rPr>
+              <a:t>805.5K</a:t>
+            </a:r>
+          </a:p>
+        </p:txBody>
+      </p:sp>
+      <p:sp>
+        <p:nvSpPr>
+          <p:cNvPr id="9" name="TextBox 8"/>
+          <p:cNvSpPr txBox="1"/>
+          <p:nvPr/>
+        </p:nvSpPr>
+        <p:spPr>
+          <a:xfrm>
+            <a:off x="3547872" y="2286000"/>
+            <a:ext cx="2286000" cy="365760"/>
+          </a:xfrm>
+          <a:prstGeom prst="rect">
+            <a:avLst/>
+          </a:prstGeom>
+          <a:noFill/>
+        </p:spPr>
+        <p:txBody>
+          <a:bodyPr wrap="square">
+            <a:spAutoFit/>
+          </a:bodyPr>
+          <a:lstStyle/>
+          <a:p>
+            <a:pPr>
+              <a:spcAft>
+                <a:spcPts val="800"/>
+              </a:spcAft>
+            </a:pPr>
+            <a:r>
+              <a:rPr sz="1200" b="0">
                 <a:solidFill>
                   <a:srgbClr val="64748B"/>
                 </a:solidFill>
-              </a:defRPr>
-            </a:pPr>
-            <a:r>
-              <a:t>TOTAL REVENUE</a:t>
-            </a:r>
-          </a:p>
-          <a:p>
-            <a:pPr algn="ctr">
-              <a:defRPr sz="1800" b="1">
-                <a:solidFill>
-                  <a:srgbClr val="2563EB"/>
-                </a:solidFill>
-              </a:defRPr>
-            </a:pPr>
-            <a:r>
-              <a:t>£17.74M</a:t>
-            </a:r>
-          </a:p>
-        </p:txBody>
-      </p:sp>
-      <p:sp>
-        <p:nvSpPr>
-          <p:cNvPr id="6" name="Rounded Rectangle 5"/>
+                <a:latin typeface="Calibri"/>
+              </a:rPr>
+              <a:t>Cleaned transactions</a:t>
+            </a:r>
+          </a:p>
+        </p:txBody>
+      </p:sp>
+      <p:sp>
+        <p:nvSpPr>
+          <p:cNvPr id="10" name="Rectangle 9"/>
           <p:cNvSpPr/>
           <p:nvPr/>
         </p:nvSpPr>
         <p:spPr>
           <a:xfrm>
-            <a:off x="3675888" y="4617720"/>
-            <a:ext cx="2331720" cy="1051560"/>
-          </a:xfrm>
-          <a:prstGeom prst="roundRect">
+            <a:off x="6181344" y="1554480"/>
+            <a:ext cx="2606040" cy="1234440"/>
+          </a:xfrm>
+          <a:prstGeom prst="rect">
             <a:avLst/>
           </a:prstGeom>
           <a:solidFill>
             <a:srgbClr val="F1F5F9"/>
           </a:solidFill>
-          <a:ln w="12700">
-            <a:solidFill>
-              <a:srgbClr val="E2E8F0"/>
-            </a:solidFill>
+          <a:ln>
+            <a:noFill/>
           </a:ln>
         </p:spPr>
         <p:style>
@@ -3370,55 +3667,110 @@
           </a:fontRef>
         </p:style>
         <p:txBody>
-          <a:bodyPr lIns="0" tIns="0" rIns="0" bIns="0" rtlCol="0" anchor="ctr"/>
-          <a:lstStyle/>
-          <a:p>
-            <a:pPr algn="ctr">
-              <a:defRPr sz="850" b="1">
+          <a:bodyPr rtlCol="0" anchor="ctr"/>
+          <a:lstStyle/>
+          <a:p>
+            <a:pPr algn="ctr"/>
+          </a:p>
+        </p:txBody>
+      </p:sp>
+      <p:sp>
+        <p:nvSpPr>
+          <p:cNvPr id="11" name="TextBox 10"/>
+          <p:cNvSpPr txBox="1"/>
+          <p:nvPr/>
+        </p:nvSpPr>
+        <p:spPr>
+          <a:xfrm>
+            <a:off x="6364224" y="1645920"/>
+            <a:ext cx="2286000" cy="548640"/>
+          </a:xfrm>
+          <a:prstGeom prst="rect">
+            <a:avLst/>
+          </a:prstGeom>
+          <a:noFill/>
+        </p:spPr>
+        <p:txBody>
+          <a:bodyPr wrap="square">
+            <a:spAutoFit/>
+          </a:bodyPr>
+          <a:lstStyle/>
+          <a:p>
+            <a:pPr>
+              <a:spcAft>
+                <a:spcPts val="800"/>
+              </a:spcAft>
+            </a:pPr>
+            <a:r>
+              <a:rPr sz="2800" b="1">
+                <a:solidFill>
+                  <a:srgbClr val="0F172A"/>
+                </a:solidFill>
+                <a:latin typeface="Calibri"/>
+              </a:rPr>
+              <a:t>5,878</a:t>
+            </a:r>
+          </a:p>
+        </p:txBody>
+      </p:sp>
+      <p:sp>
+        <p:nvSpPr>
+          <p:cNvPr id="12" name="TextBox 11"/>
+          <p:cNvSpPr txBox="1"/>
+          <p:nvPr/>
+        </p:nvSpPr>
+        <p:spPr>
+          <a:xfrm>
+            <a:off x="6364224" y="2286000"/>
+            <a:ext cx="2286000" cy="365760"/>
+          </a:xfrm>
+          <a:prstGeom prst="rect">
+            <a:avLst/>
+          </a:prstGeom>
+          <a:noFill/>
+        </p:spPr>
+        <p:txBody>
+          <a:bodyPr wrap="square">
+            <a:spAutoFit/>
+          </a:bodyPr>
+          <a:lstStyle/>
+          <a:p>
+            <a:pPr>
+              <a:spcAft>
+                <a:spcPts val="800"/>
+              </a:spcAft>
+            </a:pPr>
+            <a:r>
+              <a:rPr sz="1200" b="0">
                 <a:solidFill>
                   <a:srgbClr val="64748B"/>
                 </a:solidFill>
-              </a:defRPr>
-            </a:pPr>
-            <a:r>
-              <a:t>CLEANED TRANSACTIONS</a:t>
-            </a:r>
-          </a:p>
-          <a:p>
-            <a:pPr algn="ctr">
-              <a:defRPr sz="1800" b="1">
-                <a:solidFill>
-                  <a:srgbClr val="10B981"/>
-                </a:solidFill>
-              </a:defRPr>
-            </a:pPr>
-            <a:r>
-              <a:t>805.5K</a:t>
-            </a:r>
-          </a:p>
-        </p:txBody>
-      </p:sp>
-      <p:sp>
-        <p:nvSpPr>
-          <p:cNvPr id="7" name="Rounded Rectangle 6"/>
+                <a:latin typeface="Calibri"/>
+              </a:rPr>
+              <a:t>Customers</a:t>
+            </a:r>
+          </a:p>
+        </p:txBody>
+      </p:sp>
+      <p:sp>
+        <p:nvSpPr>
+          <p:cNvPr id="13" name="Rectangle 12"/>
           <p:cNvSpPr/>
           <p:nvPr/>
         </p:nvSpPr>
         <p:spPr>
           <a:xfrm>
-            <a:off x="6163056" y="4617720"/>
-            <a:ext cx="2331720" cy="1051560"/>
-          </a:xfrm>
-          <a:prstGeom prst="roundRect">
+            <a:off x="8997696" y="1554480"/>
+            <a:ext cx="2606040" cy="1234440"/>
+          </a:xfrm>
+          <a:prstGeom prst="rect">
             <a:avLst/>
           </a:prstGeom>
           <a:solidFill>
             <a:srgbClr val="F1F5F9"/>
           </a:solidFill>
-          <a:ln w="12700">
-            <a:solidFill>
-              <a:srgbClr val="E2E8F0"/>
-            </a:solidFill>
+          <a:ln>
+            <a:noFill/>
           </a:ln>
         </p:spPr>
         <p:style>
@@ -3436,55 +3788,854 @@
           </a:fontRef>
         </p:style>
         <p:txBody>
-          <a:bodyPr lIns="0" tIns="0" rIns="0" bIns="0" rtlCol="0" anchor="ctr"/>
-          <a:lstStyle/>
-          <a:p>
-            <a:pPr algn="ctr">
-              <a:defRPr sz="850" b="1">
+          <a:bodyPr rtlCol="0" anchor="ctr"/>
+          <a:lstStyle/>
+          <a:p>
+            <a:pPr algn="ctr"/>
+          </a:p>
+        </p:txBody>
+      </p:sp>
+      <p:sp>
+        <p:nvSpPr>
+          <p:cNvPr id="14" name="TextBox 13"/>
+          <p:cNvSpPr txBox="1"/>
+          <p:nvPr/>
+        </p:nvSpPr>
+        <p:spPr>
+          <a:xfrm>
+            <a:off x="9180576" y="1645920"/>
+            <a:ext cx="2286000" cy="548640"/>
+          </a:xfrm>
+          <a:prstGeom prst="rect">
+            <a:avLst/>
+          </a:prstGeom>
+          <a:noFill/>
+        </p:spPr>
+        <p:txBody>
+          <a:bodyPr wrap="square">
+            <a:spAutoFit/>
+          </a:bodyPr>
+          <a:lstStyle/>
+          <a:p>
+            <a:pPr>
+              <a:spcAft>
+                <a:spcPts val="800"/>
+              </a:spcAft>
+            </a:pPr>
+            <a:r>
+              <a:rPr sz="2800" b="1">
+                <a:solidFill>
+                  <a:srgbClr val="0F172A"/>
+                </a:solidFill>
+                <a:latin typeface="Calibri"/>
+              </a:rPr>
+              <a:t>21%</a:t>
+            </a:r>
+          </a:p>
+        </p:txBody>
+      </p:sp>
+      <p:sp>
+        <p:nvSpPr>
+          <p:cNvPr id="15" name="TextBox 14"/>
+          <p:cNvSpPr txBox="1"/>
+          <p:nvPr/>
+        </p:nvSpPr>
+        <p:spPr>
+          <a:xfrm>
+            <a:off x="9180576" y="2286000"/>
+            <a:ext cx="2286000" cy="365760"/>
+          </a:xfrm>
+          <a:prstGeom prst="rect">
+            <a:avLst/>
+          </a:prstGeom>
+          <a:noFill/>
+        </p:spPr>
+        <p:txBody>
+          <a:bodyPr wrap="square">
+            <a:spAutoFit/>
+          </a:bodyPr>
+          <a:lstStyle/>
+          <a:p>
+            <a:pPr>
+              <a:spcAft>
+                <a:spcPts val="800"/>
+              </a:spcAft>
+            </a:pPr>
+            <a:r>
+              <a:rPr sz="1200" b="0">
                 <a:solidFill>
                   <a:srgbClr val="64748B"/>
                 </a:solidFill>
-              </a:defRPr>
+                <a:latin typeface="Calibri"/>
+              </a:rPr>
+              <a:t>Return in month 1 (avg)</a:t>
+            </a:r>
+          </a:p>
+        </p:txBody>
+      </p:sp>
+      <p:sp>
+        <p:nvSpPr>
+          <p:cNvPr id="16" name="TextBox 15"/>
+          <p:cNvSpPr txBox="1"/>
+          <p:nvPr/>
+        </p:nvSpPr>
+        <p:spPr>
+          <a:xfrm>
+            <a:off x="548640" y="3154680"/>
+            <a:ext cx="11064240" cy="3291840"/>
+          </a:xfrm>
+          <a:prstGeom prst="rect">
+            <a:avLst/>
+          </a:prstGeom>
+          <a:noFill/>
+        </p:spPr>
+        <p:txBody>
+          <a:bodyPr wrap="square">
+            <a:spAutoFit/>
+          </a:bodyPr>
+          <a:lstStyle/>
+          <a:p>
+            <a:pPr>
+              <a:spcAft>
+                <a:spcPts val="800"/>
+              </a:spcAft>
             </a:pPr>
             <a:r>
-              <a:t>UNIQUE CUSTOMERS</a:t>
-            </a:r>
-          </a:p>
-          <a:p>
-            <a:pPr algn="ctr">
-              <a:defRPr sz="1800" b="1">
+              <a:rPr sz="1400" b="1">
+                <a:solidFill>
+                  <a:srgbClr val="1E293B"/>
+                </a:solidFill>
+                <a:latin typeface="Calibri"/>
+              </a:rPr>
+              <a:t>Most customers do not come back in the first month. </a:t>
+            </a:r>
+            <a:r>
+              <a:rPr sz="1400" b="0">
+                <a:solidFill>
+                  <a:srgbClr val="1E293B"/>
+                </a:solidFill>
+                <a:latin typeface="Calibri"/>
+              </a:rPr>
+              <a:t>Across the 24 cohorts with a month-1 value, on average only 21% of new customers bought again in the month after their first order. Retention stays near 20% for the next few months and is about 18% at month 6 and 18% at month 12. The largest loss happens right after the first order.</a:t>
+            </a:r>
+          </a:p>
+          <a:p>
+            <a:pPr>
+              <a:spcAft>
+                <a:spcPts val="800"/>
+              </a:spcAft>
+            </a:pPr>
+            <a:r>
+              <a:rPr sz="1400" b="1">
+                <a:solidFill>
+                  <a:srgbClr val="1E293B"/>
+                </a:solidFill>
+                <a:latin typeface="Calibri"/>
+              </a:rPr>
+              <a:t>A small group of customers brings in most of the revenue. </a:t>
+            </a:r>
+            <a:r>
+              <a:rPr sz="1400" b="0">
+                <a:solidFill>
+                  <a:srgbClr val="1E293B"/>
+                </a:solidFill>
+                <a:latin typeface="Calibri"/>
+              </a:rPr>
+              <a:t>Champions and Loyal Customers are 43% of customers but 85% of revenue. Champions alone (1,324 customers) account for 69% of revenue.</a:t>
+            </a:r>
+          </a:p>
+          <a:p>
+            <a:pPr>
+              <a:spcAft>
+                <a:spcPts val="800"/>
+              </a:spcAft>
+            </a:pPr>
+            <a:r>
+              <a:rPr sz="1400" b="1">
+                <a:solidFill>
+                  <a:srgbClr val="1E293B"/>
+                </a:solidFill>
+                <a:latin typeface="Calibri"/>
+              </a:rPr>
+              <a:t>At Risk customers are the clearest win-back target. </a:t>
+            </a:r>
+            <a:r>
+              <a:rPr sz="1400" b="0">
+                <a:solidFill>
+                  <a:srgbClr val="1E293B"/>
+                </a:solidFill>
+                <a:latin typeface="Calibri"/>
+              </a:rPr>
+              <a:t>683 customers who used to buy often (5.3 orders on average) have not ordered for about a year (364 days on average). They spent £1.71M in total.</a:t>
+            </a:r>
+          </a:p>
+          <a:p>
+            <a:pPr>
+              <a:spcAft>
+                <a:spcPts val="800"/>
+              </a:spcAft>
+            </a:pPr>
+            <a:r>
+              <a:rPr sz="1400" b="1">
+                <a:solidFill>
+                  <a:srgbClr val="1E293B"/>
+                </a:solidFill>
+                <a:latin typeface="Calibri"/>
+              </a:rPr>
+              <a:t>Revenue is seasonal. </a:t>
+            </a:r>
+            <a:r>
+              <a:rPr sz="1400" b="0">
+                <a:solidFill>
+                  <a:srgbClr val="1E293B"/>
+                </a:solidFill>
+                <a:latin typeface="Calibri"/>
+              </a:rPr>
+              <a:t>Monthly revenue rises from September and peaks in November in both 2010 and 2011, at roughly twice the level of early 2010. December 2011 looks low only because the data ends on 9 December.</a:t>
+            </a:r>
+          </a:p>
+        </p:txBody>
+      </p:sp>
+    </p:spTree>
+  </p:cSld>
+  <p:clrMapOvr>
+    <a:masterClrMapping/>
+  </p:clrMapOvr>
+</p:sld>
+</file>
+
+<file path=ppt/slides/slide3.xml><?xml version="1.0" encoding="utf-8"?>
+<p:sld xmlns:a="http://schemas.openxmlformats.org/drawingml/2006/main" xmlns:p="http://schemas.openxmlformats.org/presentationml/2006/main" xmlns:r="http://schemas.openxmlformats.org/officeDocument/2006/relationships">
+  <p:cSld>
+    <p:spTree>
+      <p:nvGrpSpPr>
+        <p:cNvPr id="1" name=""/>
+        <p:cNvGrpSpPr/>
+        <p:nvPr/>
+      </p:nvGrpSpPr>
+      <p:grpSpPr/>
+      <p:sp>
+        <p:nvSpPr>
+          <p:cNvPr id="2" name="TextBox 1"/>
+          <p:cNvSpPr txBox="1"/>
+          <p:nvPr/>
+        </p:nvSpPr>
+        <p:spPr>
+          <a:xfrm>
+            <a:off x="548640" y="320040"/>
+            <a:ext cx="10972800" cy="365760"/>
+          </a:xfrm>
+          <a:prstGeom prst="rect">
+            <a:avLst/>
+          </a:prstGeom>
+          <a:noFill/>
+        </p:spPr>
+        <p:txBody>
+          <a:bodyPr wrap="square">
+            <a:spAutoFit/>
+          </a:bodyPr>
+          <a:lstStyle/>
+          <a:p>
+            <a:pPr>
+              <a:spcAft>
+                <a:spcPts val="800"/>
+              </a:spcAft>
+            </a:pPr>
+            <a:r>
+              <a:rPr sz="1100" b="1">
+                <a:solidFill>
+                  <a:srgbClr val="1D4ED8"/>
+                </a:solidFill>
+                <a:latin typeface="Calibri"/>
+              </a:rPr>
+              <a:t>COHORT RETENTION</a:t>
+            </a:r>
+          </a:p>
+        </p:txBody>
+      </p:sp>
+      <p:sp>
+        <p:nvSpPr>
+          <p:cNvPr id="3" name="TextBox 2"/>
+          <p:cNvSpPr txBox="1"/>
+          <p:nvPr/>
+        </p:nvSpPr>
+        <p:spPr>
+          <a:xfrm>
+            <a:off x="548640" y="640080"/>
+            <a:ext cx="11064240" cy="731520"/>
+          </a:xfrm>
+          <a:prstGeom prst="rect">
+            <a:avLst/>
+          </a:prstGeom>
+          <a:noFill/>
+        </p:spPr>
+        <p:txBody>
+          <a:bodyPr wrap="square">
+            <a:spAutoFit/>
+          </a:bodyPr>
+          <a:lstStyle/>
+          <a:p>
+            <a:pPr>
+              <a:spcAft>
+                <a:spcPts val="800"/>
+              </a:spcAft>
+            </a:pPr>
+            <a:r>
+              <a:rPr sz="2800" b="1">
                 <a:solidFill>
                   <a:srgbClr val="0F172A"/>
                 </a:solidFill>
-              </a:defRPr>
+                <a:latin typeface="Calibri"/>
+              </a:rPr>
+              <a:t>Only 21% of new customers buy again in month 1</a:t>
+            </a:r>
+          </a:p>
+        </p:txBody>
+      </p:sp>
+      <p:pic>
+        <p:nvPicPr>
+          <p:cNvPr id="4" name="Picture 3" descr="01_cohort_retention_heatmap.png"/>
+          <p:cNvPicPr>
+            <a:picLocks noChangeAspect="1"/>
+          </p:cNvPicPr>
+          <p:nvPr/>
+        </p:nvPicPr>
+        <p:blipFill>
+          <a:blip r:embed="rId2"/>
+          <a:stretch>
+            <a:fillRect/>
+          </a:stretch>
+        </p:blipFill>
+        <p:spPr>
+          <a:xfrm>
+            <a:off x="548640" y="1508760"/>
+            <a:ext cx="6949440" cy="3781168"/>
+          </a:xfrm>
+          <a:prstGeom prst="rect">
+            <a:avLst/>
+          </a:prstGeom>
+        </p:spPr>
+      </p:pic>
+      <p:sp>
+        <p:nvSpPr>
+          <p:cNvPr id="5" name="TextBox 4"/>
+          <p:cNvSpPr txBox="1"/>
+          <p:nvPr/>
+        </p:nvSpPr>
+        <p:spPr>
+          <a:xfrm>
+            <a:off x="7772400" y="1600200"/>
+            <a:ext cx="3931920" cy="4754880"/>
+          </a:xfrm>
+          <a:prstGeom prst="rect">
+            <a:avLst/>
+          </a:prstGeom>
+          <a:noFill/>
+        </p:spPr>
+        <p:txBody>
+          <a:bodyPr wrap="square">
+            <a:spAutoFit/>
+          </a:bodyPr>
+          <a:lstStyle/>
+          <a:p>
+            <a:pPr>
+              <a:spcAft>
+                <a:spcPts val="800"/>
+              </a:spcAft>
             </a:pPr>
             <a:r>
-              <a:t>5,878</a:t>
-            </a:r>
-          </a:p>
-        </p:txBody>
-      </p:sp>
-      <p:sp>
-        <p:nvSpPr>
-          <p:cNvPr id="8" name="Rounded Rectangle 7"/>
+              <a:rPr sz="1400" b="0">
+                <a:solidFill>
+                  <a:srgbClr val="1E293B"/>
+                </a:solidFill>
+                <a:latin typeface="Calibri"/>
+              </a:rPr>
+              <a:t>Across the 24 cohorts with a month-1 value, on average only 21% of new customers bought again in the month after their first order. Retention stays near 20% for the next few months and is about 18% at month 6 and 18% at month 12. The largest loss happens right after the first order.</a:t>
+            </a:r>
+          </a:p>
+          <a:p>
+            <a:pPr>
+              <a:spcAft>
+                <a:spcPts val="800"/>
+              </a:spcAft>
+            </a:pPr>
+            <a:r>
+              <a:rPr sz="1400" b="0">
+                <a:solidFill>
+                  <a:srgbClr val="1E293B"/>
+                </a:solidFill>
+                <a:latin typeface="Calibri"/>
+              </a:rPr>
+              <a:t>The December 2009 cohort retains much better than the rest (35% in month 1) because the data starts that month, so it includes customers who were already buying before.</a:t>
+            </a:r>
+          </a:p>
+        </p:txBody>
+      </p:sp>
+    </p:spTree>
+  </p:cSld>
+  <p:clrMapOvr>
+    <a:masterClrMapping/>
+  </p:clrMapOvr>
+</p:sld>
+</file>
+
+<file path=ppt/slides/slide4.xml><?xml version="1.0" encoding="utf-8"?>
+<p:sld xmlns:a="http://schemas.openxmlformats.org/drawingml/2006/main" xmlns:p="http://schemas.openxmlformats.org/presentationml/2006/main" xmlns:r="http://schemas.openxmlformats.org/officeDocument/2006/relationships">
+  <p:cSld>
+    <p:spTree>
+      <p:nvGrpSpPr>
+        <p:cNvPr id="1" name=""/>
+        <p:cNvGrpSpPr/>
+        <p:nvPr/>
+      </p:nvGrpSpPr>
+      <p:grpSpPr/>
+      <p:sp>
+        <p:nvSpPr>
+          <p:cNvPr id="2" name="TextBox 1"/>
+          <p:cNvSpPr txBox="1"/>
+          <p:nvPr/>
+        </p:nvSpPr>
+        <p:spPr>
+          <a:xfrm>
+            <a:off x="548640" y="320040"/>
+            <a:ext cx="10972800" cy="365760"/>
+          </a:xfrm>
+          <a:prstGeom prst="rect">
+            <a:avLst/>
+          </a:prstGeom>
+          <a:noFill/>
+        </p:spPr>
+        <p:txBody>
+          <a:bodyPr wrap="square">
+            <a:spAutoFit/>
+          </a:bodyPr>
+          <a:lstStyle/>
+          <a:p>
+            <a:pPr>
+              <a:spcAft>
+                <a:spcPts val="800"/>
+              </a:spcAft>
+            </a:pPr>
+            <a:r>
+              <a:rPr sz="1100" b="1">
+                <a:solidFill>
+                  <a:srgbClr val="1D4ED8"/>
+                </a:solidFill>
+                <a:latin typeface="Calibri"/>
+              </a:rPr>
+              <a:t>RFM SEGMENTATION</a:t>
+            </a:r>
+          </a:p>
+        </p:txBody>
+      </p:sp>
+      <p:sp>
+        <p:nvSpPr>
+          <p:cNvPr id="3" name="TextBox 2"/>
+          <p:cNvSpPr txBox="1"/>
+          <p:nvPr/>
+        </p:nvSpPr>
+        <p:spPr>
+          <a:xfrm>
+            <a:off x="548640" y="640080"/>
+            <a:ext cx="11064240" cy="731520"/>
+          </a:xfrm>
+          <a:prstGeom prst="rect">
+            <a:avLst/>
+          </a:prstGeom>
+          <a:noFill/>
+        </p:spPr>
+        <p:txBody>
+          <a:bodyPr wrap="square">
+            <a:spAutoFit/>
+          </a:bodyPr>
+          <a:lstStyle/>
+          <a:p>
+            <a:pPr>
+              <a:spcAft>
+                <a:spcPts val="800"/>
+              </a:spcAft>
+            </a:pPr>
+            <a:r>
+              <a:rPr sz="2800" b="1">
+                <a:solidFill>
+                  <a:srgbClr val="0F172A"/>
+                </a:solidFill>
+                <a:latin typeface="Calibri"/>
+              </a:rPr>
+              <a:t>43% of customers bring in 85% of revenue</a:t>
+            </a:r>
+          </a:p>
+        </p:txBody>
+      </p:sp>
+      <p:pic>
+        <p:nvPicPr>
+          <p:cNvPr id="4" name="Picture 3" descr="02_rfm_revenue_vs_customers.png"/>
+          <p:cNvPicPr>
+            <a:picLocks noChangeAspect="1"/>
+          </p:cNvPicPr>
+          <p:nvPr/>
+        </p:nvPicPr>
+        <p:blipFill>
+          <a:blip r:embed="rId2"/>
+          <a:stretch>
+            <a:fillRect/>
+          </a:stretch>
+        </p:blipFill>
+        <p:spPr>
+          <a:xfrm>
+            <a:off x="548640" y="1508760"/>
+            <a:ext cx="6949440" cy="3580015"/>
+          </a:xfrm>
+          <a:prstGeom prst="rect">
+            <a:avLst/>
+          </a:prstGeom>
+        </p:spPr>
+      </p:pic>
+      <p:sp>
+        <p:nvSpPr>
+          <p:cNvPr id="5" name="TextBox 4"/>
+          <p:cNvSpPr txBox="1"/>
+          <p:nvPr/>
+        </p:nvSpPr>
+        <p:spPr>
+          <a:xfrm>
+            <a:off x="7772400" y="1600200"/>
+            <a:ext cx="3931920" cy="4754880"/>
+          </a:xfrm>
+          <a:prstGeom prst="rect">
+            <a:avLst/>
+          </a:prstGeom>
+          <a:noFill/>
+        </p:spPr>
+        <p:txBody>
+          <a:bodyPr wrap="square">
+            <a:spAutoFit/>
+          </a:bodyPr>
+          <a:lstStyle/>
+          <a:p>
+            <a:pPr>
+              <a:spcAft>
+                <a:spcPts val="800"/>
+              </a:spcAft>
+            </a:pPr>
+            <a:r>
+              <a:rPr sz="1400" b="0">
+                <a:solidFill>
+                  <a:srgbClr val="1E293B"/>
+                </a:solidFill>
+                <a:latin typeface="Calibri"/>
+              </a:rPr>
+              <a:t>Champions and Loyal Customers are 43% of customers but 85% of revenue. Champions alone (1,324 customers) account for 69% of revenue.</a:t>
+            </a:r>
+          </a:p>
+          <a:p>
+            <a:pPr>
+              <a:spcAft>
+                <a:spcPts val="800"/>
+              </a:spcAft>
+            </a:pPr>
+            <a:r>
+              <a:rPr sz="1400" b="0">
+                <a:solidFill>
+                  <a:srgbClr val="1E293B"/>
+                </a:solidFill>
+                <a:latin typeface="Calibri"/>
+              </a:rPr>
+              <a:t>683 customers who used to buy often (5.3 orders on average) have not ordered for about a year (364 days on average). They spent £1.71M in total.</a:t>
+            </a:r>
+          </a:p>
+        </p:txBody>
+      </p:sp>
+    </p:spTree>
+  </p:cSld>
+  <p:clrMapOvr>
+    <a:masterClrMapping/>
+  </p:clrMapOvr>
+</p:sld>
+</file>
+
+<file path=ppt/slides/slide5.xml><?xml version="1.0" encoding="utf-8"?>
+<p:sld xmlns:a="http://schemas.openxmlformats.org/drawingml/2006/main" xmlns:p="http://schemas.openxmlformats.org/presentationml/2006/main" xmlns:r="http://schemas.openxmlformats.org/officeDocument/2006/relationships">
+  <p:cSld>
+    <p:spTree>
+      <p:nvGrpSpPr>
+        <p:cNvPr id="1" name=""/>
+        <p:cNvGrpSpPr/>
+        <p:nvPr/>
+      </p:nvGrpSpPr>
+      <p:grpSpPr/>
+      <p:sp>
+        <p:nvSpPr>
+          <p:cNvPr id="2" name="TextBox 1"/>
+          <p:cNvSpPr txBox="1"/>
+          <p:nvPr/>
+        </p:nvSpPr>
+        <p:spPr>
+          <a:xfrm>
+            <a:off x="548640" y="320040"/>
+            <a:ext cx="10972800" cy="365760"/>
+          </a:xfrm>
+          <a:prstGeom prst="rect">
+            <a:avLst/>
+          </a:prstGeom>
+          <a:noFill/>
+        </p:spPr>
+        <p:txBody>
+          <a:bodyPr wrap="square">
+            <a:spAutoFit/>
+          </a:bodyPr>
+          <a:lstStyle/>
+          <a:p>
+            <a:pPr>
+              <a:spcAft>
+                <a:spcPts val="800"/>
+              </a:spcAft>
+            </a:pPr>
+            <a:r>
+              <a:rPr sz="1100" b="1">
+                <a:solidFill>
+                  <a:srgbClr val="1D4ED8"/>
+                </a:solidFill>
+                <a:latin typeface="Calibri"/>
+              </a:rPr>
+              <a:t>SEASONALITY</a:t>
+            </a:r>
+          </a:p>
+        </p:txBody>
+      </p:sp>
+      <p:sp>
+        <p:nvSpPr>
+          <p:cNvPr id="3" name="TextBox 2"/>
+          <p:cNvSpPr txBox="1"/>
+          <p:nvPr/>
+        </p:nvSpPr>
+        <p:spPr>
+          <a:xfrm>
+            <a:off x="548640" y="640080"/>
+            <a:ext cx="11064240" cy="731520"/>
+          </a:xfrm>
+          <a:prstGeom prst="rect">
+            <a:avLst/>
+          </a:prstGeom>
+          <a:noFill/>
+        </p:spPr>
+        <p:txBody>
+          <a:bodyPr wrap="square">
+            <a:spAutoFit/>
+          </a:bodyPr>
+          <a:lstStyle/>
+          <a:p>
+            <a:pPr>
+              <a:spcAft>
+                <a:spcPts val="800"/>
+              </a:spcAft>
+            </a:pPr>
+            <a:r>
+              <a:rPr sz="2800" b="1">
+                <a:solidFill>
+                  <a:srgbClr val="0F172A"/>
+                </a:solidFill>
+                <a:latin typeface="Calibri"/>
+              </a:rPr>
+              <a:t>Revenue peaks every November</a:t>
+            </a:r>
+          </a:p>
+        </p:txBody>
+      </p:sp>
+      <p:pic>
+        <p:nvPicPr>
+          <p:cNvPr id="4" name="Picture 3" descr="03_monthly_revenue_growth.png"/>
+          <p:cNvPicPr>
+            <a:picLocks noChangeAspect="1"/>
+          </p:cNvPicPr>
+          <p:nvPr/>
+        </p:nvPicPr>
+        <p:blipFill>
+          <a:blip r:embed="rId2"/>
+          <a:stretch>
+            <a:fillRect/>
+          </a:stretch>
+        </p:blipFill>
+        <p:spPr>
+          <a:xfrm>
+            <a:off x="548640" y="1508760"/>
+            <a:ext cx="6949440" cy="3580015"/>
+          </a:xfrm>
+          <a:prstGeom prst="rect">
+            <a:avLst/>
+          </a:prstGeom>
+        </p:spPr>
+      </p:pic>
+      <p:sp>
+        <p:nvSpPr>
+          <p:cNvPr id="5" name="TextBox 4"/>
+          <p:cNvSpPr txBox="1"/>
+          <p:nvPr/>
+        </p:nvSpPr>
+        <p:spPr>
+          <a:xfrm>
+            <a:off x="7772400" y="1600200"/>
+            <a:ext cx="3931920" cy="4754880"/>
+          </a:xfrm>
+          <a:prstGeom prst="rect">
+            <a:avLst/>
+          </a:prstGeom>
+          <a:noFill/>
+        </p:spPr>
+        <p:txBody>
+          <a:bodyPr wrap="square">
+            <a:spAutoFit/>
+          </a:bodyPr>
+          <a:lstStyle/>
+          <a:p>
+            <a:pPr>
+              <a:spcAft>
+                <a:spcPts val="800"/>
+              </a:spcAft>
+            </a:pPr>
+            <a:r>
+              <a:rPr sz="1400" b="0">
+                <a:solidFill>
+                  <a:srgbClr val="1E293B"/>
+                </a:solidFill>
+                <a:latin typeface="Calibri"/>
+              </a:rPr>
+              <a:t>Monthly revenue rises from September and peaks in November in both 2010 and 2011, at roughly twice the level of early 2010. December 2011 looks low only because the data ends on 9 December.</a:t>
+            </a:r>
+          </a:p>
+          <a:p>
+            <a:pPr>
+              <a:spcAft>
+                <a:spcPts val="800"/>
+              </a:spcAft>
+            </a:pPr>
+            <a:r>
+              <a:rPr sz="1400" b="0">
+                <a:solidFill>
+                  <a:srgbClr val="1E293B"/>
+                </a:solidFill>
+                <a:latin typeface="Calibri"/>
+              </a:rPr>
+              <a:t>Stock and campaigns should be planned around September to November.</a:t>
+            </a:r>
+          </a:p>
+        </p:txBody>
+      </p:sp>
+    </p:spTree>
+  </p:cSld>
+  <p:clrMapOvr>
+    <a:masterClrMapping/>
+  </p:clrMapOvr>
+</p:sld>
+</file>
+
+<file path=ppt/slides/slide6.xml><?xml version="1.0" encoding="utf-8"?>
+<p:sld xmlns:a="http://schemas.openxmlformats.org/drawingml/2006/main" xmlns:p="http://schemas.openxmlformats.org/presentationml/2006/main" xmlns:r="http://schemas.openxmlformats.org/officeDocument/2006/relationships">
+  <p:cSld>
+    <p:spTree>
+      <p:nvGrpSpPr>
+        <p:cNvPr id="1" name=""/>
+        <p:cNvGrpSpPr/>
+        <p:nvPr/>
+      </p:nvGrpSpPr>
+      <p:grpSpPr/>
+      <p:sp>
+        <p:nvSpPr>
+          <p:cNvPr id="2" name="TextBox 1"/>
+          <p:cNvSpPr txBox="1"/>
+          <p:nvPr/>
+        </p:nvSpPr>
+        <p:spPr>
+          <a:xfrm>
+            <a:off x="548640" y="320040"/>
+            <a:ext cx="10972800" cy="365760"/>
+          </a:xfrm>
+          <a:prstGeom prst="rect">
+            <a:avLst/>
+          </a:prstGeom>
+          <a:noFill/>
+        </p:spPr>
+        <p:txBody>
+          <a:bodyPr wrap="square">
+            <a:spAutoFit/>
+          </a:bodyPr>
+          <a:lstStyle/>
+          <a:p>
+            <a:pPr>
+              <a:spcAft>
+                <a:spcPts val="800"/>
+              </a:spcAft>
+            </a:pPr>
+            <a:r>
+              <a:rPr sz="1100" b="1">
+                <a:solidFill>
+                  <a:srgbClr val="1D4ED8"/>
+                </a:solidFill>
+                <a:latin typeface="Calibri"/>
+              </a:rPr>
+              <a:t>WHAT TO DO</a:t>
+            </a:r>
+          </a:p>
+        </p:txBody>
+      </p:sp>
+      <p:sp>
+        <p:nvSpPr>
+          <p:cNvPr id="3" name="TextBox 2"/>
+          <p:cNvSpPr txBox="1"/>
+          <p:nvPr/>
+        </p:nvSpPr>
+        <p:spPr>
+          <a:xfrm>
+            <a:off x="548640" y="640080"/>
+            <a:ext cx="11064240" cy="731520"/>
+          </a:xfrm>
+          <a:prstGeom prst="rect">
+            <a:avLst/>
+          </a:prstGeom>
+          <a:noFill/>
+        </p:spPr>
+        <p:txBody>
+          <a:bodyPr wrap="square">
+            <a:spAutoFit/>
+          </a:bodyPr>
+          <a:lstStyle/>
+          <a:p>
+            <a:pPr>
+              <a:spcAft>
+                <a:spcPts val="800"/>
+              </a:spcAft>
+            </a:pPr>
+            <a:r>
+              <a:rPr sz="2800" b="1">
+                <a:solidFill>
+                  <a:srgbClr val="0F172A"/>
+                </a:solidFill>
+                <a:latin typeface="Calibri"/>
+              </a:rPr>
+              <a:t>Recommendations</a:t>
+            </a:r>
+          </a:p>
+        </p:txBody>
+      </p:sp>
+      <p:sp>
+        <p:nvSpPr>
+          <p:cNvPr id="4" name="Rectangle 3"/>
           <p:cNvSpPr/>
           <p:nvPr/>
         </p:nvSpPr>
         <p:spPr>
           <a:xfrm>
-            <a:off x="8650224" y="4617720"/>
-            <a:ext cx="2331720" cy="1051560"/>
-          </a:xfrm>
-          <a:prstGeom prst="roundRect">
+            <a:off x="548640" y="1554480"/>
+            <a:ext cx="5394960" cy="2103120"/>
+          </a:xfrm>
+          <a:prstGeom prst="rect">
             <a:avLst/>
           </a:prstGeom>
           <a:solidFill>
             <a:srgbClr val="F1F5F9"/>
           </a:solidFill>
-          <a:ln w="12700">
-            <a:solidFill>
-              <a:srgbClr val="E2E8F0"/>
-            </a:solidFill>
+          <a:ln>
+            <a:noFill/>
           </a:ln>
         </p:spPr>
         <p:style>
@@ -3502,75 +4653,107 @@
           </a:fontRef>
         </p:style>
         <p:txBody>
-          <a:bodyPr lIns="0" tIns="0" rIns="0" bIns="0" rtlCol="0" anchor="ctr"/>
-          <a:lstStyle/>
-          <a:p>
-            <a:pPr algn="ctr">
-              <a:defRPr sz="850" b="1">
-                <a:solidFill>
-                  <a:srgbClr val="64748B"/>
-                </a:solidFill>
-              </a:defRPr>
+          <a:bodyPr rtlCol="0" anchor="ctr"/>
+          <a:lstStyle/>
+          <a:p>
+            <a:pPr algn="ctr"/>
+          </a:p>
+        </p:txBody>
+      </p:sp>
+      <p:sp>
+        <p:nvSpPr>
+          <p:cNvPr id="5" name="TextBox 4"/>
+          <p:cNvSpPr txBox="1"/>
+          <p:nvPr/>
+        </p:nvSpPr>
+        <p:spPr>
+          <a:xfrm>
+            <a:off x="777240" y="1737360"/>
+            <a:ext cx="4937760" cy="457200"/>
+          </a:xfrm>
+          <a:prstGeom prst="rect">
+            <a:avLst/>
+          </a:prstGeom>
+          <a:noFill/>
+        </p:spPr>
+        <p:txBody>
+          <a:bodyPr wrap="square">
+            <a:spAutoFit/>
+          </a:bodyPr>
+          <a:lstStyle/>
+          <a:p>
+            <a:pPr>
+              <a:spcAft>
+                <a:spcPts val="800"/>
+              </a:spcAft>
             </a:pPr>
             <a:r>
-              <a:t>MONTH-1 CHURN DROP</a:t>
-            </a:r>
-          </a:p>
-          <a:p>
-            <a:pPr algn="ctr">
-              <a:defRPr sz="1800" b="1">
-                <a:solidFill>
-                  <a:srgbClr val="E11D48"/>
-                </a:solidFill>
-              </a:defRPr>
+              <a:rPr sz="1700" b="1">
+                <a:solidFill>
+                  <a:srgbClr val="0F172A"/>
+                </a:solidFill>
+                <a:latin typeface="Calibri"/>
+              </a:rPr>
+              <a:t>1. Focus on the second purchase</a:t>
+            </a:r>
+          </a:p>
+        </p:txBody>
+      </p:sp>
+      <p:sp>
+        <p:nvSpPr>
+          <p:cNvPr id="6" name="TextBox 5"/>
+          <p:cNvSpPr txBox="1"/>
+          <p:nvPr/>
+        </p:nvSpPr>
+        <p:spPr>
+          <a:xfrm>
+            <a:off x="777240" y="2286000"/>
+            <a:ext cx="4937760" cy="1280160"/>
+          </a:xfrm>
+          <a:prstGeom prst="rect">
+            <a:avLst/>
+          </a:prstGeom>
+          <a:noFill/>
+        </p:spPr>
+        <p:txBody>
+          <a:bodyPr wrap="square">
+            <a:spAutoFit/>
+          </a:bodyPr>
+          <a:lstStyle/>
+          <a:p>
+            <a:pPr>
+              <a:spcAft>
+                <a:spcPts val="800"/>
+              </a:spcAft>
             </a:pPr>
             <a:r>
-              <a:t>-74.2%</a:t>
-            </a:r>
-          </a:p>
-        </p:txBody>
-      </p:sp>
-    </p:spTree>
-  </p:cSld>
-  <p:clrMapOvr>
-    <a:masterClrMapping/>
-  </p:clrMapOvr>
-</p:sld>
-</file>
-
-<file path=ppt/slides/slide2.xml><?xml version="1.0" encoding="utf-8"?>
-<p:sld xmlns:a="http://schemas.openxmlformats.org/drawingml/2006/main" xmlns:r="http://schemas.openxmlformats.org/officeDocument/2006/relationships" xmlns:p="http://schemas.openxmlformats.org/presentationml/2006/main">
-  <p:cSld>
-    <p:spTree>
-      <p:nvGrpSpPr>
-        <p:cNvPr id="1" name=""/>
-        <p:cNvGrpSpPr/>
-        <p:nvPr/>
-      </p:nvGrpSpPr>
-      <p:grpSpPr>
-        <a:xfrm>
-          <a:off x="0" y="0"/>
-          <a:ext cx="0" cy="0"/>
-          <a:chOff x="0" y="0"/>
-          <a:chExt cx="0" cy="0"/>
-        </a:xfrm>
-      </p:grpSpPr>
-      <p:sp>
-        <p:nvSpPr>
-          <p:cNvPr id="2" name="Rectangle 1"/>
+              <a:rPr sz="1400" b="0">
+                <a:solidFill>
+                  <a:srgbClr val="1E293B"/>
+                </a:solidFill>
+                <a:latin typeface="Calibri"/>
+              </a:rPr>
+              <a:t>The biggest drop is in the first month, so a follow-up offer or product recommendation a few weeks after the first order targets exactly that gap.</a:t>
+            </a:r>
+          </a:p>
+        </p:txBody>
+      </p:sp>
+      <p:sp>
+        <p:nvSpPr>
+          <p:cNvPr id="7" name="Rectangle 6"/>
           <p:cNvSpPr/>
           <p:nvPr/>
         </p:nvSpPr>
         <p:spPr>
           <a:xfrm>
-            <a:off x="0" y="0"/>
-            <a:ext cx="12191695" cy="6858000"/>
+            <a:off x="6172200" y="1554480"/>
+            <a:ext cx="5394960" cy="2103120"/>
           </a:xfrm>
           <a:prstGeom prst="rect">
             <a:avLst/>
           </a:prstGeom>
           <a:solidFill>
-            <a:srgbClr val="F8FAFC"/>
+            <a:srgbClr val="F1F5F9"/>
           </a:solidFill>
           <a:ln>
             <a:noFill/>
@@ -3595,31 +4778,106 @@
           <a:lstStyle/>
           <a:p>
             <a:pPr algn="ctr"/>
-            <a:endParaRPr/>
-          </a:p>
-        </p:txBody>
-      </p:sp>
-      <p:sp>
-        <p:nvSpPr>
-          <p:cNvPr id="3" name="Rounded Rectangle 2"/>
+          </a:p>
+        </p:txBody>
+      </p:sp>
+      <p:sp>
+        <p:nvSpPr>
+          <p:cNvPr id="8" name="TextBox 7"/>
+          <p:cNvSpPr txBox="1"/>
+          <p:nvPr/>
+        </p:nvSpPr>
+        <p:spPr>
+          <a:xfrm>
+            <a:off x="6400800" y="1737360"/>
+            <a:ext cx="4937760" cy="457200"/>
+          </a:xfrm>
+          <a:prstGeom prst="rect">
+            <a:avLst/>
+          </a:prstGeom>
+          <a:noFill/>
+        </p:spPr>
+        <p:txBody>
+          <a:bodyPr wrap="square">
+            <a:spAutoFit/>
+          </a:bodyPr>
+          <a:lstStyle/>
+          <a:p>
+            <a:pPr>
+              <a:spcAft>
+                <a:spcPts val="800"/>
+              </a:spcAft>
+            </a:pPr>
+            <a:r>
+              <a:rPr sz="1700" b="1">
+                <a:solidFill>
+                  <a:srgbClr val="0F172A"/>
+                </a:solidFill>
+                <a:latin typeface="Calibri"/>
+              </a:rPr>
+              <a:t>2. Run a win-back campaign for At Risk customers</a:t>
+            </a:r>
+          </a:p>
+        </p:txBody>
+      </p:sp>
+      <p:sp>
+        <p:nvSpPr>
+          <p:cNvPr id="9" name="TextBox 8"/>
+          <p:cNvSpPr txBox="1"/>
+          <p:nvPr/>
+        </p:nvSpPr>
+        <p:spPr>
+          <a:xfrm>
+            <a:off x="6400800" y="2286000"/>
+            <a:ext cx="4937760" cy="1280160"/>
+          </a:xfrm>
+          <a:prstGeom prst="rect">
+            <a:avLst/>
+          </a:prstGeom>
+          <a:noFill/>
+        </p:spPr>
+        <p:txBody>
+          <a:bodyPr wrap="square">
+            <a:spAutoFit/>
+          </a:bodyPr>
+          <a:lstStyle/>
+          <a:p>
+            <a:pPr>
+              <a:spcAft>
+                <a:spcPts val="800"/>
+              </a:spcAft>
+            </a:pPr>
+            <a:r>
+              <a:rPr sz="1400" b="0">
+                <a:solidFill>
+                  <a:srgbClr val="1E293B"/>
+                </a:solidFill>
+                <a:latin typeface="Calibri"/>
+              </a:rPr>
+              <a:t>They have a proven buying history and £1.71M of past spend. Even a small reactivation rate is worth more than a campaign aimed at Hibernating customers (1,377 customers, 2.2% of revenue).</a:t>
+            </a:r>
+          </a:p>
+        </p:txBody>
+      </p:sp>
+      <p:sp>
+        <p:nvSpPr>
+          <p:cNvPr id="10" name="Rectangle 9"/>
           <p:cNvSpPr/>
           <p:nvPr/>
         </p:nvSpPr>
         <p:spPr>
           <a:xfrm>
-            <a:off x="731520" y="365760"/>
-            <a:ext cx="3291840" cy="256032"/>
-          </a:xfrm>
-          <a:prstGeom prst="roundRect">
+            <a:off x="548640" y="3886200"/>
+            <a:ext cx="5394960" cy="2103120"/>
+          </a:xfrm>
+          <a:prstGeom prst="rect">
             <a:avLst/>
           </a:prstGeom>
           <a:solidFill>
-            <a:srgbClr val="EFF6FF"/>
+            <a:srgbClr val="F1F5F9"/>
           </a:solidFill>
-          <a:ln w="10160">
-            <a:solidFill>
-              <a:srgbClr val="BFDBFE"/>
-            </a:solidFill>
+          <a:ln>
+            <a:noFill/>
           </a:ln>
         </p:spPr>
         <p:style>
@@ -3637,32 +4895,23 @@
           </a:fontRef>
         </p:style>
         <p:txBody>
-          <a:bodyPr lIns="0" tIns="0" rIns="0" bIns="0" rtlCol="0" anchor="ctr"/>
-          <a:lstStyle/>
-          <a:p>
-            <a:pPr algn="ctr">
-              <a:defRPr sz="800" b="1">
-                <a:solidFill>
-                  <a:srgbClr val="2563EB"/>
-                </a:solidFill>
-              </a:defRPr>
-            </a:pPr>
-            <a:r>
-              <a:t>EXECUTIVE DATA ANALYTICS CASE STUDY</a:t>
-            </a:r>
-          </a:p>
-        </p:txBody>
-      </p:sp>
-      <p:sp>
-        <p:nvSpPr>
-          <p:cNvPr id="4" name="TextBox 3"/>
+          <a:bodyPr rtlCol="0" anchor="ctr"/>
+          <a:lstStyle/>
+          <a:p>
+            <a:pPr algn="ctr"/>
+          </a:p>
+        </p:txBody>
+      </p:sp>
+      <p:sp>
+        <p:nvSpPr>
+          <p:cNvPr id="11" name="TextBox 10"/>
           <p:cNvSpPr txBox="1"/>
           <p:nvPr/>
         </p:nvSpPr>
         <p:spPr>
           <a:xfrm>
-            <a:off x="731520" y="658368"/>
-            <a:ext cx="10728655" cy="502920"/>
+            <a:off x="777240" y="4069080"/>
+            <a:ext cx="4937760" cy="457200"/>
           </a:xfrm>
           <a:prstGeom prst="rect">
             <a:avLst/>
@@ -3670,45 +4919,86 @@
           <a:noFill/>
         </p:spPr>
         <p:txBody>
-          <a:bodyPr wrap="none" lIns="0" tIns="0" rIns="0" bIns="0">
+          <a:bodyPr wrap="square">
             <a:spAutoFit/>
           </a:bodyPr>
           <a:lstStyle/>
           <a:p>
             <a:pPr>
-              <a:defRPr sz="2000" b="1">
+              <a:spcAft>
+                <a:spcPts val="800"/>
+              </a:spcAft>
+            </a:pPr>
+            <a:r>
+              <a:rPr sz="1700" b="1">
                 <a:solidFill>
                   <a:srgbClr val="0F172A"/>
                 </a:solidFill>
-              </a:defRPr>
+                <a:latin typeface="Calibri"/>
+              </a:rPr>
+              <a:t>3. Keep Champions without heavy discounts</a:t>
+            </a:r>
+          </a:p>
+        </p:txBody>
+      </p:sp>
+      <p:sp>
+        <p:nvSpPr>
+          <p:cNvPr id="12" name="TextBox 11"/>
+          <p:cNvSpPr txBox="1"/>
+          <p:nvPr/>
+        </p:nvSpPr>
+        <p:spPr>
+          <a:xfrm>
+            <a:off x="777240" y="4617720"/>
+            <a:ext cx="4937760" cy="1280160"/>
+          </a:xfrm>
+          <a:prstGeom prst="rect">
+            <a:avLst/>
+          </a:prstGeom>
+          <a:noFill/>
+        </p:spPr>
+        <p:txBody>
+          <a:bodyPr wrap="square">
+            <a:spAutoFit/>
+          </a:bodyPr>
+          <a:lstStyle/>
+          <a:p>
+            <a:pPr>
+              <a:spcAft>
+                <a:spcPts val="800"/>
+              </a:spcAft>
             </a:pPr>
             <a:r>
-              <a:t>Executive Scorecard &amp; Strategic Problem Statement</a:t>
-            </a:r>
-          </a:p>
-        </p:txBody>
-      </p:sp>
-      <p:sp>
-        <p:nvSpPr>
-          <p:cNvPr id="5" name="Rounded Rectangle 4"/>
+              <a:rPr sz="1400" b="0">
+                <a:solidFill>
+                  <a:srgbClr val="1E293B"/>
+                </a:solidFill>
+                <a:latin typeface="Calibri"/>
+              </a:rPr>
+              <a:t>They already buy often, so early access or service perks are a cheaper way to keep them than price cuts.</a:t>
+            </a:r>
+          </a:p>
+        </p:txBody>
+      </p:sp>
+      <p:sp>
+        <p:nvSpPr>
+          <p:cNvPr id="13" name="Rectangle 12"/>
           <p:cNvSpPr/>
           <p:nvPr/>
         </p:nvSpPr>
         <p:spPr>
           <a:xfrm>
-            <a:off x="731520" y="1234440"/>
-            <a:ext cx="2542032" cy="1097280"/>
-          </a:xfrm>
-          <a:prstGeom prst="roundRect">
+            <a:off x="6172200" y="3886200"/>
+            <a:ext cx="5394960" cy="2103120"/>
+          </a:xfrm>
+          <a:prstGeom prst="rect">
             <a:avLst/>
           </a:prstGeom>
           <a:solidFill>
-            <a:srgbClr val="FFFFFF"/>
+            <a:srgbClr val="F1F5F9"/>
           </a:solidFill>
-          <a:ln w="12700">
-            <a:solidFill>
-              <a:srgbClr val="E2E8F0"/>
-            </a:solidFill>
+          <a:ln>
+            <a:noFill/>
           </a:ln>
         </p:spPr>
         <p:style>
@@ -3726,793 +5016,23 @@
           </a:fontRef>
         </p:style>
         <p:txBody>
-          <a:bodyPr lIns="164592" tIns="0" rIns="164592" bIns="0" rtlCol="0" anchor="ctr"/>
-          <a:lstStyle/>
-          <a:p>
-            <a:pPr algn="ctr">
-              <a:defRPr sz="800" b="1">
-                <a:solidFill>
-                  <a:srgbClr val="64748B"/>
-                </a:solidFill>
-              </a:defRPr>
-            </a:pPr>
-            <a:r>
-              <a:rPr dirty="0"/>
-              <a:t>TOTAL GROSS REVENUE</a:t>
-            </a:r>
-          </a:p>
-          <a:p>
-            <a:pPr>
-              <a:spcBef>
-                <a:spcPts val="200"/>
-              </a:spcBef>
-              <a:defRPr sz="1900" b="1">
-                <a:solidFill>
-                  <a:srgbClr val="2563EB"/>
-                </a:solidFill>
-              </a:defRPr>
-            </a:pPr>
-            <a:r>
-              <a:t>£17.74M</a:t>
-            </a:r>
-          </a:p>
-          <a:p>
-            <a:pPr>
-              <a:spcBef>
-                <a:spcPts val="200"/>
-              </a:spcBef>
-              <a:defRPr sz="750">
-                <a:solidFill>
-                  <a:srgbClr val="64748B"/>
-                </a:solidFill>
-              </a:defRPr>
-            </a:pPr>
-            <a:r>
-              <a:rPr dirty="0"/>
-              <a:t>Net valid transactions (24 Months)</a:t>
-            </a:r>
-          </a:p>
-        </p:txBody>
-      </p:sp>
-      <p:sp>
-        <p:nvSpPr>
-          <p:cNvPr id="6" name="Rounded Rectangle 5"/>
-          <p:cNvSpPr/>
-          <p:nvPr/>
-        </p:nvSpPr>
-        <p:spPr>
-          <a:xfrm>
-            <a:off x="3456432" y="1234440"/>
-            <a:ext cx="2542032" cy="1097280"/>
-          </a:xfrm>
-          <a:prstGeom prst="roundRect">
-            <a:avLst/>
-          </a:prstGeom>
-          <a:solidFill>
-            <a:srgbClr val="FFFFFF"/>
-          </a:solidFill>
-          <a:ln w="12700">
-            <a:solidFill>
-              <a:srgbClr val="E2E8F0"/>
-            </a:solidFill>
-          </a:ln>
-        </p:spPr>
-        <p:style>
-          <a:lnRef idx="1">
-            <a:schemeClr val="accent1"/>
-          </a:lnRef>
-          <a:fillRef idx="3">
-            <a:schemeClr val="accent1"/>
-          </a:fillRef>
-          <a:effectRef idx="2">
-            <a:schemeClr val="accent1"/>
-          </a:effectRef>
-          <a:fontRef idx="minor">
-            <a:schemeClr val="lt1"/>
-          </a:fontRef>
-        </p:style>
-        <p:txBody>
-          <a:bodyPr lIns="164592" tIns="0" rIns="164592" bIns="0" rtlCol="0" anchor="ctr"/>
-          <a:lstStyle/>
-          <a:p>
-            <a:pPr algn="ctr">
-              <a:defRPr sz="800" b="1">
-                <a:solidFill>
-                  <a:srgbClr val="64748B"/>
-                </a:solidFill>
-              </a:defRPr>
-            </a:pPr>
-            <a:r>
-              <a:t>REGISTERED BUYERS</a:t>
-            </a:r>
-          </a:p>
-          <a:p>
-            <a:pPr>
-              <a:spcBef>
-                <a:spcPts val="200"/>
-              </a:spcBef>
-              <a:defRPr sz="1900" b="1">
-                <a:solidFill>
-                  <a:srgbClr val="0F172A"/>
-                </a:solidFill>
-              </a:defRPr>
-            </a:pPr>
-            <a:r>
-              <a:t>5,878</a:t>
-            </a:r>
-          </a:p>
-          <a:p>
-            <a:pPr>
-              <a:spcBef>
-                <a:spcPts val="200"/>
-              </a:spcBef>
-              <a:defRPr sz="750">
-                <a:solidFill>
-                  <a:srgbClr val="64748B"/>
-                </a:solidFill>
-              </a:defRPr>
-            </a:pPr>
-            <a:r>
-              <a:t>Tracked unique customer IDs</a:t>
-            </a:r>
-          </a:p>
-        </p:txBody>
-      </p:sp>
-      <p:sp>
-        <p:nvSpPr>
-          <p:cNvPr id="7" name="Rounded Rectangle 6"/>
-          <p:cNvSpPr/>
-          <p:nvPr/>
-        </p:nvSpPr>
-        <p:spPr>
-          <a:xfrm>
-            <a:off x="6181344" y="1234440"/>
-            <a:ext cx="2542032" cy="1097280"/>
-          </a:xfrm>
-          <a:prstGeom prst="roundRect">
-            <a:avLst/>
-          </a:prstGeom>
-          <a:solidFill>
-            <a:srgbClr val="FFFFFF"/>
-          </a:solidFill>
-          <a:ln w="12700">
-            <a:solidFill>
-              <a:srgbClr val="E2E8F0"/>
-            </a:solidFill>
-          </a:ln>
-        </p:spPr>
-        <p:style>
-          <a:lnRef idx="1">
-            <a:schemeClr val="accent1"/>
-          </a:lnRef>
-          <a:fillRef idx="3">
-            <a:schemeClr val="accent1"/>
-          </a:fillRef>
-          <a:effectRef idx="2">
-            <a:schemeClr val="accent1"/>
-          </a:effectRef>
-          <a:fontRef idx="minor">
-            <a:schemeClr val="lt1"/>
-          </a:fontRef>
-        </p:style>
-        <p:txBody>
-          <a:bodyPr lIns="164592" tIns="0" rIns="164592" bIns="0" rtlCol="0" anchor="ctr"/>
-          <a:lstStyle/>
-          <a:p>
-            <a:pPr algn="ctr">
-              <a:defRPr sz="800" b="1">
-                <a:solidFill>
-                  <a:srgbClr val="64748B"/>
-                </a:solidFill>
-              </a:defRPr>
-            </a:pPr>
-            <a:r>
-              <a:t>MONTH-1 RETENTION</a:t>
-            </a:r>
-          </a:p>
-          <a:p>
-            <a:pPr>
-              <a:spcBef>
-                <a:spcPts val="200"/>
-              </a:spcBef>
-              <a:defRPr sz="1900" b="1">
-                <a:solidFill>
-                  <a:srgbClr val="E11D48"/>
-                </a:solidFill>
-              </a:defRPr>
-            </a:pPr>
-            <a:r>
-              <a:t>25.8%</a:t>
-            </a:r>
-          </a:p>
-          <a:p>
-            <a:pPr>
-              <a:spcBef>
-                <a:spcPts val="200"/>
-              </a:spcBef>
-              <a:defRPr sz="750">
-                <a:solidFill>
-                  <a:srgbClr val="64748B"/>
-                </a:solidFill>
-              </a:defRPr>
-            </a:pPr>
-            <a:r>
-              <a:t>Steepest drop-off point in lifecycle</a:t>
-            </a:r>
-          </a:p>
-        </p:txBody>
-      </p:sp>
-      <p:sp>
-        <p:nvSpPr>
-          <p:cNvPr id="8" name="Rounded Rectangle 7"/>
-          <p:cNvSpPr/>
-          <p:nvPr/>
-        </p:nvSpPr>
-        <p:spPr>
-          <a:xfrm>
-            <a:off x="8906256" y="1234440"/>
-            <a:ext cx="2542032" cy="1097280"/>
-          </a:xfrm>
-          <a:prstGeom prst="roundRect">
-            <a:avLst/>
-          </a:prstGeom>
-          <a:solidFill>
-            <a:srgbClr val="FFFFFF"/>
-          </a:solidFill>
-          <a:ln w="12700">
-            <a:solidFill>
-              <a:srgbClr val="E2E8F0"/>
-            </a:solidFill>
-          </a:ln>
-        </p:spPr>
-        <p:style>
-          <a:lnRef idx="1">
-            <a:schemeClr val="accent1"/>
-          </a:lnRef>
-          <a:fillRef idx="3">
-            <a:schemeClr val="accent1"/>
-          </a:fillRef>
-          <a:effectRef idx="2">
-            <a:schemeClr val="accent1"/>
-          </a:effectRef>
-          <a:fontRef idx="minor">
-            <a:schemeClr val="lt1"/>
-          </a:fontRef>
-        </p:style>
-        <p:txBody>
-          <a:bodyPr lIns="164592" tIns="0" rIns="164592" bIns="0" rtlCol="0" anchor="ctr"/>
-          <a:lstStyle/>
-          <a:p>
-            <a:pPr algn="ctr">
-              <a:defRPr sz="800" b="1">
-                <a:solidFill>
-                  <a:srgbClr val="64748B"/>
-                </a:solidFill>
-              </a:defRPr>
-            </a:pPr>
-            <a:r>
-              <a:t>TOP VALUE CONCENTRATION</a:t>
-            </a:r>
-          </a:p>
-          <a:p>
-            <a:pPr>
-              <a:spcBef>
-                <a:spcPts val="200"/>
-              </a:spcBef>
-              <a:defRPr sz="1900" b="1">
-                <a:solidFill>
-                  <a:srgbClr val="10B981"/>
-                </a:solidFill>
-              </a:defRPr>
-            </a:pPr>
-            <a:r>
-              <a:t>62.4%</a:t>
-            </a:r>
-          </a:p>
-          <a:p>
-            <a:pPr>
-              <a:spcBef>
-                <a:spcPts val="200"/>
-              </a:spcBef>
-              <a:defRPr sz="750">
-                <a:solidFill>
-                  <a:srgbClr val="64748B"/>
-                </a:solidFill>
-              </a:defRPr>
-            </a:pPr>
-            <a:r>
-              <a:t>Driven by top 28.1% of customers</a:t>
-            </a:r>
-          </a:p>
-        </p:txBody>
-      </p:sp>
-      <p:sp>
-        <p:nvSpPr>
-          <p:cNvPr id="9" name="Rounded Rectangle 8"/>
-          <p:cNvSpPr/>
-          <p:nvPr/>
-        </p:nvSpPr>
-        <p:spPr>
-          <a:xfrm>
-            <a:off x="731520" y="2514600"/>
-            <a:ext cx="5230368" cy="3886200"/>
-          </a:xfrm>
-          <a:prstGeom prst="roundRect">
-            <a:avLst/>
-          </a:prstGeom>
-          <a:solidFill>
-            <a:srgbClr val="FFFFFF"/>
-          </a:solidFill>
-          <a:ln w="12700">
-            <a:solidFill>
-              <a:srgbClr val="E2E8F0"/>
-            </a:solidFill>
-          </a:ln>
-        </p:spPr>
-        <p:style>
-          <a:lnRef idx="1">
-            <a:schemeClr val="accent1"/>
-          </a:lnRef>
-          <a:fillRef idx="3">
-            <a:schemeClr val="accent1"/>
-          </a:fillRef>
-          <a:effectRef idx="2">
-            <a:schemeClr val="accent1"/>
-          </a:effectRef>
-          <a:fontRef idx="minor">
-            <a:schemeClr val="lt1"/>
-          </a:fontRef>
-        </p:style>
-        <p:txBody>
-          <a:bodyPr wrap="square" lIns="228600" tIns="182880" rIns="228600" bIns="137160" rtlCol="0" anchor="ctr"/>
-          <a:lstStyle/>
-          <a:p>
-            <a:pPr algn="ctr">
-              <a:spcAft>
-                <a:spcPts val="800"/>
-              </a:spcAft>
-              <a:defRPr sz="1100" b="1">
-                <a:solidFill>
-                  <a:srgbClr val="E11D48"/>
-                </a:solidFill>
-              </a:defRPr>
-            </a:pPr>
-            <a:r>
-              <a:t>BUSINESS PROBLEM &amp; VULNERABILITY DIAGNOSIS</a:t>
-            </a:r>
-          </a:p>
-          <a:p>
-            <a:pPr>
-              <a:spcBef>
-                <a:spcPts val="600"/>
-              </a:spcBef>
-              <a:defRPr sz="950" b="1">
-                <a:solidFill>
-                  <a:srgbClr val="0F172A"/>
-                </a:solidFill>
-              </a:defRPr>
-            </a:pPr>
-            <a:r>
-              <a:t>• Surging Acquisition Costs (+25% CAC): </a:t>
-            </a:r>
-          </a:p>
-          <a:p>
-            <a:pPr>
-              <a:spcBef>
-                <a:spcPts val="100"/>
-              </a:spcBef>
-              <a:defRPr sz="880">
-                <a:solidFill>
-                  <a:srgbClr val="334155"/>
-                </a:solidFill>
-              </a:defRPr>
-            </a:pPr>
-            <a:r>
-              <a:t>  Rising ad channel costs mean acquiring one-off buyers severely damages long-term profitability.</a:t>
-            </a:r>
-          </a:p>
-          <a:p>
-            <a:pPr>
-              <a:spcBef>
-                <a:spcPts val="600"/>
-              </a:spcBef>
-              <a:defRPr sz="950" b="1">
-                <a:solidFill>
-                  <a:srgbClr val="0F172A"/>
-                </a:solidFill>
-              </a:defRPr>
-            </a:pPr>
-            <a:r>
-              <a:t>• Inefficient Blanket Discounting: </a:t>
-            </a:r>
-          </a:p>
-          <a:p>
-            <a:pPr>
-              <a:spcBef>
-                <a:spcPts val="100"/>
-              </a:spcBef>
-              <a:defRPr sz="880">
-                <a:solidFill>
-                  <a:srgbClr val="334155"/>
-                </a:solidFill>
-              </a:defRPr>
-            </a:pPr>
-            <a:r>
-              <a:t>  Mass promo discounts eroded profit margins without driving repeat loyalty or sustainable habit formation.</a:t>
-            </a:r>
-          </a:p>
-          <a:p>
-            <a:pPr>
-              <a:spcBef>
-                <a:spcPts val="600"/>
-              </a:spcBef>
-              <a:defRPr sz="950" b="1">
-                <a:solidFill>
-                  <a:srgbClr val="0F172A"/>
-                </a:solidFill>
-              </a:defRPr>
-            </a:pPr>
-            <a:r>
-              <a:t>• The 'Month-1 Cliff' (74.2% Churn): </a:t>
-            </a:r>
-          </a:p>
-          <a:p>
-            <a:pPr>
-              <a:spcBef>
-                <a:spcPts val="100"/>
-              </a:spcBef>
-              <a:defRPr sz="880">
-                <a:solidFill>
-                  <a:srgbClr val="334155"/>
-                </a:solidFill>
-              </a:defRPr>
-            </a:pPr>
-            <a:r>
-              <a:t>  Almost three-quarters of buyers lapse immediately after order #1 due to lack of automated onboarding.</a:t>
-            </a:r>
-          </a:p>
-          <a:p>
-            <a:pPr>
-              <a:spcBef>
-                <a:spcPts val="600"/>
-              </a:spcBef>
-              <a:defRPr sz="950" b="1">
-                <a:solidFill>
-                  <a:srgbClr val="0F172A"/>
-                </a:solidFill>
-              </a:defRPr>
-            </a:pPr>
-            <a:r>
-              <a:t>• Silent VIP Value Decay: </a:t>
-            </a:r>
-          </a:p>
-          <a:p>
-            <a:pPr>
-              <a:spcBef>
-                <a:spcPts val="100"/>
-              </a:spcBef>
-              <a:defRPr sz="880">
-                <a:solidFill>
-                  <a:srgbClr val="334155"/>
-                </a:solidFill>
-              </a:defRPr>
-            </a:pPr>
-            <a:r>
-              <a:t>  High-value buyers lapsed into 'At Risk' unnoticed without automated behavioral retention triggers.</a:t>
-            </a:r>
-          </a:p>
-        </p:txBody>
-      </p:sp>
-      <p:sp>
-        <p:nvSpPr>
-          <p:cNvPr id="10" name="Rounded Rectangle 9"/>
-          <p:cNvSpPr/>
-          <p:nvPr/>
-        </p:nvSpPr>
-        <p:spPr>
-          <a:xfrm>
-            <a:off x="6227064" y="2514600"/>
-            <a:ext cx="5230368" cy="3886200"/>
-          </a:xfrm>
-          <a:prstGeom prst="roundRect">
-            <a:avLst/>
-          </a:prstGeom>
-          <a:solidFill>
-            <a:srgbClr val="FFFFFF"/>
-          </a:solidFill>
-          <a:ln w="12700">
-            <a:solidFill>
-              <a:srgbClr val="E2E8F0"/>
-            </a:solidFill>
-          </a:ln>
-        </p:spPr>
-        <p:style>
-          <a:lnRef idx="1">
-            <a:schemeClr val="accent1"/>
-          </a:lnRef>
-          <a:fillRef idx="3">
-            <a:schemeClr val="accent1"/>
-          </a:fillRef>
-          <a:effectRef idx="2">
-            <a:schemeClr val="accent1"/>
-          </a:effectRef>
-          <a:fontRef idx="minor">
-            <a:schemeClr val="lt1"/>
-          </a:fontRef>
-        </p:style>
-        <p:txBody>
-          <a:bodyPr wrap="square" lIns="228600" tIns="182880" rIns="228600" bIns="137160" rtlCol="0" anchor="ctr"/>
-          <a:lstStyle/>
-          <a:p>
-            <a:pPr algn="ctr">
-              <a:spcAft>
-                <a:spcPts val="800"/>
-              </a:spcAft>
-              <a:defRPr sz="1100" b="1">
-                <a:solidFill>
-                  <a:srgbClr val="2563EB"/>
-                </a:solidFill>
-              </a:defRPr>
-            </a:pPr>
-            <a:r>
-              <a:t>STRATEGIC OBJECTIVES &amp; REMEDIATION GOALS</a:t>
-            </a:r>
-          </a:p>
-          <a:p>
-            <a:pPr>
-              <a:spcBef>
-                <a:spcPts val="600"/>
-              </a:spcBef>
-              <a:defRPr sz="950" b="1">
-                <a:solidFill>
-                  <a:srgbClr val="0F172A"/>
-                </a:solidFill>
-              </a:defRPr>
-            </a:pPr>
-            <a:r>
-              <a:t>• Reallocate 20% Budget to Retention: </a:t>
-            </a:r>
-          </a:p>
-          <a:p>
-            <a:pPr>
-              <a:spcBef>
-                <a:spcPts val="100"/>
-              </a:spcBef>
-              <a:defRPr sz="880">
-                <a:solidFill>
-                  <a:srgbClr val="334155"/>
-                </a:solidFill>
-              </a:defRPr>
-            </a:pPr>
-            <a:r>
-              <a:t>  Shift paid media budget from low-intent cold ads to high-ROI automated post-purchase flows.</a:t>
-            </a:r>
-          </a:p>
-          <a:p>
-            <a:pPr>
-              <a:spcBef>
-                <a:spcPts val="600"/>
-              </a:spcBef>
-              <a:defRPr sz="950" b="1">
-                <a:solidFill>
-                  <a:srgbClr val="0F172A"/>
-                </a:solidFill>
-              </a:defRPr>
-            </a:pPr>
-            <a:r>
-              <a:t>• Eliminate Blanket Promo Discounts: </a:t>
-            </a:r>
-          </a:p>
-          <a:p>
-            <a:pPr>
-              <a:spcBef>
-                <a:spcPts val="100"/>
-              </a:spcBef>
-              <a:defRPr sz="880">
-                <a:solidFill>
-                  <a:srgbClr val="334155"/>
-                </a:solidFill>
-              </a:defRPr>
-            </a:pPr>
-            <a:r>
-              <a:t>  Preserve margin by replacing general discounts with VIP perks for Champions and win-back offers for At-Risk.</a:t>
-            </a:r>
-          </a:p>
-          <a:p>
-            <a:pPr>
-              <a:spcBef>
-                <a:spcPts val="600"/>
-              </a:spcBef>
-              <a:defRPr sz="950" b="1">
-                <a:solidFill>
-                  <a:srgbClr val="0F172A"/>
-                </a:solidFill>
-              </a:defRPr>
-            </a:pPr>
-            <a:r>
-              <a:t>• Bridge Month-1 Gap (Days 7-21): </a:t>
-            </a:r>
-          </a:p>
-          <a:p>
-            <a:pPr>
-              <a:spcBef>
-                <a:spcPts val="100"/>
-              </a:spcBef>
-              <a:defRPr sz="880">
-                <a:solidFill>
-                  <a:srgbClr val="334155"/>
-                </a:solidFill>
-              </a:defRPr>
-            </a:pPr>
-            <a:r>
-              <a:t>  Target new buyers with personalized category recommendations within 14 days to lift repeat rates above 35%.</a:t>
-            </a:r>
-          </a:p>
-          <a:p>
-            <a:pPr>
-              <a:spcBef>
-                <a:spcPts val="600"/>
-              </a:spcBef>
-              <a:defRPr sz="950" b="1">
-                <a:solidFill>
-                  <a:srgbClr val="0F172A"/>
-                </a:solidFill>
-              </a:defRPr>
-            </a:pPr>
-            <a:r>
-              <a:t>• Automate Live Tableau Telemetry: </a:t>
-            </a:r>
-          </a:p>
-          <a:p>
-            <a:pPr>
-              <a:spcBef>
-                <a:spcPts val="100"/>
-              </a:spcBef>
-              <a:defRPr sz="880">
-                <a:solidFill>
-                  <a:srgbClr val="334155"/>
-                </a:solidFill>
-              </a:defRPr>
-            </a:pPr>
-            <a:r>
-              <a:t>  Empower growth teams with live weekly cohort retention and RFM migration dashboards.</a:t>
-            </a:r>
-          </a:p>
-        </p:txBody>
-      </p:sp>
-    </p:spTree>
-  </p:cSld>
-  <p:clrMapOvr>
-    <a:masterClrMapping/>
-  </p:clrMapOvr>
-</p:sld>
-</file>
-
-<file path=ppt/slides/slide3.xml><?xml version="1.0" encoding="utf-8"?>
-<p:sld xmlns:a="http://schemas.openxmlformats.org/drawingml/2006/main" xmlns:r="http://schemas.openxmlformats.org/officeDocument/2006/relationships" xmlns:p="http://schemas.openxmlformats.org/presentationml/2006/main">
-  <p:cSld>
-    <p:spTree>
-      <p:nvGrpSpPr>
-        <p:cNvPr id="1" name=""/>
-        <p:cNvGrpSpPr/>
-        <p:nvPr/>
-      </p:nvGrpSpPr>
-      <p:grpSpPr>
-        <a:xfrm>
-          <a:off x="0" y="0"/>
-          <a:ext cx="0" cy="0"/>
-          <a:chOff x="0" y="0"/>
-          <a:chExt cx="0" cy="0"/>
-        </a:xfrm>
-      </p:grpSpPr>
-      <p:sp>
-        <p:nvSpPr>
-          <p:cNvPr id="2" name="Rectangle 1"/>
-          <p:cNvSpPr/>
-          <p:nvPr/>
-        </p:nvSpPr>
-        <p:spPr>
-          <a:xfrm>
-            <a:off x="0" y="0"/>
-            <a:ext cx="12191695" cy="6858000"/>
-          </a:xfrm>
-          <a:prstGeom prst="rect">
-            <a:avLst/>
-          </a:prstGeom>
-          <a:solidFill>
-            <a:srgbClr val="F8FAFC"/>
-          </a:solidFill>
-          <a:ln>
-            <a:noFill/>
-          </a:ln>
-        </p:spPr>
-        <p:style>
-          <a:lnRef idx="1">
-            <a:schemeClr val="accent1"/>
-          </a:lnRef>
-          <a:fillRef idx="3">
-            <a:schemeClr val="accent1"/>
-          </a:fillRef>
-          <a:effectRef idx="2">
-            <a:schemeClr val="accent1"/>
-          </a:effectRef>
-          <a:fontRef idx="minor">
-            <a:schemeClr val="lt1"/>
-          </a:fontRef>
-        </p:style>
-        <p:txBody>
           <a:bodyPr rtlCol="0" anchor="ctr"/>
           <a:lstStyle/>
           <a:p>
             <a:pPr algn="ctr"/>
-            <a:endParaRPr/>
-          </a:p>
-        </p:txBody>
-      </p:sp>
-      <p:sp>
-        <p:nvSpPr>
-          <p:cNvPr id="3" name="Rounded Rectangle 2"/>
-          <p:cNvSpPr/>
-          <p:nvPr/>
-        </p:nvSpPr>
-        <p:spPr>
-          <a:xfrm>
-            <a:off x="731520" y="365760"/>
-            <a:ext cx="3291840" cy="256032"/>
-          </a:xfrm>
-          <a:prstGeom prst="roundRect">
-            <a:avLst/>
-          </a:prstGeom>
-          <a:solidFill>
-            <a:srgbClr val="EFF6FF"/>
-          </a:solidFill>
-          <a:ln w="10160">
-            <a:solidFill>
-              <a:srgbClr val="BFDBFE"/>
-            </a:solidFill>
-          </a:ln>
-        </p:spPr>
-        <p:style>
-          <a:lnRef idx="1">
-            <a:schemeClr val="accent1"/>
-          </a:lnRef>
-          <a:fillRef idx="3">
-            <a:schemeClr val="accent1"/>
-          </a:fillRef>
-          <a:effectRef idx="2">
-            <a:schemeClr val="accent1"/>
-          </a:effectRef>
-          <a:fontRef idx="minor">
-            <a:schemeClr val="lt1"/>
-          </a:fontRef>
-        </p:style>
-        <p:txBody>
-          <a:bodyPr lIns="0" tIns="0" rIns="0" bIns="0" rtlCol="0" anchor="ctr"/>
-          <a:lstStyle/>
-          <a:p>
-            <a:pPr algn="ctr">
-              <a:defRPr sz="800" b="1">
-                <a:solidFill>
-                  <a:srgbClr val="2563EB"/>
-                </a:solidFill>
-              </a:defRPr>
-            </a:pPr>
-            <a:r>
-              <a:t>EXECUTIVE DATA ANALYTICS CASE STUDY</a:t>
-            </a:r>
-          </a:p>
-        </p:txBody>
-      </p:sp>
-      <p:sp>
-        <p:nvSpPr>
-          <p:cNvPr id="4" name="TextBox 3"/>
+          </a:p>
+        </p:txBody>
+      </p:sp>
+      <p:sp>
+        <p:nvSpPr>
+          <p:cNvPr id="14" name="TextBox 13"/>
           <p:cNvSpPr txBox="1"/>
           <p:nvPr/>
         </p:nvSpPr>
         <p:spPr>
           <a:xfrm>
-            <a:off x="731520" y="658368"/>
-            <a:ext cx="10728655" cy="502920"/>
+            <a:off x="6400800" y="4069080"/>
+            <a:ext cx="4937760" cy="457200"/>
           </a:xfrm>
           <a:prstGeom prst="rect">
             <a:avLst/>
@@ -4520,443 +5040,38 @@
           <a:noFill/>
         </p:spPr>
         <p:txBody>
-          <a:bodyPr wrap="none" lIns="0" tIns="0" rIns="0" bIns="0">
+          <a:bodyPr wrap="square">
             <a:spAutoFit/>
           </a:bodyPr>
           <a:lstStyle/>
           <a:p>
             <a:pPr>
-              <a:defRPr sz="2000" b="1">
+              <a:spcAft>
+                <a:spcPts val="800"/>
+              </a:spcAft>
+            </a:pPr>
+            <a:r>
+              <a:rPr sz="1700" b="1">
                 <a:solidFill>
                   <a:srgbClr val="0F172A"/>
                 </a:solidFill>
-              </a:defRPr>
-            </a:pPr>
-            <a:r>
-              <a:t>Cohort Retention Analysis: Mapping the Month-1 Churn Cliff</a:t>
-            </a:r>
-          </a:p>
-        </p:txBody>
-      </p:sp>
-      <p:sp>
-        <p:nvSpPr>
-          <p:cNvPr id="5" name="Rounded Rectangle 4"/>
-          <p:cNvSpPr/>
-          <p:nvPr/>
-        </p:nvSpPr>
-        <p:spPr>
-          <a:xfrm>
-            <a:off x="731520" y="1234440"/>
-            <a:ext cx="6858000" cy="5120640"/>
-          </a:xfrm>
-          <a:prstGeom prst="roundRect">
-            <a:avLst/>
-          </a:prstGeom>
-          <a:solidFill>
-            <a:srgbClr val="FFFFFF"/>
-          </a:solidFill>
-          <a:ln w="12700">
-            <a:solidFill>
-              <a:srgbClr val="E2E8F0"/>
-            </a:solidFill>
-          </a:ln>
-        </p:spPr>
-        <p:style>
-          <a:lnRef idx="1">
-            <a:schemeClr val="accent1"/>
-          </a:lnRef>
-          <a:fillRef idx="3">
-            <a:schemeClr val="accent1"/>
-          </a:fillRef>
-          <a:effectRef idx="2">
-            <a:schemeClr val="accent1"/>
-          </a:effectRef>
-          <a:fontRef idx="minor">
-            <a:schemeClr val="lt1"/>
-          </a:fontRef>
-        </p:style>
-        <p:txBody>
-          <a:bodyPr rtlCol="0" anchor="ctr"/>
-          <a:lstStyle/>
-          <a:p>
-            <a:pPr algn="ctr"/>
-            <a:endParaRPr/>
-          </a:p>
-        </p:txBody>
-      </p:sp>
-      <p:pic>
-        <p:nvPicPr>
-          <p:cNvPr id="6" name="Picture 5" descr="01_cohort_retention_heatmap.png"/>
-          <p:cNvPicPr>
-            <a:picLocks noChangeAspect="1"/>
-          </p:cNvPicPr>
-          <p:nvPr/>
-        </p:nvPicPr>
-        <p:blipFill>
-          <a:blip r:embed="rId2"/>
-          <a:stretch>
-            <a:fillRect/>
-          </a:stretch>
-        </p:blipFill>
-        <p:spPr>
-          <a:xfrm>
-            <a:off x="868680" y="1946462"/>
-            <a:ext cx="6583680" cy="3603946"/>
-          </a:xfrm>
-          <a:prstGeom prst="rect">
-            <a:avLst/>
-          </a:prstGeom>
-        </p:spPr>
-      </p:pic>
-      <p:sp>
-        <p:nvSpPr>
-          <p:cNvPr id="7" name="Rounded Rectangle 6"/>
-          <p:cNvSpPr/>
-          <p:nvPr/>
-        </p:nvSpPr>
-        <p:spPr>
-          <a:xfrm>
-            <a:off x="7772400" y="1234440"/>
-            <a:ext cx="3685032" cy="1609344"/>
-          </a:xfrm>
-          <a:prstGeom prst="roundRect">
-            <a:avLst/>
-          </a:prstGeom>
-          <a:solidFill>
-            <a:srgbClr val="FFFFFF"/>
-          </a:solidFill>
-          <a:ln w="12700">
-            <a:solidFill>
-              <a:srgbClr val="E2E8F0"/>
-            </a:solidFill>
-          </a:ln>
-        </p:spPr>
-        <p:style>
-          <a:lnRef idx="1">
-            <a:schemeClr val="accent1"/>
-          </a:lnRef>
-          <a:fillRef idx="3">
-            <a:schemeClr val="accent1"/>
-          </a:fillRef>
-          <a:effectRef idx="2">
-            <a:schemeClr val="accent1"/>
-          </a:effectRef>
-          <a:fontRef idx="minor">
-            <a:schemeClr val="lt1"/>
-          </a:fontRef>
-        </p:style>
-        <p:txBody>
-          <a:bodyPr wrap="square" lIns="164592" tIns="137160" rIns="164592" bIns="91440" rtlCol="0" anchor="ctr"/>
-          <a:lstStyle/>
-          <a:p>
-            <a:pPr algn="ctr">
-              <a:spcAft>
-                <a:spcPts val="400"/>
-              </a:spcAft>
-              <a:defRPr sz="950" b="1">
-                <a:solidFill>
-                  <a:srgbClr val="E11D48"/>
-                </a:solidFill>
-              </a:defRPr>
-            </a:pPr>
-            <a:r>
-              <a:t>THE MONTH-1 CLIFF (-74.2% DROP)</a:t>
-            </a:r>
-          </a:p>
-          <a:p>
-            <a:pPr>
-              <a:spcBef>
-                <a:spcPts val="200"/>
-              </a:spcBef>
-              <a:defRPr sz="860">
-                <a:solidFill>
-                  <a:srgbClr val="334155"/>
-                </a:solidFill>
-              </a:defRPr>
-            </a:pPr>
-            <a:r>
-              <a:t>Average retention plummets from 100% to 25.8% within 30 days. Over 7 out of 10 newly acquired customers never make a repeat purchase without intervention.</a:t>
-            </a:r>
-          </a:p>
-        </p:txBody>
-      </p:sp>
-      <p:sp>
-        <p:nvSpPr>
-          <p:cNvPr id="8" name="Rounded Rectangle 7"/>
-          <p:cNvSpPr/>
-          <p:nvPr/>
-        </p:nvSpPr>
-        <p:spPr>
-          <a:xfrm>
-            <a:off x="7772400" y="2990088"/>
-            <a:ext cx="3685032" cy="1609344"/>
-          </a:xfrm>
-          <a:prstGeom prst="roundRect">
-            <a:avLst/>
-          </a:prstGeom>
-          <a:solidFill>
-            <a:srgbClr val="FFFFFF"/>
-          </a:solidFill>
-          <a:ln w="12700">
-            <a:solidFill>
-              <a:srgbClr val="E2E8F0"/>
-            </a:solidFill>
-          </a:ln>
-        </p:spPr>
-        <p:style>
-          <a:lnRef idx="1">
-            <a:schemeClr val="accent1"/>
-          </a:lnRef>
-          <a:fillRef idx="3">
-            <a:schemeClr val="accent1"/>
-          </a:fillRef>
-          <a:effectRef idx="2">
-            <a:schemeClr val="accent1"/>
-          </a:effectRef>
-          <a:fontRef idx="minor">
-            <a:schemeClr val="lt1"/>
-          </a:fontRef>
-        </p:style>
-        <p:txBody>
-          <a:bodyPr wrap="square" lIns="164592" tIns="137160" rIns="164592" bIns="91440" rtlCol="0" anchor="ctr"/>
-          <a:lstStyle/>
-          <a:p>
-            <a:pPr algn="ctr">
-              <a:spcAft>
-                <a:spcPts val="400"/>
-              </a:spcAft>
-              <a:defRPr sz="950" b="1">
-                <a:solidFill>
-                  <a:srgbClr val="2563EB"/>
-                </a:solidFill>
-              </a:defRPr>
-            </a:pPr>
-            <a:r>
-              <a:t>LONG-TERM RETENTION STABILIZATION</a:t>
-            </a:r>
-          </a:p>
-          <a:p>
-            <a:pPr>
-              <a:spcBef>
-                <a:spcPts val="200"/>
-              </a:spcBef>
-              <a:defRPr sz="860">
-                <a:solidFill>
-                  <a:srgbClr val="334155"/>
-                </a:solidFill>
-              </a:defRPr>
-            </a:pPr>
-            <a:r>
-              <a:t>Cohorts that survive past Month 3 form a resilient, highly profitable core, sustaining 20-25% repeat activity through Month 12+.</a:t>
-            </a:r>
-          </a:p>
-        </p:txBody>
-      </p:sp>
-      <p:sp>
-        <p:nvSpPr>
-          <p:cNvPr id="9" name="Rounded Rectangle 8"/>
-          <p:cNvSpPr/>
-          <p:nvPr/>
-        </p:nvSpPr>
-        <p:spPr>
-          <a:xfrm>
-            <a:off x="7772400" y="4745736"/>
-            <a:ext cx="3685032" cy="1609344"/>
-          </a:xfrm>
-          <a:prstGeom prst="roundRect">
-            <a:avLst/>
-          </a:prstGeom>
-          <a:solidFill>
-            <a:srgbClr val="FFFFFF"/>
-          </a:solidFill>
-          <a:ln w="12700">
-            <a:solidFill>
-              <a:srgbClr val="E2E8F0"/>
-            </a:solidFill>
-          </a:ln>
-        </p:spPr>
-        <p:style>
-          <a:lnRef idx="1">
-            <a:schemeClr val="accent1"/>
-          </a:lnRef>
-          <a:fillRef idx="3">
-            <a:schemeClr val="accent1"/>
-          </a:fillRef>
-          <a:effectRef idx="2">
-            <a:schemeClr val="accent1"/>
-          </a:effectRef>
-          <a:fontRef idx="minor">
-            <a:schemeClr val="lt1"/>
-          </a:fontRef>
-        </p:style>
-        <p:txBody>
-          <a:bodyPr wrap="square" lIns="164592" tIns="137160" rIns="164592" bIns="91440" rtlCol="0" anchor="ctr"/>
-          <a:lstStyle/>
-          <a:p>
-            <a:pPr algn="ctr">
-              <a:spcAft>
-                <a:spcPts val="400"/>
-              </a:spcAft>
-              <a:defRPr sz="950" b="1">
-                <a:solidFill>
-                  <a:srgbClr val="D97706"/>
-                </a:solidFill>
-              </a:defRPr>
-            </a:pPr>
-            <a:r>
-              <a:t>CRITICAL INTERVENTION WINDOW</a:t>
-            </a:r>
-          </a:p>
-          <a:p>
-            <a:pPr>
-              <a:spcBef>
-                <a:spcPts val="200"/>
-              </a:spcBef>
-              <a:defRPr sz="860">
-                <a:solidFill>
-                  <a:srgbClr val="334155"/>
-                </a:solidFill>
-              </a:defRPr>
-            </a:pPr>
-            <a:r>
-              <a:t>Post-purchase onboarding triggers must deploy during Days 7-21 while product satisfaction is high, before buyer momentum completely fades.</a:t>
-            </a:r>
-          </a:p>
-        </p:txBody>
-      </p:sp>
-    </p:spTree>
-  </p:cSld>
-  <p:clrMapOvr>
-    <a:masterClrMapping/>
-  </p:clrMapOvr>
-</p:sld>
-</file>
-
-<file path=ppt/slides/slide4.xml><?xml version="1.0" encoding="utf-8"?>
-<p:sld xmlns:a="http://schemas.openxmlformats.org/drawingml/2006/main" xmlns:r="http://schemas.openxmlformats.org/officeDocument/2006/relationships" xmlns:p="http://schemas.openxmlformats.org/presentationml/2006/main">
-  <p:cSld>
-    <p:spTree>
-      <p:nvGrpSpPr>
-        <p:cNvPr id="1" name=""/>
-        <p:cNvGrpSpPr/>
-        <p:nvPr/>
-      </p:nvGrpSpPr>
-      <p:grpSpPr>
-        <a:xfrm>
-          <a:off x="0" y="0"/>
-          <a:ext cx="0" cy="0"/>
-          <a:chOff x="0" y="0"/>
-          <a:chExt cx="0" cy="0"/>
-        </a:xfrm>
-      </p:grpSpPr>
-      <p:sp>
-        <p:nvSpPr>
-          <p:cNvPr id="2" name="Rectangle 1"/>
-          <p:cNvSpPr/>
-          <p:nvPr/>
-        </p:nvSpPr>
-        <p:spPr>
-          <a:xfrm>
-            <a:off x="0" y="0"/>
-            <a:ext cx="12191695" cy="6858000"/>
-          </a:xfrm>
-          <a:prstGeom prst="rect">
-            <a:avLst/>
-          </a:prstGeom>
-          <a:solidFill>
-            <a:srgbClr val="F8FAFC"/>
-          </a:solidFill>
-          <a:ln>
-            <a:noFill/>
-          </a:ln>
-        </p:spPr>
-        <p:style>
-          <a:lnRef idx="1">
-            <a:schemeClr val="accent1"/>
-          </a:lnRef>
-          <a:fillRef idx="3">
-            <a:schemeClr val="accent1"/>
-          </a:fillRef>
-          <a:effectRef idx="2">
-            <a:schemeClr val="accent1"/>
-          </a:effectRef>
-          <a:fontRef idx="minor">
-            <a:schemeClr val="lt1"/>
-          </a:fontRef>
-        </p:style>
-        <p:txBody>
-          <a:bodyPr rtlCol="0" anchor="ctr"/>
-          <a:lstStyle/>
-          <a:p>
-            <a:pPr algn="ctr"/>
-            <a:endParaRPr/>
-          </a:p>
-        </p:txBody>
-      </p:sp>
-      <p:sp>
-        <p:nvSpPr>
-          <p:cNvPr id="3" name="Rounded Rectangle 2"/>
-          <p:cNvSpPr/>
-          <p:nvPr/>
-        </p:nvSpPr>
-        <p:spPr>
-          <a:xfrm>
-            <a:off x="731520" y="365760"/>
-            <a:ext cx="3291840" cy="256032"/>
-          </a:xfrm>
-          <a:prstGeom prst="roundRect">
-            <a:avLst/>
-          </a:prstGeom>
-          <a:solidFill>
-            <a:srgbClr val="EFF6FF"/>
-          </a:solidFill>
-          <a:ln w="10160">
-            <a:solidFill>
-              <a:srgbClr val="BFDBFE"/>
-            </a:solidFill>
-          </a:ln>
-        </p:spPr>
-        <p:style>
-          <a:lnRef idx="1">
-            <a:schemeClr val="accent1"/>
-          </a:lnRef>
-          <a:fillRef idx="3">
-            <a:schemeClr val="accent1"/>
-          </a:fillRef>
-          <a:effectRef idx="2">
-            <a:schemeClr val="accent1"/>
-          </a:effectRef>
-          <a:fontRef idx="minor">
-            <a:schemeClr val="lt1"/>
-          </a:fontRef>
-        </p:style>
-        <p:txBody>
-          <a:bodyPr lIns="0" tIns="0" rIns="0" bIns="0" rtlCol="0" anchor="ctr"/>
-          <a:lstStyle/>
-          <a:p>
-            <a:pPr algn="ctr">
-              <a:defRPr sz="800" b="1">
-                <a:solidFill>
-                  <a:srgbClr val="2563EB"/>
-                </a:solidFill>
-              </a:defRPr>
-            </a:pPr>
-            <a:r>
-              <a:t>EXECUTIVE DATA ANALYTICS CASE STUDY</a:t>
-            </a:r>
-          </a:p>
-        </p:txBody>
-      </p:sp>
-      <p:sp>
-        <p:nvSpPr>
-          <p:cNvPr id="4" name="TextBox 3"/>
+                <a:latin typeface="Calibri"/>
+              </a:rPr>
+              <a:t>4. Plan stock and campaigns around September to November</a:t>
+            </a:r>
+          </a:p>
+        </p:txBody>
+      </p:sp>
+      <p:sp>
+        <p:nvSpPr>
+          <p:cNvPr id="15" name="TextBox 14"/>
           <p:cNvSpPr txBox="1"/>
           <p:nvPr/>
         </p:nvSpPr>
         <p:spPr>
           <a:xfrm>
-            <a:off x="731520" y="658368"/>
-            <a:ext cx="10728655" cy="502920"/>
+            <a:off x="6400800" y="4617720"/>
+            <a:ext cx="4937760" cy="1280160"/>
           </a:xfrm>
           <a:prstGeom prst="rect">
             <a:avLst/>
@@ -4964,443 +5079,38 @@
           <a:noFill/>
         </p:spPr>
         <p:txBody>
-          <a:bodyPr wrap="none" lIns="0" tIns="0" rIns="0" bIns="0">
+          <a:bodyPr wrap="square">
             <a:spAutoFit/>
           </a:bodyPr>
           <a:lstStyle/>
           <a:p>
             <a:pPr>
-              <a:defRPr sz="2000" b="1">
-                <a:solidFill>
-                  <a:srgbClr val="0F172A"/>
-                </a:solidFill>
-              </a:defRPr>
+              <a:spcAft>
+                <a:spcPts val="800"/>
+              </a:spcAft>
             </a:pPr>
             <a:r>
-              <a:t>RFM Behavioral Segmentation: Pareto Concentration &amp; Tiers</a:t>
-            </a:r>
-          </a:p>
-        </p:txBody>
-      </p:sp>
-      <p:sp>
-        <p:nvSpPr>
-          <p:cNvPr id="5" name="Rounded Rectangle 4"/>
-          <p:cNvSpPr/>
-          <p:nvPr/>
-        </p:nvSpPr>
-        <p:spPr>
-          <a:xfrm>
-            <a:off x="731520" y="1234440"/>
-            <a:ext cx="6858000" cy="5120640"/>
-          </a:xfrm>
-          <a:prstGeom prst="roundRect">
-            <a:avLst/>
-          </a:prstGeom>
-          <a:solidFill>
-            <a:srgbClr val="FFFFFF"/>
-          </a:solidFill>
-          <a:ln w="12700">
-            <a:solidFill>
-              <a:srgbClr val="E2E8F0"/>
-            </a:solidFill>
-          </a:ln>
-        </p:spPr>
-        <p:style>
-          <a:lnRef idx="1">
-            <a:schemeClr val="accent1"/>
-          </a:lnRef>
-          <a:fillRef idx="3">
-            <a:schemeClr val="accent1"/>
-          </a:fillRef>
-          <a:effectRef idx="2">
-            <a:schemeClr val="accent1"/>
-          </a:effectRef>
-          <a:fontRef idx="minor">
-            <a:schemeClr val="lt1"/>
-          </a:fontRef>
-        </p:style>
-        <p:txBody>
-          <a:bodyPr rtlCol="0" anchor="ctr"/>
-          <a:lstStyle/>
-          <a:p>
-            <a:pPr algn="ctr"/>
-            <a:endParaRPr/>
-          </a:p>
-        </p:txBody>
-      </p:sp>
-      <p:pic>
-        <p:nvPicPr>
-          <p:cNvPr id="6" name="Picture 5" descr="02_rfm_revenue_vs_customers.png"/>
-          <p:cNvPicPr>
-            <a:picLocks noChangeAspect="1"/>
-          </p:cNvPicPr>
-          <p:nvPr/>
-        </p:nvPicPr>
-        <p:blipFill>
-          <a:blip r:embed="rId2"/>
-          <a:stretch>
-            <a:fillRect/>
-          </a:stretch>
-        </p:blipFill>
-        <p:spPr>
-          <a:xfrm>
-            <a:off x="868680" y="2127642"/>
-            <a:ext cx="6583680" cy="2985932"/>
-          </a:xfrm>
-          <a:prstGeom prst="rect">
-            <a:avLst/>
-          </a:prstGeom>
-        </p:spPr>
-      </p:pic>
-      <p:sp>
-        <p:nvSpPr>
-          <p:cNvPr id="7" name="Rounded Rectangle 6"/>
-          <p:cNvSpPr/>
-          <p:nvPr/>
-        </p:nvSpPr>
-        <p:spPr>
-          <a:xfrm>
-            <a:off x="7772400" y="1234440"/>
-            <a:ext cx="3685032" cy="1609344"/>
-          </a:xfrm>
-          <a:prstGeom prst="roundRect">
-            <a:avLst/>
-          </a:prstGeom>
-          <a:solidFill>
-            <a:srgbClr val="FFFFFF"/>
-          </a:solidFill>
-          <a:ln w="12700">
-            <a:solidFill>
-              <a:srgbClr val="E2E8F0"/>
-            </a:solidFill>
-          </a:ln>
-        </p:spPr>
-        <p:style>
-          <a:lnRef idx="1">
-            <a:schemeClr val="accent1"/>
-          </a:lnRef>
-          <a:fillRef idx="3">
-            <a:schemeClr val="accent1"/>
-          </a:fillRef>
-          <a:effectRef idx="2">
-            <a:schemeClr val="accent1"/>
-          </a:effectRef>
-          <a:fontRef idx="minor">
-            <a:schemeClr val="lt1"/>
-          </a:fontRef>
-        </p:style>
-        <p:txBody>
-          <a:bodyPr wrap="square" lIns="164592" tIns="137160" rIns="164592" bIns="91440" rtlCol="0" anchor="ctr"/>
-          <a:lstStyle/>
-          <a:p>
-            <a:pPr algn="ctr">
-              <a:spcAft>
-                <a:spcPts val="400"/>
-              </a:spcAft>
-              <a:defRPr sz="950" b="1">
-                <a:solidFill>
-                  <a:srgbClr val="10B981"/>
-                </a:solidFill>
-              </a:defRPr>
-            </a:pPr>
-            <a:r>
-              <a:t>CHAMPIONS (41.1% REVENUE | 14.8% USERS)</a:t>
-            </a:r>
-          </a:p>
-          <a:p>
-            <a:pPr>
-              <a:spcBef>
-                <a:spcPts val="200"/>
-              </a:spcBef>
-              <a:defRPr sz="860">
-                <a:solidFill>
-                  <a:srgbClr val="334155"/>
-                </a:solidFill>
-              </a:defRPr>
-            </a:pPr>
-            <a:r>
-              <a:t>868 VIPs generate £7.28M with 19.8 avg orders (£8.39k spend). Action: Provide dedicated concierge, product co-creation, and zero margin discounts.</a:t>
-            </a:r>
-          </a:p>
-        </p:txBody>
-      </p:sp>
-      <p:sp>
-        <p:nvSpPr>
-          <p:cNvPr id="8" name="Rounded Rectangle 7"/>
-          <p:cNvSpPr/>
-          <p:nvPr/>
-        </p:nvSpPr>
-        <p:spPr>
-          <a:xfrm>
-            <a:off x="7772400" y="2990088"/>
-            <a:ext cx="3685032" cy="1609344"/>
-          </a:xfrm>
-          <a:prstGeom prst="roundRect">
-            <a:avLst/>
-          </a:prstGeom>
-          <a:solidFill>
-            <a:srgbClr val="FFFFFF"/>
-          </a:solidFill>
-          <a:ln w="12700">
-            <a:solidFill>
-              <a:srgbClr val="E2E8F0"/>
-            </a:solidFill>
-          </a:ln>
-        </p:spPr>
-        <p:style>
-          <a:lnRef idx="1">
-            <a:schemeClr val="accent1"/>
-          </a:lnRef>
-          <a:fillRef idx="3">
-            <a:schemeClr val="accent1"/>
-          </a:fillRef>
-          <a:effectRef idx="2">
-            <a:schemeClr val="accent1"/>
-          </a:effectRef>
-          <a:fontRef idx="minor">
-            <a:schemeClr val="lt1"/>
-          </a:fontRef>
-        </p:style>
-        <p:txBody>
-          <a:bodyPr wrap="square" lIns="164592" tIns="137160" rIns="164592" bIns="91440" rtlCol="0" anchor="ctr"/>
-          <a:lstStyle/>
-          <a:p>
-            <a:pPr algn="ctr">
-              <a:spcAft>
-                <a:spcPts val="400"/>
-              </a:spcAft>
-              <a:defRPr sz="950" b="1">
-                <a:solidFill>
-                  <a:srgbClr val="2563EB"/>
-                </a:solidFill>
-              </a:defRPr>
-            </a:pPr>
-            <a:r>
-              <a:t>LOYAL &amp; POTENTIAL (29.5% REVENUE)</a:t>
-            </a:r>
-          </a:p>
-          <a:p>
-            <a:pPr>
-              <a:spcBef>
-                <a:spcPts val="200"/>
-              </a:spcBef>
-              <a:defRPr sz="860">
-                <a:solidFill>
-                  <a:srgbClr val="334155"/>
-                </a:solidFill>
-              </a:defRPr>
-            </a:pPr>
-            <a:r>
-              <a:t>1,523 consistent buyers contributing £5.23M. Action: Milestone rewards, threshold spend bonuses, and cross-category discovery recommendations.</a:t>
-            </a:r>
-          </a:p>
-        </p:txBody>
-      </p:sp>
-      <p:sp>
-        <p:nvSpPr>
-          <p:cNvPr id="9" name="Rounded Rectangle 8"/>
-          <p:cNvSpPr/>
-          <p:nvPr/>
-        </p:nvSpPr>
-        <p:spPr>
-          <a:xfrm>
-            <a:off x="7772400" y="4745736"/>
-            <a:ext cx="3685032" cy="1609344"/>
-          </a:xfrm>
-          <a:prstGeom prst="roundRect">
-            <a:avLst/>
-          </a:prstGeom>
-          <a:solidFill>
-            <a:srgbClr val="FFFFFF"/>
-          </a:solidFill>
-          <a:ln w="12700">
-            <a:solidFill>
-              <a:srgbClr val="E2E8F0"/>
-            </a:solidFill>
-          </a:ln>
-        </p:spPr>
-        <p:style>
-          <a:lnRef idx="1">
-            <a:schemeClr val="accent1"/>
-          </a:lnRef>
-          <a:fillRef idx="3">
-            <a:schemeClr val="accent1"/>
-          </a:fillRef>
-          <a:effectRef idx="2">
-            <a:schemeClr val="accent1"/>
-          </a:effectRef>
-          <a:fontRef idx="minor">
-            <a:schemeClr val="lt1"/>
-          </a:fontRef>
-        </p:style>
-        <p:txBody>
-          <a:bodyPr wrap="square" lIns="164592" tIns="137160" rIns="164592" bIns="91440" rtlCol="0" anchor="ctr"/>
-          <a:lstStyle/>
-          <a:p>
-            <a:pPr algn="ctr">
-              <a:spcAft>
-                <a:spcPts val="400"/>
-              </a:spcAft>
-              <a:defRPr sz="950" b="1">
-                <a:solidFill>
-                  <a:srgbClr val="D97706"/>
-                </a:solidFill>
-              </a:defRPr>
-            </a:pPr>
-            <a:r>
-              <a:t>AT RISK &amp; CAN'T LOSE (15.1% REVENUE)</a:t>
-            </a:r>
-          </a:p>
-          <a:p>
-            <a:pPr>
-              <a:spcBef>
-                <a:spcPts val="200"/>
-              </a:spcBef>
-              <a:defRPr sz="860">
-                <a:solidFill>
-                  <a:srgbClr val="334155"/>
-                </a:solidFill>
-              </a:defRPr>
-            </a:pPr>
-            <a:r>
-              <a:t>945 high-spend customers inactive &gt;200 days (£2.68M revenue at stake). Action: Time-sensitive automated win-back emails &amp; reactivation incentives.</a:t>
-            </a:r>
-          </a:p>
-        </p:txBody>
-      </p:sp>
-    </p:spTree>
-  </p:cSld>
-  <p:clrMapOvr>
-    <a:masterClrMapping/>
-  </p:clrMapOvr>
-</p:sld>
-</file>
-
-<file path=ppt/slides/slide5.xml><?xml version="1.0" encoding="utf-8"?>
-<p:sld xmlns:a="http://schemas.openxmlformats.org/drawingml/2006/main" xmlns:r="http://schemas.openxmlformats.org/officeDocument/2006/relationships" xmlns:p="http://schemas.openxmlformats.org/presentationml/2006/main">
-  <p:cSld>
-    <p:spTree>
-      <p:nvGrpSpPr>
-        <p:cNvPr id="1" name=""/>
-        <p:cNvGrpSpPr/>
-        <p:nvPr/>
-      </p:nvGrpSpPr>
-      <p:grpSpPr>
-        <a:xfrm>
-          <a:off x="0" y="0"/>
-          <a:ext cx="0" cy="0"/>
-          <a:chOff x="0" y="0"/>
-          <a:chExt cx="0" cy="0"/>
-        </a:xfrm>
-      </p:grpSpPr>
-      <p:sp>
-        <p:nvSpPr>
-          <p:cNvPr id="2" name="Rectangle 1"/>
-          <p:cNvSpPr/>
-          <p:nvPr/>
-        </p:nvSpPr>
-        <p:spPr>
-          <a:xfrm>
-            <a:off x="0" y="0"/>
-            <a:ext cx="12191695" cy="6858000"/>
-          </a:xfrm>
-          <a:prstGeom prst="rect">
-            <a:avLst/>
-          </a:prstGeom>
-          <a:solidFill>
-            <a:srgbClr val="F8FAFC"/>
-          </a:solidFill>
-          <a:ln>
-            <a:noFill/>
-          </a:ln>
-        </p:spPr>
-        <p:style>
-          <a:lnRef idx="1">
-            <a:schemeClr val="accent1"/>
-          </a:lnRef>
-          <a:fillRef idx="3">
-            <a:schemeClr val="accent1"/>
-          </a:fillRef>
-          <a:effectRef idx="2">
-            <a:schemeClr val="accent1"/>
-          </a:effectRef>
-          <a:fontRef idx="minor">
-            <a:schemeClr val="lt1"/>
-          </a:fontRef>
-        </p:style>
-        <p:txBody>
-          <a:bodyPr rtlCol="0" anchor="ctr"/>
-          <a:lstStyle/>
-          <a:p>
-            <a:pPr algn="ctr"/>
-            <a:endParaRPr/>
-          </a:p>
-        </p:txBody>
-      </p:sp>
-      <p:sp>
-        <p:nvSpPr>
-          <p:cNvPr id="3" name="Rounded Rectangle 2"/>
-          <p:cNvSpPr/>
-          <p:nvPr/>
-        </p:nvSpPr>
-        <p:spPr>
-          <a:xfrm>
-            <a:off x="731520" y="365760"/>
-            <a:ext cx="3291840" cy="256032"/>
-          </a:xfrm>
-          <a:prstGeom prst="roundRect">
-            <a:avLst/>
-          </a:prstGeom>
-          <a:solidFill>
-            <a:srgbClr val="EFF6FF"/>
-          </a:solidFill>
-          <a:ln w="10160">
-            <a:solidFill>
-              <a:srgbClr val="BFDBFE"/>
-            </a:solidFill>
-          </a:ln>
-        </p:spPr>
-        <p:style>
-          <a:lnRef idx="1">
-            <a:schemeClr val="accent1"/>
-          </a:lnRef>
-          <a:fillRef idx="3">
-            <a:schemeClr val="accent1"/>
-          </a:fillRef>
-          <a:effectRef idx="2">
-            <a:schemeClr val="accent1"/>
-          </a:effectRef>
-          <a:fontRef idx="minor">
-            <a:schemeClr val="lt1"/>
-          </a:fontRef>
-        </p:style>
-        <p:txBody>
-          <a:bodyPr lIns="0" tIns="0" rIns="0" bIns="0" rtlCol="0" anchor="ctr"/>
-          <a:lstStyle/>
-          <a:p>
-            <a:pPr algn="ctr">
-              <a:defRPr sz="800" b="1">
-                <a:solidFill>
-                  <a:srgbClr val="2563EB"/>
-                </a:solidFill>
-              </a:defRPr>
-            </a:pPr>
-            <a:r>
-              <a:t>EXECUTIVE DATA ANALYTICS CASE STUDY</a:t>
-            </a:r>
-          </a:p>
-        </p:txBody>
-      </p:sp>
-      <p:sp>
-        <p:nvSpPr>
-          <p:cNvPr id="4" name="TextBox 3"/>
+              <a:rPr sz="1400" b="0">
+                <a:solidFill>
+                  <a:srgbClr val="1E293B"/>
+                </a:solidFill>
+                <a:latin typeface="Calibri"/>
+              </a:rPr>
+              <a:t>Demand is highest in these months in both years.</a:t>
+            </a:r>
+          </a:p>
+        </p:txBody>
+      </p:sp>
+      <p:sp>
+        <p:nvSpPr>
+          <p:cNvPr id="16" name="TextBox 15"/>
           <p:cNvSpPr txBox="1"/>
           <p:nvPr/>
         </p:nvSpPr>
         <p:spPr>
           <a:xfrm>
-            <a:off x="731520" y="658368"/>
-            <a:ext cx="10728655" cy="502920"/>
+            <a:off x="548640" y="6263640"/>
+            <a:ext cx="10972800" cy="365760"/>
           </a:xfrm>
           <a:prstGeom prst="rect">
             <a:avLst/>
@@ -5408,995 +5118,24 @@
           <a:noFill/>
         </p:spPr>
         <p:txBody>
-          <a:bodyPr wrap="none" lIns="0" tIns="0" rIns="0" bIns="0">
+          <a:bodyPr wrap="square">
             <a:spAutoFit/>
           </a:bodyPr>
           <a:lstStyle/>
           <a:p>
             <a:pPr>
-              <a:defRPr sz="2000" b="1">
-                <a:solidFill>
-                  <a:srgbClr val="0F172A"/>
-                </a:solidFill>
-              </a:defRPr>
-            </a:pPr>
-            <a:r>
-              <a:t>Monthly Revenue &amp; Order Volume Dynamics (2009 - 2011)</a:t>
-            </a:r>
-          </a:p>
-        </p:txBody>
-      </p:sp>
-      <p:sp>
-        <p:nvSpPr>
-          <p:cNvPr id="5" name="Rounded Rectangle 4"/>
-          <p:cNvSpPr/>
-          <p:nvPr/>
-        </p:nvSpPr>
-        <p:spPr>
-          <a:xfrm>
-            <a:off x="731520" y="1234440"/>
-            <a:ext cx="6858000" cy="5120640"/>
-          </a:xfrm>
-          <a:prstGeom prst="roundRect">
-            <a:avLst/>
-          </a:prstGeom>
-          <a:solidFill>
-            <a:srgbClr val="FFFFFF"/>
-          </a:solidFill>
-          <a:ln w="12700">
-            <a:solidFill>
-              <a:srgbClr val="E2E8F0"/>
-            </a:solidFill>
-          </a:ln>
-        </p:spPr>
-        <p:style>
-          <a:lnRef idx="1">
-            <a:schemeClr val="accent1"/>
-          </a:lnRef>
-          <a:fillRef idx="3">
-            <a:schemeClr val="accent1"/>
-          </a:fillRef>
-          <a:effectRef idx="2">
-            <a:schemeClr val="accent1"/>
-          </a:effectRef>
-          <a:fontRef idx="minor">
-            <a:schemeClr val="lt1"/>
-          </a:fontRef>
-        </p:style>
-        <p:txBody>
-          <a:bodyPr rtlCol="0" anchor="ctr"/>
-          <a:lstStyle/>
-          <a:p>
-            <a:pPr algn="ctr"/>
-            <a:endParaRPr/>
-          </a:p>
-        </p:txBody>
-      </p:sp>
-      <p:pic>
-        <p:nvPicPr>
-          <p:cNvPr id="6" name="Picture 5" descr="03_monthly_revenue_growth.png"/>
-          <p:cNvPicPr>
-            <a:picLocks noChangeAspect="1"/>
-          </p:cNvPicPr>
-          <p:nvPr/>
-        </p:nvPicPr>
-        <p:blipFill>
-          <a:blip r:embed="rId2"/>
-          <a:stretch>
-            <a:fillRect/>
-          </a:stretch>
-        </p:blipFill>
-        <p:spPr>
-          <a:xfrm>
-            <a:off x="868680" y="2022071"/>
-            <a:ext cx="6583680" cy="3391593"/>
-          </a:xfrm>
-          <a:prstGeom prst="rect">
-            <a:avLst/>
-          </a:prstGeom>
-        </p:spPr>
-      </p:pic>
-      <p:sp>
-        <p:nvSpPr>
-          <p:cNvPr id="7" name="Rounded Rectangle 6"/>
-          <p:cNvSpPr/>
-          <p:nvPr/>
-        </p:nvSpPr>
-        <p:spPr>
-          <a:xfrm>
-            <a:off x="7772400" y="1234440"/>
-            <a:ext cx="3685032" cy="1609344"/>
-          </a:xfrm>
-          <a:prstGeom prst="roundRect">
-            <a:avLst/>
-          </a:prstGeom>
-          <a:solidFill>
-            <a:srgbClr val="FFFFFF"/>
-          </a:solidFill>
-          <a:ln w="12700">
-            <a:solidFill>
-              <a:srgbClr val="E2E8F0"/>
-            </a:solidFill>
-          </a:ln>
-        </p:spPr>
-        <p:style>
-          <a:lnRef idx="1">
-            <a:schemeClr val="accent1"/>
-          </a:lnRef>
-          <a:fillRef idx="3">
-            <a:schemeClr val="accent1"/>
-          </a:fillRef>
-          <a:effectRef idx="2">
-            <a:schemeClr val="accent1"/>
-          </a:effectRef>
-          <a:fontRef idx="minor">
-            <a:schemeClr val="lt1"/>
-          </a:fontRef>
-        </p:style>
-        <p:txBody>
-          <a:bodyPr wrap="square" lIns="164592" tIns="137160" rIns="164592" bIns="91440" rtlCol="0" anchor="ctr"/>
-          <a:lstStyle/>
-          <a:p>
-            <a:pPr algn="ctr">
-              <a:spcAft>
-                <a:spcPts val="400"/>
-              </a:spcAft>
-              <a:defRPr sz="950" b="1">
-                <a:solidFill>
-                  <a:srgbClr val="2563EB"/>
-                </a:solidFill>
-              </a:defRPr>
-            </a:pPr>
-            <a:r>
-              <a:t>Q4 HOLIDAY REVENUE SURGE (&gt;£1.5M/MO)</a:t>
-            </a:r>
-          </a:p>
-          <a:p>
-            <a:pPr>
-              <a:spcBef>
-                <a:spcPts val="200"/>
-              </a:spcBef>
-              <a:defRPr sz="860">
-                <a:solidFill>
-                  <a:srgbClr val="334155"/>
-                </a:solidFill>
-              </a:defRPr>
-            </a:pPr>
-            <a:r>
-              <a:t>Consistent seasonal peaks in October-November where monthly revenue spikes +140% above Q1 levels, driven by seasonal gifting volume.</a:t>
-            </a:r>
-          </a:p>
-        </p:txBody>
-      </p:sp>
-      <p:sp>
-        <p:nvSpPr>
-          <p:cNvPr id="8" name="Rounded Rectangle 7"/>
-          <p:cNvSpPr/>
-          <p:nvPr/>
-        </p:nvSpPr>
-        <p:spPr>
-          <a:xfrm>
-            <a:off x="7772400" y="2990088"/>
-            <a:ext cx="3685032" cy="1609344"/>
-          </a:xfrm>
-          <a:prstGeom prst="roundRect">
-            <a:avLst/>
-          </a:prstGeom>
-          <a:solidFill>
-            <a:srgbClr val="FFFFFF"/>
-          </a:solidFill>
-          <a:ln w="12700">
-            <a:solidFill>
-              <a:srgbClr val="E2E8F0"/>
-            </a:solidFill>
-          </a:ln>
-        </p:spPr>
-        <p:style>
-          <a:lnRef idx="1">
-            <a:schemeClr val="accent1"/>
-          </a:lnRef>
-          <a:fillRef idx="3">
-            <a:schemeClr val="accent1"/>
-          </a:fillRef>
-          <a:effectRef idx="2">
-            <a:schemeClr val="accent1"/>
-          </a:effectRef>
-          <a:fontRef idx="minor">
-            <a:schemeClr val="lt1"/>
-          </a:fontRef>
-        </p:style>
-        <p:txBody>
-          <a:bodyPr wrap="square" lIns="164592" tIns="137160" rIns="164592" bIns="91440" rtlCol="0" anchor="ctr"/>
-          <a:lstStyle/>
-          <a:p>
-            <a:pPr algn="ctr">
-              <a:spcAft>
-                <a:spcPts val="400"/>
-              </a:spcAft>
-              <a:defRPr sz="950" b="1">
-                <a:solidFill>
-                  <a:srgbClr val="D97706"/>
-                </a:solidFill>
-              </a:defRPr>
-            </a:pPr>
-            <a:r>
-              <a:t>POST-HOLIDAY CHURN MANAGEMENT</a:t>
-            </a:r>
-          </a:p>
-          <a:p>
-            <a:pPr>
-              <a:spcBef>
-                <a:spcPts val="200"/>
-              </a:spcBef>
-              <a:defRPr sz="860">
-                <a:solidFill>
-                  <a:srgbClr val="334155"/>
-                </a:solidFill>
-              </a:defRPr>
-            </a:pPr>
-            <a:r>
-              <a:t>The huge influx of November buyers requires structured January re-engagement sequences to prevent them from becoming dormant Hibernators.</a:t>
-            </a:r>
-          </a:p>
-        </p:txBody>
-      </p:sp>
-      <p:sp>
-        <p:nvSpPr>
-          <p:cNvPr id="9" name="Rounded Rectangle 8"/>
-          <p:cNvSpPr/>
-          <p:nvPr/>
-        </p:nvSpPr>
-        <p:spPr>
-          <a:xfrm>
-            <a:off x="7772400" y="4745736"/>
-            <a:ext cx="3685032" cy="1609344"/>
-          </a:xfrm>
-          <a:prstGeom prst="roundRect">
-            <a:avLst/>
-          </a:prstGeom>
-          <a:solidFill>
-            <a:srgbClr val="FFFFFF"/>
-          </a:solidFill>
-          <a:ln w="12700">
-            <a:solidFill>
-              <a:srgbClr val="E2E8F0"/>
-            </a:solidFill>
-          </a:ln>
-        </p:spPr>
-        <p:style>
-          <a:lnRef idx="1">
-            <a:schemeClr val="accent1"/>
-          </a:lnRef>
-          <a:fillRef idx="3">
-            <a:schemeClr val="accent1"/>
-          </a:fillRef>
-          <a:effectRef idx="2">
-            <a:schemeClr val="accent1"/>
-          </a:effectRef>
-          <a:fontRef idx="minor">
-            <a:schemeClr val="lt1"/>
-          </a:fontRef>
-        </p:style>
-        <p:txBody>
-          <a:bodyPr wrap="square" lIns="164592" tIns="137160" rIns="164592" bIns="91440" rtlCol="0" anchor="ctr"/>
-          <a:lstStyle/>
-          <a:p>
-            <a:pPr algn="ctr">
-              <a:spcAft>
-                <a:spcPts val="400"/>
-              </a:spcAft>
-              <a:defRPr sz="950" b="1">
-                <a:solidFill>
-                  <a:srgbClr val="10B981"/>
-                </a:solidFill>
-              </a:defRPr>
-            </a:pPr>
-            <a:r>
-              <a:t>BASKET MONETIZATION &amp; AOV EXPANSION</a:t>
-            </a:r>
-          </a:p>
-          <a:p>
-            <a:pPr>
-              <a:spcBef>
-                <a:spcPts val="200"/>
-              </a:spcBef>
-              <a:defRPr sz="860">
-                <a:solidFill>
-                  <a:srgbClr val="334155"/>
-                </a:solidFill>
-              </a:defRPr>
-            </a:pPr>
-            <a:r>
-              <a:t>Average Order Value (AOV) reaches maximum levels during multi-item holiday purchasing. Automated bundle recommendations maximize transaction value.</a:t>
-            </a:r>
-          </a:p>
-        </p:txBody>
-      </p:sp>
-    </p:spTree>
-  </p:cSld>
-  <p:clrMapOvr>
-    <a:masterClrMapping/>
-  </p:clrMapOvr>
-</p:sld>
-</file>
-
-<file path=ppt/slides/slide6.xml><?xml version="1.0" encoding="utf-8"?>
-<p:sld xmlns:a="http://schemas.openxmlformats.org/drawingml/2006/main" xmlns:r="http://schemas.openxmlformats.org/officeDocument/2006/relationships" xmlns:p="http://schemas.openxmlformats.org/presentationml/2006/main">
-  <p:cSld>
-    <p:spTree>
-      <p:nvGrpSpPr>
-        <p:cNvPr id="1" name=""/>
-        <p:cNvGrpSpPr/>
-        <p:nvPr/>
-      </p:nvGrpSpPr>
-      <p:grpSpPr>
-        <a:xfrm>
-          <a:off x="0" y="0"/>
-          <a:ext cx="0" cy="0"/>
-          <a:chOff x="0" y="0"/>
-          <a:chExt cx="0" cy="0"/>
-        </a:xfrm>
-      </p:grpSpPr>
-      <p:sp>
-        <p:nvSpPr>
-          <p:cNvPr id="2" name="Rectangle 1"/>
-          <p:cNvSpPr/>
-          <p:nvPr/>
-        </p:nvSpPr>
-        <p:spPr>
-          <a:xfrm>
-            <a:off x="0" y="0"/>
-            <a:ext cx="12191695" cy="6858000"/>
-          </a:xfrm>
-          <a:prstGeom prst="rect">
-            <a:avLst/>
-          </a:prstGeom>
-          <a:solidFill>
-            <a:srgbClr val="F8FAFC"/>
-          </a:solidFill>
-          <a:ln>
-            <a:noFill/>
-          </a:ln>
-        </p:spPr>
-        <p:style>
-          <a:lnRef idx="1">
-            <a:schemeClr val="accent1"/>
-          </a:lnRef>
-          <a:fillRef idx="3">
-            <a:schemeClr val="accent1"/>
-          </a:fillRef>
-          <a:effectRef idx="2">
-            <a:schemeClr val="accent1"/>
-          </a:effectRef>
-          <a:fontRef idx="minor">
-            <a:schemeClr val="lt1"/>
-          </a:fontRef>
-        </p:style>
-        <p:txBody>
-          <a:bodyPr rtlCol="0" anchor="ctr"/>
-          <a:lstStyle/>
-          <a:p>
-            <a:pPr algn="ctr"/>
-            <a:endParaRPr/>
-          </a:p>
-        </p:txBody>
-      </p:sp>
-      <p:sp>
-        <p:nvSpPr>
-          <p:cNvPr id="3" name="Rounded Rectangle 2"/>
-          <p:cNvSpPr/>
-          <p:nvPr/>
-        </p:nvSpPr>
-        <p:spPr>
-          <a:xfrm>
-            <a:off x="731520" y="365760"/>
-            <a:ext cx="3291840" cy="256032"/>
-          </a:xfrm>
-          <a:prstGeom prst="roundRect">
-            <a:avLst/>
-          </a:prstGeom>
-          <a:solidFill>
-            <a:srgbClr val="EFF6FF"/>
-          </a:solidFill>
-          <a:ln w="10160">
-            <a:solidFill>
-              <a:srgbClr val="BFDBFE"/>
-            </a:solidFill>
-          </a:ln>
-        </p:spPr>
-        <p:style>
-          <a:lnRef idx="1">
-            <a:schemeClr val="accent1"/>
-          </a:lnRef>
-          <a:fillRef idx="3">
-            <a:schemeClr val="accent1"/>
-          </a:fillRef>
-          <a:effectRef idx="2">
-            <a:schemeClr val="accent1"/>
-          </a:effectRef>
-          <a:fontRef idx="minor">
-            <a:schemeClr val="lt1"/>
-          </a:fontRef>
-        </p:style>
-        <p:txBody>
-          <a:bodyPr lIns="0" tIns="0" rIns="0" bIns="0" rtlCol="0" anchor="ctr"/>
-          <a:lstStyle/>
-          <a:p>
-            <a:pPr algn="ctr">
-              <a:defRPr sz="800" b="1">
-                <a:solidFill>
-                  <a:srgbClr val="2563EB"/>
-                </a:solidFill>
-              </a:defRPr>
-            </a:pPr>
-            <a:r>
-              <a:t>EXECUTIVE DATA ANALYTICS CASE STUDY</a:t>
-            </a:r>
-          </a:p>
-        </p:txBody>
-      </p:sp>
-      <p:sp>
-        <p:nvSpPr>
-          <p:cNvPr id="4" name="TextBox 3"/>
-          <p:cNvSpPr txBox="1"/>
-          <p:nvPr/>
-        </p:nvSpPr>
-        <p:spPr>
-          <a:xfrm>
-            <a:off x="731520" y="658368"/>
-            <a:ext cx="10728655" cy="502920"/>
-          </a:xfrm>
-          <a:prstGeom prst="rect">
-            <a:avLst/>
-          </a:prstGeom>
-          <a:noFill/>
-        </p:spPr>
-        <p:txBody>
-          <a:bodyPr wrap="none" lIns="0" tIns="0" rIns="0" bIns="0">
-            <a:spAutoFit/>
-          </a:bodyPr>
-          <a:lstStyle/>
-          <a:p>
-            <a:pPr>
-              <a:defRPr sz="2000" b="1">
-                <a:solidFill>
-                  <a:srgbClr val="0F172A"/>
-                </a:solidFill>
-              </a:defRPr>
-            </a:pPr>
-            <a:r>
-              <a:t>3-Pillar Stakeholder Strategic Playbook</a:t>
-            </a:r>
-          </a:p>
-        </p:txBody>
-      </p:sp>
-      <p:sp>
-        <p:nvSpPr>
-          <p:cNvPr id="5" name="Rounded Rectangle 4"/>
-          <p:cNvSpPr/>
-          <p:nvPr/>
-        </p:nvSpPr>
-        <p:spPr>
-          <a:xfrm>
-            <a:off x="731520" y="1234440"/>
-            <a:ext cx="3456432" cy="5120640"/>
-          </a:xfrm>
-          <a:prstGeom prst="roundRect">
-            <a:avLst/>
-          </a:prstGeom>
-          <a:solidFill>
-            <a:srgbClr val="FFFFFF"/>
-          </a:solidFill>
-          <a:ln w="12700">
-            <a:solidFill>
-              <a:srgbClr val="E2E8F0"/>
-            </a:solidFill>
-          </a:ln>
-        </p:spPr>
-        <p:style>
-          <a:lnRef idx="1">
-            <a:schemeClr val="accent1"/>
-          </a:lnRef>
-          <a:fillRef idx="3">
-            <a:schemeClr val="accent1"/>
-          </a:fillRef>
-          <a:effectRef idx="2">
-            <a:schemeClr val="accent1"/>
-          </a:effectRef>
-          <a:fontRef idx="minor">
-            <a:schemeClr val="lt1"/>
-          </a:fontRef>
-        </p:style>
-        <p:txBody>
-          <a:bodyPr wrap="square" lIns="182880" tIns="182880" rIns="182880" bIns="137160" rtlCol="0" anchor="ctr"/>
-          <a:lstStyle/>
-          <a:p>
-            <a:pPr algn="ctr">
               <a:spcAft>
                 <a:spcPts val="800"/>
               </a:spcAft>
-              <a:defRPr sz="1050" b="1">
-                <a:solidFill>
-                  <a:srgbClr val="2563EB"/>
-                </a:solidFill>
-              </a:defRPr>
             </a:pPr>
             <a:r>
-              <a:t>HEAD OF MARKETING / CMO</a:t>
-            </a:r>
-          </a:p>
-          <a:p>
-            <a:pPr>
-              <a:spcBef>
-                <a:spcPts val="600"/>
-              </a:spcBef>
-              <a:defRPr sz="919" b="1">
-                <a:solidFill>
-                  <a:srgbClr val="0F172A"/>
-                </a:solidFill>
-              </a:defRPr>
-            </a:pPr>
-            <a:r>
-              <a:t>• Reallocate 20% Ad Budget</a:t>
-            </a:r>
-          </a:p>
-          <a:p>
-            <a:pPr>
-              <a:spcBef>
-                <a:spcPts val="100"/>
-              </a:spcBef>
-              <a:defRPr sz="840">
-                <a:solidFill>
-                  <a:srgbClr val="334155"/>
-                </a:solidFill>
-              </a:defRPr>
-            </a:pPr>
-            <a:r>
-              <a:t>  Shift media spend from low-intent cold search/social to automated lifecycle retention flows.</a:t>
-            </a:r>
-          </a:p>
-          <a:p>
-            <a:pPr>
-              <a:spcBef>
-                <a:spcPts val="600"/>
-              </a:spcBef>
-              <a:defRPr sz="919" b="1">
-                <a:solidFill>
-                  <a:srgbClr val="0F172A"/>
-                </a:solidFill>
-              </a:defRPr>
-            </a:pPr>
-            <a:r>
-              <a:t>• Eliminate Public Discounting</a:t>
-            </a:r>
-          </a:p>
-          <a:p>
-            <a:pPr>
-              <a:spcBef>
-                <a:spcPts val="100"/>
-              </a:spcBef>
-              <a:defRPr sz="840">
-                <a:solidFill>
-                  <a:srgbClr val="334155"/>
-                </a:solidFill>
-              </a:defRPr>
-            </a:pPr>
-            <a:r>
-              <a:t>  Stop blanket promo codes; protect product prestige and gross profit margins.</a:t>
-            </a:r>
-          </a:p>
-          <a:p>
-            <a:pPr>
-              <a:spcBef>
-                <a:spcPts val="600"/>
-              </a:spcBef>
-              <a:defRPr sz="919" b="1">
-                <a:solidFill>
-                  <a:srgbClr val="0F172A"/>
-                </a:solidFill>
-              </a:defRPr>
-            </a:pPr>
-            <a:r>
-              <a:t>• Tiered Promo Strategy</a:t>
-            </a:r>
-          </a:p>
-          <a:p>
-            <a:pPr>
-              <a:spcBef>
-                <a:spcPts val="100"/>
-              </a:spcBef>
-              <a:defRPr sz="840">
-                <a:solidFill>
-                  <a:srgbClr val="334155"/>
-                </a:solidFill>
-              </a:defRPr>
-            </a:pPr>
-            <a:r>
-              <a:t>  Provide exclusive VIP previews to Champions; reserve financial incentives strictly for At-Risk win-back.</a:t>
-            </a:r>
-          </a:p>
-          <a:p>
-            <a:pPr>
-              <a:spcBef>
-                <a:spcPts val="600"/>
-              </a:spcBef>
-              <a:defRPr sz="919" b="1">
-                <a:solidFill>
-                  <a:srgbClr val="0F172A"/>
-                </a:solidFill>
-              </a:defRPr>
-            </a:pPr>
-            <a:r>
-              <a:t>• Target CAC Reduction (-15%)</a:t>
-            </a:r>
-          </a:p>
-          <a:p>
-            <a:pPr>
-              <a:spcBef>
-                <a:spcPts val="100"/>
-              </a:spcBef>
-              <a:defRPr sz="840">
-                <a:solidFill>
-                  <a:srgbClr val="334155"/>
-                </a:solidFill>
-              </a:defRPr>
-            </a:pPr>
-            <a:r>
-              <a:t>  Lower blended acquisition costs by boosting repeat purchase contribution.</a:t>
-            </a:r>
-          </a:p>
-        </p:txBody>
-      </p:sp>
-      <p:sp>
-        <p:nvSpPr>
-          <p:cNvPr id="6" name="Rounded Rectangle 5"/>
-          <p:cNvSpPr/>
-          <p:nvPr/>
-        </p:nvSpPr>
-        <p:spPr>
-          <a:xfrm>
-            <a:off x="4361688" y="1234440"/>
-            <a:ext cx="3456432" cy="5120640"/>
-          </a:xfrm>
-          <a:prstGeom prst="roundRect">
-            <a:avLst/>
-          </a:prstGeom>
-          <a:solidFill>
-            <a:srgbClr val="FFFFFF"/>
-          </a:solidFill>
-          <a:ln w="12700">
-            <a:solidFill>
-              <a:srgbClr val="E2E8F0"/>
-            </a:solidFill>
-          </a:ln>
-        </p:spPr>
-        <p:style>
-          <a:lnRef idx="1">
-            <a:schemeClr val="accent1"/>
-          </a:lnRef>
-          <a:fillRef idx="3">
-            <a:schemeClr val="accent1"/>
-          </a:fillRef>
-          <a:effectRef idx="2">
-            <a:schemeClr val="accent1"/>
-          </a:effectRef>
-          <a:fontRef idx="minor">
-            <a:schemeClr val="lt1"/>
-          </a:fontRef>
-        </p:style>
-        <p:txBody>
-          <a:bodyPr wrap="square" lIns="182880" tIns="182880" rIns="182880" bIns="137160" rtlCol="0" anchor="ctr"/>
-          <a:lstStyle/>
-          <a:p>
-            <a:pPr algn="ctr">
-              <a:spcAft>
-                <a:spcPts val="800"/>
-              </a:spcAft>
-              <a:defRPr sz="1050" b="1">
-                <a:solidFill>
-                  <a:srgbClr val="D97706"/>
-                </a:solidFill>
-              </a:defRPr>
-            </a:pPr>
-            <a:r>
-              <a:t>CRM &amp; RETENTION LEAD</a:t>
-            </a:r>
-          </a:p>
-          <a:p>
-            <a:pPr>
-              <a:spcBef>
-                <a:spcPts val="600"/>
-              </a:spcBef>
-              <a:defRPr sz="919" b="1">
-                <a:solidFill>
-                  <a:srgbClr val="0F172A"/>
-                </a:solidFill>
-              </a:defRPr>
-            </a:pPr>
-            <a:r>
-              <a:t>• 14-Day Post-Purchase Trigger</a:t>
-            </a:r>
-          </a:p>
-          <a:p>
-            <a:pPr>
-              <a:spcBef>
-                <a:spcPts val="100"/>
-              </a:spcBef>
-              <a:defRPr sz="840">
-                <a:solidFill>
-                  <a:srgbClr val="334155"/>
-                </a:solidFill>
-              </a:defRPr>
-            </a:pPr>
-            <a:r>
-              <a:t>  Deploy automated onboarding emails offering cross-category complements based on 1st order SKU.</a:t>
-            </a:r>
-          </a:p>
-          <a:p>
-            <a:pPr>
-              <a:spcBef>
-                <a:spcPts val="600"/>
-              </a:spcBef>
-              <a:defRPr sz="919" b="1">
-                <a:solidFill>
-                  <a:srgbClr val="0F172A"/>
-                </a:solidFill>
-              </a:defRPr>
-            </a:pPr>
-            <a:r>
-              <a:t>• 60-Day Inactivity Warning</a:t>
-            </a:r>
-          </a:p>
-          <a:p>
-            <a:pPr>
-              <a:spcBef>
-                <a:spcPts val="100"/>
-              </a:spcBef>
-              <a:defRPr sz="840">
-                <a:solidFill>
-                  <a:srgbClr val="334155"/>
-                </a:solidFill>
-              </a:defRPr>
-            </a:pPr>
-            <a:r>
-              <a:t>  Trigger automated high-urgency win-back sequence before customer recency exceeds 180 days.</a:t>
-            </a:r>
-          </a:p>
-          <a:p>
-            <a:pPr>
-              <a:spcBef>
-                <a:spcPts val="600"/>
-              </a:spcBef>
-              <a:defRPr sz="919" b="1">
-                <a:solidFill>
-                  <a:srgbClr val="0F172A"/>
-                </a:solidFill>
-              </a:defRPr>
-            </a:pPr>
-            <a:r>
-              <a:t>• Multi-Channel Orchestration</a:t>
-            </a:r>
-          </a:p>
-          <a:p>
-            <a:pPr>
-              <a:spcBef>
-                <a:spcPts val="100"/>
-              </a:spcBef>
-              <a:defRPr sz="840">
-                <a:solidFill>
-                  <a:srgbClr val="334155"/>
-                </a:solidFill>
-              </a:defRPr>
-            </a:pPr>
-            <a:r>
-              <a:t>  Deliver high-touch SMS/WhatsApp for urgent At-Risk accounts and weekly curated digests for Loyalists.</a:t>
-            </a:r>
-          </a:p>
-          <a:p>
-            <a:pPr>
-              <a:spcBef>
-                <a:spcPts val="600"/>
-              </a:spcBef>
-              <a:defRPr sz="919" b="1">
-                <a:solidFill>
-                  <a:srgbClr val="0F172A"/>
-                </a:solidFill>
-              </a:defRPr>
-            </a:pPr>
-            <a:r>
-              <a:t>• Dynamic RFM Scoring</a:t>
-            </a:r>
-          </a:p>
-          <a:p>
-            <a:pPr>
-              <a:spcBef>
-                <a:spcPts val="100"/>
-              </a:spcBef>
-              <a:defRPr sz="840">
-                <a:solidFill>
-                  <a:srgbClr val="334155"/>
-                </a:solidFill>
-              </a:defRPr>
-            </a:pPr>
-            <a:r>
-              <a:t>  Recalculate customer segments weekly to detect segment transitions in real time.</a:t>
-            </a:r>
-          </a:p>
-        </p:txBody>
-      </p:sp>
-      <p:sp>
-        <p:nvSpPr>
-          <p:cNvPr id="7" name="Rounded Rectangle 6"/>
-          <p:cNvSpPr/>
-          <p:nvPr/>
-        </p:nvSpPr>
-        <p:spPr>
-          <a:xfrm>
-            <a:off x="7991856" y="1234440"/>
-            <a:ext cx="3456432" cy="5120640"/>
-          </a:xfrm>
-          <a:prstGeom prst="roundRect">
-            <a:avLst/>
-          </a:prstGeom>
-          <a:solidFill>
-            <a:srgbClr val="FFFFFF"/>
-          </a:solidFill>
-          <a:ln w="12700">
-            <a:solidFill>
-              <a:srgbClr val="E2E8F0"/>
-            </a:solidFill>
-          </a:ln>
-        </p:spPr>
-        <p:style>
-          <a:lnRef idx="1">
-            <a:schemeClr val="accent1"/>
-          </a:lnRef>
-          <a:fillRef idx="3">
-            <a:schemeClr val="accent1"/>
-          </a:fillRef>
-          <a:effectRef idx="2">
-            <a:schemeClr val="accent1"/>
-          </a:effectRef>
-          <a:fontRef idx="minor">
-            <a:schemeClr val="lt1"/>
-          </a:fontRef>
-        </p:style>
-        <p:txBody>
-          <a:bodyPr wrap="square" lIns="182880" tIns="182880" rIns="182880" bIns="137160" rtlCol="0" anchor="ctr"/>
-          <a:lstStyle/>
-          <a:p>
-            <a:pPr algn="ctr">
-              <a:spcAft>
-                <a:spcPts val="800"/>
-              </a:spcAft>
-              <a:defRPr sz="1050" b="1">
-                <a:solidFill>
-                  <a:srgbClr val="10B981"/>
-                </a:solidFill>
-              </a:defRPr>
-            </a:pPr>
-            <a:r>
-              <a:t>PRODUCT &amp; GROWTH MANAGER</a:t>
-            </a:r>
-          </a:p>
-          <a:p>
-            <a:pPr>
-              <a:spcBef>
-                <a:spcPts val="600"/>
-              </a:spcBef>
-              <a:defRPr sz="919" b="1">
-                <a:solidFill>
-                  <a:srgbClr val="0F172A"/>
-                </a:solidFill>
-              </a:defRPr>
-            </a:pPr>
-            <a:r>
-              <a:t>• Tiered Loyalty Program</a:t>
-            </a:r>
-          </a:p>
-          <a:p>
-            <a:pPr>
-              <a:spcBef>
-                <a:spcPts val="100"/>
-              </a:spcBef>
-              <a:defRPr sz="840">
-                <a:solidFill>
-                  <a:srgbClr val="334155"/>
-                </a:solidFill>
-              </a:defRPr>
-            </a:pPr>
-            <a:r>
-              <a:t>  Implement Bronze, Silver, Gold, Platinum tiers with tangible milestone rewards on 3rd &amp; 5th orders.</a:t>
-            </a:r>
-          </a:p>
-          <a:p>
-            <a:pPr>
-              <a:spcBef>
-                <a:spcPts val="600"/>
-              </a:spcBef>
-              <a:defRPr sz="919" b="1">
-                <a:solidFill>
-                  <a:srgbClr val="0F172A"/>
-                </a:solidFill>
-              </a:defRPr>
-            </a:pPr>
-            <a:r>
-              <a:t>• 1-Click Frictionless Reorder</a:t>
-            </a:r>
-          </a:p>
-          <a:p>
-            <a:pPr>
-              <a:spcBef>
-                <a:spcPts val="100"/>
-              </a:spcBef>
-              <a:defRPr sz="840">
-                <a:solidFill>
-                  <a:srgbClr val="334155"/>
-                </a:solidFill>
-              </a:defRPr>
-            </a:pPr>
-            <a:r>
-              <a:t>  Add instant reorder buttons on order history pages for high-frequency consumable items.</a:t>
-            </a:r>
-          </a:p>
-          <a:p>
-            <a:pPr>
-              <a:spcBef>
-                <a:spcPts val="600"/>
-              </a:spcBef>
-              <a:defRPr sz="919" b="1">
-                <a:solidFill>
-                  <a:srgbClr val="0F172A"/>
-                </a:solidFill>
-              </a:defRPr>
-            </a:pPr>
-            <a:r>
-              <a:t>• Tableau Retention Tracking</a:t>
-            </a:r>
-          </a:p>
-          <a:p>
-            <a:pPr>
-              <a:spcBef>
-                <a:spcPts val="100"/>
-              </a:spcBef>
-              <a:defRPr sz="840">
-                <a:solidFill>
-                  <a:srgbClr val="334155"/>
-                </a:solidFill>
-              </a:defRPr>
-            </a:pPr>
-            <a:r>
-              <a:t>  Connect Tableau dashboards via automated TDS / ODBC connection for live weekly cohort monitoring.</a:t>
-            </a:r>
-          </a:p>
-          <a:p>
-            <a:pPr>
-              <a:spcBef>
-                <a:spcPts val="600"/>
-              </a:spcBef>
-              <a:defRPr sz="919" b="1">
-                <a:solidFill>
-                  <a:srgbClr val="0F172A"/>
-                </a:solidFill>
-              </a:defRPr>
-            </a:pPr>
-            <a:r>
-              <a:t>• Cross-Sell Recommendation Engine</a:t>
-            </a:r>
-          </a:p>
-          <a:p>
-            <a:pPr>
-              <a:spcBef>
-                <a:spcPts val="100"/>
-              </a:spcBef>
-              <a:defRPr sz="840">
-                <a:solidFill>
-                  <a:srgbClr val="334155"/>
-                </a:solidFill>
-              </a:defRPr>
-            </a:pPr>
-            <a:r>
-              <a:t>  Deploy intelligent recommendation widgets during checkout based on product affinity rules.</a:t>
+              <a:rPr sz="1200" b="0">
+                <a:solidFill>
+                  <a:srgbClr val="64748B"/>
+                </a:solidFill>
+                <a:latin typeface="Calibri"/>
+              </a:rPr>
+              <a:t>Directional only: the data has no marketing cost, channel or margin information.</a:t>
             </a:r>
           </a:p>
         </p:txBody>
@@ -6410,7 +5149,7 @@
 </file>
 
 <file path=ppt/slides/slide7.xml><?xml version="1.0" encoding="utf-8"?>
-<p:sld xmlns:a="http://schemas.openxmlformats.org/drawingml/2006/main" xmlns:r="http://schemas.openxmlformats.org/officeDocument/2006/relationships" xmlns:p="http://schemas.openxmlformats.org/presentationml/2006/main">
+<p:sld xmlns:a="http://schemas.openxmlformats.org/drawingml/2006/main" xmlns:p="http://schemas.openxmlformats.org/presentationml/2006/main" xmlns:r="http://schemas.openxmlformats.org/officeDocument/2006/relationships">
   <p:cSld>
     <p:spTree>
       <p:nvGrpSpPr>
@@ -6418,122 +5157,17 @@
         <p:cNvGrpSpPr/>
         <p:nvPr/>
       </p:nvGrpSpPr>
-      <p:grpSpPr>
-        <a:xfrm>
-          <a:off x="0" y="0"/>
-          <a:ext cx="0" cy="0"/>
-          <a:chOff x="0" y="0"/>
-          <a:chExt cx="0" cy="0"/>
-        </a:xfrm>
-      </p:grpSpPr>
-      <p:sp>
-        <p:nvSpPr>
-          <p:cNvPr id="2" name="Rectangle 1"/>
-          <p:cNvSpPr/>
-          <p:nvPr/>
-        </p:nvSpPr>
-        <p:spPr>
-          <a:xfrm>
-            <a:off x="0" y="0"/>
-            <a:ext cx="12191695" cy="6858000"/>
-          </a:xfrm>
-          <a:prstGeom prst="rect">
-            <a:avLst/>
-          </a:prstGeom>
-          <a:solidFill>
-            <a:srgbClr val="F8FAFC"/>
-          </a:solidFill>
-          <a:ln>
-            <a:noFill/>
-          </a:ln>
-        </p:spPr>
-        <p:style>
-          <a:lnRef idx="1">
-            <a:schemeClr val="accent1"/>
-          </a:lnRef>
-          <a:fillRef idx="3">
-            <a:schemeClr val="accent1"/>
-          </a:fillRef>
-          <a:effectRef idx="2">
-            <a:schemeClr val="accent1"/>
-          </a:effectRef>
-          <a:fontRef idx="minor">
-            <a:schemeClr val="lt1"/>
-          </a:fontRef>
-        </p:style>
-        <p:txBody>
-          <a:bodyPr rtlCol="0" anchor="ctr"/>
-          <a:lstStyle/>
-          <a:p>
-            <a:pPr algn="ctr"/>
-            <a:endParaRPr/>
-          </a:p>
-        </p:txBody>
-      </p:sp>
-      <p:sp>
-        <p:nvSpPr>
-          <p:cNvPr id="3" name="Rounded Rectangle 2"/>
-          <p:cNvSpPr/>
-          <p:nvPr/>
-        </p:nvSpPr>
-        <p:spPr>
-          <a:xfrm>
-            <a:off x="731520" y="365760"/>
-            <a:ext cx="3291840" cy="256032"/>
-          </a:xfrm>
-          <a:prstGeom prst="roundRect">
-            <a:avLst/>
-          </a:prstGeom>
-          <a:solidFill>
-            <a:srgbClr val="EFF6FF"/>
-          </a:solidFill>
-          <a:ln w="10160">
-            <a:solidFill>
-              <a:srgbClr val="BFDBFE"/>
-            </a:solidFill>
-          </a:ln>
-        </p:spPr>
-        <p:style>
-          <a:lnRef idx="1">
-            <a:schemeClr val="accent1"/>
-          </a:lnRef>
-          <a:fillRef idx="3">
-            <a:schemeClr val="accent1"/>
-          </a:fillRef>
-          <a:effectRef idx="2">
-            <a:schemeClr val="accent1"/>
-          </a:effectRef>
-          <a:fontRef idx="minor">
-            <a:schemeClr val="lt1"/>
-          </a:fontRef>
-        </p:style>
-        <p:txBody>
-          <a:bodyPr lIns="0" tIns="0" rIns="0" bIns="0" rtlCol="0" anchor="ctr"/>
-          <a:lstStyle/>
-          <a:p>
-            <a:pPr algn="ctr">
-              <a:defRPr sz="800" b="1">
-                <a:solidFill>
-                  <a:srgbClr val="2563EB"/>
-                </a:solidFill>
-              </a:defRPr>
-            </a:pPr>
-            <a:r>
-              <a:t>EXECUTIVE DATA ANALYTICS CASE STUDY</a:t>
-            </a:r>
-          </a:p>
-        </p:txBody>
-      </p:sp>
-      <p:sp>
-        <p:nvSpPr>
-          <p:cNvPr id="4" name="TextBox 3"/>
+      <p:grpSpPr/>
+      <p:sp>
+        <p:nvSpPr>
+          <p:cNvPr id="2" name="TextBox 1"/>
           <p:cNvSpPr txBox="1"/>
           <p:nvPr/>
         </p:nvSpPr>
         <p:spPr>
           <a:xfrm>
-            <a:off x="731520" y="658368"/>
-            <a:ext cx="10728655" cy="502920"/>
+            <a:off x="548640" y="320040"/>
+            <a:ext cx="10972800" cy="365760"/>
           </a:xfrm>
           <a:prstGeom prst="rect">
             <a:avLst/>
@@ -6541,428 +5175,289 @@
           <a:noFill/>
         </p:spPr>
         <p:txBody>
-          <a:bodyPr wrap="none" lIns="0" tIns="0" rIns="0" bIns="0">
+          <a:bodyPr wrap="square">
             <a:spAutoFit/>
           </a:bodyPr>
           <a:lstStyle/>
           <a:p>
             <a:pPr>
-              <a:defRPr sz="2000" b="1">
-                <a:solidFill>
-                  <a:srgbClr val="0F172A"/>
-                </a:solidFill>
-              </a:defRPr>
+              <a:spcAft>
+                <a:spcPts val="800"/>
+              </a:spcAft>
             </a:pPr>
             <a:r>
-              <a:t>Technical Architecture &amp; Automated Data Infrastructure</a:t>
-            </a:r>
-          </a:p>
-        </p:txBody>
-      </p:sp>
-      <p:sp>
-        <p:nvSpPr>
-          <p:cNvPr id="5" name="Rounded Rectangle 4"/>
-          <p:cNvSpPr/>
+              <a:rPr sz="1100" b="1">
+                <a:solidFill>
+                  <a:srgbClr val="1D4ED8"/>
+                </a:solidFill>
+                <a:latin typeface="Calibri"/>
+              </a:rPr>
+              <a:t>HOW TO READ THESE RESULTS</a:t>
+            </a:r>
+          </a:p>
+        </p:txBody>
+      </p:sp>
+      <p:sp>
+        <p:nvSpPr>
+          <p:cNvPr id="3" name="TextBox 2"/>
+          <p:cNvSpPr txBox="1"/>
           <p:nvPr/>
         </p:nvSpPr>
         <p:spPr>
           <a:xfrm>
-            <a:off x="731520" y="1234440"/>
-            <a:ext cx="2542032" cy="5120640"/>
-          </a:xfrm>
-          <a:prstGeom prst="roundRect">
+            <a:off x="548640" y="640080"/>
+            <a:ext cx="11064240" cy="731520"/>
+          </a:xfrm>
+          <a:prstGeom prst="rect">
             <a:avLst/>
           </a:prstGeom>
-          <a:solidFill>
-            <a:srgbClr val="FFFFFF"/>
-          </a:solidFill>
-          <a:ln w="12700">
-            <a:solidFill>
-              <a:srgbClr val="E2E8F0"/>
-            </a:solidFill>
-          </a:ln>
-        </p:spPr>
-        <p:style>
-          <a:lnRef idx="1">
-            <a:schemeClr val="accent1"/>
-          </a:lnRef>
-          <a:fillRef idx="3">
-            <a:schemeClr val="accent1"/>
-          </a:fillRef>
-          <a:effectRef idx="2">
-            <a:schemeClr val="accent1"/>
-          </a:effectRef>
-          <a:fontRef idx="minor">
-            <a:schemeClr val="lt1"/>
-          </a:fontRef>
-        </p:style>
-        <p:txBody>
-          <a:bodyPr wrap="square" lIns="164592" tIns="182880" rIns="164592" bIns="137160" rtlCol="0" anchor="ctr"/>
-          <a:lstStyle/>
-          <a:p>
-            <a:pPr algn="ctr">
+          <a:noFill/>
+        </p:spPr>
+        <p:txBody>
+          <a:bodyPr wrap="square">
+            <a:spAutoFit/>
+          </a:bodyPr>
+          <a:lstStyle/>
+          <a:p>
+            <a:pPr>
               <a:spcAft>
-                <a:spcPts val="1000"/>
+                <a:spcPts val="800"/>
               </a:spcAft>
-              <a:defRPr sz="950" b="1">
-                <a:solidFill>
-                  <a:srgbClr val="2563EB"/>
-                </a:solidFill>
-              </a:defRPr>
             </a:pPr>
             <a:r>
-              <a:t>1. DATA EXTRACTION &amp; CLEANING</a:t>
-            </a:r>
-          </a:p>
-          <a:p>
-            <a:pPr>
-              <a:spcBef>
-                <a:spcPts val="800"/>
-              </a:spcBef>
-              <a:defRPr sz="860">
-                <a:solidFill>
-                  <a:srgbClr val="334155"/>
-                </a:solidFill>
-              </a:defRPr>
-            </a:pPr>
-            <a:r>
-              <a:t>• Processed 1.06M raw Excel transactions across 2 historical sheets.</a:t>
-            </a:r>
-          </a:p>
-          <a:p>
-            <a:pPr>
-              <a:spcBef>
-                <a:spcPts val="800"/>
-              </a:spcBef>
-              <a:defRPr sz="860">
-                <a:solidFill>
-                  <a:srgbClr val="334155"/>
-                </a:solidFill>
-              </a:defRPr>
-            </a:pPr>
-            <a:r>
-              <a:t>• Filtered cancellations ('C'), negative quantities, and zero unit prices.</a:t>
-            </a:r>
-          </a:p>
-          <a:p>
-            <a:pPr>
-              <a:spcBef>
-                <a:spcPts val="800"/>
-              </a:spcBef>
-              <a:defRPr sz="860">
-                <a:solidFill>
-                  <a:srgbClr val="334155"/>
-                </a:solidFill>
-              </a:defRPr>
-            </a:pPr>
-            <a:r>
-              <a:t>• Resulted in 805,549 verified line items with £17.74M revenue.</a:t>
-            </a:r>
-          </a:p>
-        </p:txBody>
-      </p:sp>
-      <p:sp>
-        <p:nvSpPr>
-          <p:cNvPr id="6" name="Rounded Rectangle 5"/>
-          <p:cNvSpPr/>
+              <a:rPr sz="2800" b="1">
+                <a:solidFill>
+                  <a:srgbClr val="0F172A"/>
+                </a:solidFill>
+                <a:latin typeface="Calibri"/>
+              </a:rPr>
+              <a:t>Method and limitations</a:t>
+            </a:r>
+          </a:p>
+        </p:txBody>
+      </p:sp>
+      <p:sp>
+        <p:nvSpPr>
+          <p:cNvPr id="4" name="TextBox 3"/>
+          <p:cNvSpPr txBox="1"/>
           <p:nvPr/>
         </p:nvSpPr>
         <p:spPr>
           <a:xfrm>
-            <a:off x="3456432" y="1234440"/>
-            <a:ext cx="2542032" cy="5120640"/>
-          </a:xfrm>
-          <a:prstGeom prst="roundRect">
+            <a:off x="548640" y="1554480"/>
+            <a:ext cx="5394960" cy="4846320"/>
+          </a:xfrm>
+          <a:prstGeom prst="rect">
             <a:avLst/>
           </a:prstGeom>
-          <a:solidFill>
-            <a:srgbClr val="FFFFFF"/>
-          </a:solidFill>
-          <a:ln w="12700">
-            <a:solidFill>
-              <a:srgbClr val="E2E8F0"/>
-            </a:solidFill>
-          </a:ln>
-        </p:spPr>
-        <p:style>
-          <a:lnRef idx="1">
-            <a:schemeClr val="accent1"/>
-          </a:lnRef>
-          <a:fillRef idx="3">
-            <a:schemeClr val="accent1"/>
-          </a:fillRef>
-          <a:effectRef idx="2">
-            <a:schemeClr val="accent1"/>
-          </a:effectRef>
-          <a:fontRef idx="minor">
-            <a:schemeClr val="lt1"/>
-          </a:fontRef>
-        </p:style>
-        <p:txBody>
-          <a:bodyPr wrap="square" lIns="164592" tIns="182880" rIns="164592" bIns="137160" rtlCol="0" anchor="ctr"/>
-          <a:lstStyle/>
-          <a:p>
-            <a:pPr algn="ctr">
+          <a:noFill/>
+        </p:spPr>
+        <p:txBody>
+          <a:bodyPr wrap="square">
+            <a:spAutoFit/>
+          </a:bodyPr>
+          <a:lstStyle/>
+          <a:p>
+            <a:pPr>
               <a:spcAft>
-                <a:spcPts val="1000"/>
+                <a:spcPts val="800"/>
               </a:spcAft>
-              <a:defRPr sz="950" b="1">
-                <a:solidFill>
-                  <a:srgbClr val="0F172A"/>
-                </a:solidFill>
-              </a:defRPr>
             </a:pPr>
             <a:r>
-              <a:t>2. SQL &amp; ANALYTICAL MODELING</a:t>
+              <a:rPr sz="1400" b="1">
+                <a:solidFill>
+                  <a:srgbClr val="1E293B"/>
+                </a:solidFill>
+                <a:latin typeface="Calibri"/>
+              </a:rPr>
+              <a:t>Data. </a:t>
+            </a:r>
+            <a:r>
+              <a:rPr sz="1400" b="0">
+                <a:solidFill>
+                  <a:srgbClr val="1E293B"/>
+                </a:solidFill>
+                <a:latin typeface="Calibri"/>
+              </a:rPr>
+              <a:t>1,067,371 raw rows reduced to 805,549 after removing rows without a customer ID, cancelled invoices and non-positive quantities or prices.</a:t>
             </a:r>
           </a:p>
           <a:p>
             <a:pPr>
-              <a:spcBef>
+              <a:spcAft>
                 <a:spcPts val="800"/>
-              </a:spcBef>
-              <a:defRPr sz="860">
-                <a:solidFill>
-                  <a:srgbClr val="334155"/>
-                </a:solidFill>
-              </a:defRPr>
+              </a:spcAft>
             </a:pPr>
             <a:r>
-              <a:t>• Built SQLite schema (`online_retail_analytics.db`).</a:t>
+              <a:rPr sz="1400" b="1">
+                <a:solidFill>
+                  <a:srgbClr val="1E293B"/>
+                </a:solidFill>
+                <a:latin typeface="Calibri"/>
+              </a:rPr>
+              <a:t>Cohorts. </a:t>
+            </a:r>
+            <a:r>
+              <a:rPr sz="1400" b="0">
+                <a:solidFill>
+                  <a:srgbClr val="1E293B"/>
+                </a:solidFill>
+                <a:latin typeface="Calibri"/>
+              </a:rPr>
+              <a:t>Customers grouped by first-order month; retention is the share ordering again in each later month.</a:t>
             </a:r>
           </a:p>
           <a:p>
             <a:pPr>
-              <a:spcBef>
+              <a:spcAft>
                 <a:spcPts val="800"/>
-              </a:spcBef>
-              <a:defRPr sz="860">
-                <a:solidFill>
-                  <a:srgbClr val="334155"/>
-                </a:solidFill>
-              </a:defRPr>
+              </a:spcAft>
             </a:pPr>
             <a:r>
-              <a:t>• Engineered RFM scores (`NTILE(5)`) and Cohort Index offsets.</a:t>
+              <a:rPr sz="1400" b="1">
+                <a:solidFill>
+                  <a:srgbClr val="1E293B"/>
+                </a:solidFill>
+                <a:latin typeface="Calibri"/>
+              </a:rPr>
+              <a:t>RFM. </a:t>
+            </a:r>
+            <a:r>
+              <a:rPr sz="1400" b="0">
+                <a:solidFill>
+                  <a:srgbClr val="1E293B"/>
+                </a:solidFill>
+                <a:latin typeface="Calibri"/>
+              </a:rPr>
+              <a:t>Recency, frequency and monetary value scored 1 to 5 by quintile, reference date 10 December 2011.</a:t>
             </a:r>
           </a:p>
           <a:p>
             <a:pPr>
-              <a:spcBef>
+              <a:spcAft>
                 <a:spcPts val="800"/>
-              </a:spcBef>
-              <a:defRPr sz="860">
-                <a:solidFill>
-                  <a:srgbClr val="334155"/>
-                </a:solidFill>
-              </a:defRPr>
+              </a:spcAft>
             </a:pPr>
             <a:r>
-              <a:t>• Created indexed views: `v_rfm_summary`, `v_monthly_sales_trend`.</a:t>
-            </a:r>
-          </a:p>
-        </p:txBody>
-      </p:sp>
-      <p:sp>
-        <p:nvSpPr>
-          <p:cNvPr id="7" name="Rounded Rectangle 6"/>
-          <p:cNvSpPr/>
+              <a:rPr sz="1400" b="1">
+                <a:solidFill>
+                  <a:srgbClr val="1E293B"/>
+                </a:solidFill>
+                <a:latin typeface="Calibri"/>
+              </a:rPr>
+              <a:t>Tools. </a:t>
+            </a:r>
+            <a:r>
+              <a:rPr sz="1400" b="0">
+                <a:solidFill>
+                  <a:srgbClr val="1E293B"/>
+                </a:solidFill>
+                <a:latin typeface="Calibri"/>
+              </a:rPr>
+              <a:t>Python (pandas) for cleaning and scoring, SQLite for the SQL views, Tableau and matplotlib for charts.</a:t>
+            </a:r>
+          </a:p>
+        </p:txBody>
+      </p:sp>
+      <p:sp>
+        <p:nvSpPr>
+          <p:cNvPr id="5" name="TextBox 4"/>
+          <p:cNvSpPr txBox="1"/>
           <p:nvPr/>
         </p:nvSpPr>
         <p:spPr>
           <a:xfrm>
-            <a:off x="6181344" y="1234440"/>
-            <a:ext cx="2542032" cy="5120640"/>
-          </a:xfrm>
-          <a:prstGeom prst="roundRect">
+            <a:off x="6309360" y="1554480"/>
+            <a:ext cx="5394960" cy="4846320"/>
+          </a:xfrm>
+          <a:prstGeom prst="rect">
             <a:avLst/>
           </a:prstGeom>
-          <a:solidFill>
-            <a:srgbClr val="FFFFFF"/>
-          </a:solidFill>
-          <a:ln w="12700">
-            <a:solidFill>
-              <a:srgbClr val="E2E8F0"/>
-            </a:solidFill>
-          </a:ln>
-        </p:spPr>
-        <p:style>
-          <a:lnRef idx="1">
-            <a:schemeClr val="accent1"/>
-          </a:lnRef>
-          <a:fillRef idx="3">
-            <a:schemeClr val="accent1"/>
-          </a:fillRef>
-          <a:effectRef idx="2">
-            <a:schemeClr val="accent1"/>
-          </a:effectRef>
-          <a:fontRef idx="minor">
-            <a:schemeClr val="lt1"/>
-          </a:fontRef>
-        </p:style>
-        <p:txBody>
-          <a:bodyPr wrap="square" lIns="164592" tIns="182880" rIns="164592" bIns="137160" rtlCol="0" anchor="ctr"/>
-          <a:lstStyle/>
-          <a:p>
-            <a:pPr algn="ctr">
+          <a:noFill/>
+        </p:spPr>
+        <p:txBody>
+          <a:bodyPr wrap="square">
+            <a:spAutoFit/>
+          </a:bodyPr>
+          <a:lstStyle/>
+          <a:p>
+            <a:pPr>
               <a:spcAft>
-                <a:spcPts val="1000"/>
+                <a:spcPts val="800"/>
               </a:spcAft>
-              <a:defRPr sz="950" b="1">
-                <a:solidFill>
-                  <a:srgbClr val="10B981"/>
-                </a:solidFill>
-              </a:defRPr>
             </a:pPr>
             <a:r>
-              <a:t>3. TABLEAU ODBC AUTOMATION</a:t>
+              <a:rPr sz="1400" b="0">
+                <a:solidFill>
+                  <a:srgbClr val="1E293B"/>
+                </a:solidFill>
+                <a:latin typeface="Calibri"/>
+              </a:rPr>
+              <a:t>The dataset has no marketing cost, acquisition channel or margin data, so recommendations cannot be costed. The 25% CAC increase comes from the project brief, not from the data.</a:t>
             </a:r>
           </a:p>
           <a:p>
             <a:pPr>
-              <a:spcBef>
+              <a:spcAft>
                 <a:spcPts val="800"/>
-              </a:spcBef>
-              <a:defRPr sz="860">
-                <a:solidFill>
-                  <a:srgbClr val="334155"/>
-                </a:solidFill>
-              </a:defRPr>
+              </a:spcAft>
             </a:pPr>
             <a:r>
-              <a:t>• Configured macOS ODBC DSN (`Portfolio_DB`).</a:t>
+              <a:rPr sz="1400" b="0">
+                <a:solidFill>
+                  <a:srgbClr val="1E293B"/>
+                </a:solidFill>
+                <a:latin typeface="Calibri"/>
+              </a:rPr>
+              <a:t>Rows without a customer ID (about a quarter of the raw data) are excluded; revenue covers identified customers only.</a:t>
             </a:r>
           </a:p>
           <a:p>
             <a:pPr>
-              <a:spcBef>
+              <a:spcAft>
                 <a:spcPts val="800"/>
-              </a:spcBef>
-              <a:defRPr sz="860">
-                <a:solidFill>
-                  <a:srgbClr val="334155"/>
-                </a:solidFill>
-              </a:defRPr>
+              </a:spcAft>
             </a:pPr>
             <a:r>
-              <a:t>• Generated Tableau Data Source (`.tds`) XML for 1-click live connection.</a:t>
+              <a:rPr sz="1400" b="0">
+                <a:solidFill>
+                  <a:srgbClr val="1E293B"/>
+                </a:solidFill>
+                <a:latin typeface="Calibri"/>
+              </a:rPr>
+              <a:t>The December 2009 cohort retains much better than the rest (35% in month 1) because the data starts that month, so it includes customers who were already buying before.</a:t>
             </a:r>
           </a:p>
           <a:p>
             <a:pPr>
-              <a:spcBef>
+              <a:spcAft>
                 <a:spcPts val="800"/>
-              </a:spcBef>
-              <a:defRPr sz="860">
-                <a:solidFill>
-                  <a:srgbClr val="334155"/>
-                </a:solidFill>
-              </a:defRPr>
+              </a:spcAft>
             </a:pPr>
             <a:r>
-              <a:t>• Instantly launched Tableau Desktop for visual exploration.</a:t>
-            </a:r>
-          </a:p>
-        </p:txBody>
-      </p:sp>
-      <p:sp>
-        <p:nvSpPr>
-          <p:cNvPr id="8" name="Rounded Rectangle 7"/>
-          <p:cNvSpPr/>
-          <p:nvPr/>
-        </p:nvSpPr>
-        <p:spPr>
-          <a:xfrm>
-            <a:off x="8906256" y="1234440"/>
-            <a:ext cx="2542032" cy="5120640"/>
-          </a:xfrm>
-          <a:prstGeom prst="roundRect">
-            <a:avLst/>
-          </a:prstGeom>
-          <a:solidFill>
-            <a:srgbClr val="FFFFFF"/>
-          </a:solidFill>
-          <a:ln w="12700">
-            <a:solidFill>
-              <a:srgbClr val="E2E8F0"/>
-            </a:solidFill>
-          </a:ln>
-        </p:spPr>
-        <p:style>
-          <a:lnRef idx="1">
-            <a:schemeClr val="accent1"/>
-          </a:lnRef>
-          <a:fillRef idx="3">
-            <a:schemeClr val="accent1"/>
-          </a:fillRef>
-          <a:effectRef idx="2">
-            <a:schemeClr val="accent1"/>
-          </a:effectRef>
-          <a:fontRef idx="minor">
-            <a:schemeClr val="lt1"/>
-          </a:fontRef>
-        </p:style>
-        <p:txBody>
-          <a:bodyPr wrap="square" lIns="164592" tIns="182880" rIns="164592" bIns="137160" rtlCol="0" anchor="ctr"/>
-          <a:lstStyle/>
-          <a:p>
-            <a:pPr algn="ctr">
+              <a:rPr sz="1400" b="0">
+                <a:solidFill>
+                  <a:srgbClr val="1E293B"/>
+                </a:solidFill>
+                <a:latin typeface="Calibri"/>
+              </a:rPr>
+              <a:t>The data ends on 9 December 2011, so recent cohorts have only a few months of history.</a:t>
+            </a:r>
+          </a:p>
+          <a:p>
+            <a:pPr>
               <a:spcAft>
-                <a:spcPts val="1000"/>
+                <a:spcPts val="800"/>
               </a:spcAft>
-              <a:defRPr sz="950" b="1">
-                <a:solidFill>
-                  <a:srgbClr val="D97706"/>
-                </a:solidFill>
-              </a:defRPr>
             </a:pPr>
             <a:r>
-              <a:t>4. REPRODUCIBLE ARTIFACTS</a:t>
-            </a:r>
-          </a:p>
-          <a:p>
-            <a:pPr>
-              <a:spcBef>
-                <a:spcPts val="800"/>
-              </a:spcBef>
-              <a:defRPr sz="860">
-                <a:solidFill>
-                  <a:srgbClr val="334155"/>
-                </a:solidFill>
-              </a:defRPr>
-            </a:pPr>
-            <a:r>
-              <a:t>• Production SQL scripts in `/sql/` directory.</a:t>
-            </a:r>
-          </a:p>
-          <a:p>
-            <a:pPr>
-              <a:spcBef>
-                <a:spcPts val="800"/>
-              </a:spcBef>
-              <a:defRPr sz="860">
-                <a:solidFill>
-                  <a:srgbClr val="334155"/>
-                </a:solidFill>
-              </a:defRPr>
-            </a:pPr>
-            <a:r>
-              <a:t>• Comprehensive Case Study &amp; KPI Scorecard in `README.md`.</a:t>
-            </a:r>
-          </a:p>
-          <a:p>
-            <a:pPr>
-              <a:spcBef>
-                <a:spcPts val="800"/>
-              </a:spcBef>
-              <a:defRPr sz="860">
-                <a:solidFill>
-                  <a:srgbClr val="334155"/>
-                </a:solidFill>
-              </a:defRPr>
-            </a:pPr>
-            <a:r>
-              <a:t>• High-resolution 300 DPI visualizations &amp; detailed PDF briefing.</a:t>
+              <a:rPr sz="1400" b="0">
+                <a:solidFill>
+                  <a:srgbClr val="1E293B"/>
+                </a:solidFill>
+                <a:latin typeface="Calibri"/>
+              </a:rPr>
+              <a:t>RFM segments depend on the chosen score thresholds; different cut-offs would move some customers between segments.</a:t>
             </a:r>
           </a:p>
         </p:txBody>
